--- a/services/web-app/resources/thesis-essay-decks/lesson-7-titles.pptx
+++ b/services/web-app/resources/thesis-essay-decks/lesson-7-titles.pptx
@@ -8761,7 +8761,7 @@
               <a:buNone/>
             </a:pPr>
             <a:r>
-              <a:rPr lang="en-US" sz="2600" dirty="0">
+              <a:rPr lang="en-US" sz="2300" dirty="0">
                 <a:solidFill>
                   <a:srgbClr val="3C3828"/>
                 </a:solidFill>
@@ -8771,7 +8771,7 @@
               </a:rPr>
               <a:t>Beyond the Boys’ Club: How Female Heroes Define the Avengers Legacy</a:t>
             </a:r>
-            <a:endParaRPr lang="en-US" sz="2600" dirty="0"/>
+            <a:endParaRPr lang="en-US" sz="2300" dirty="0"/>
           </a:p>
         </p:txBody>
       </p:sp>
@@ -8923,7 +8923,7 @@
               <a:buNone/>
             </a:pPr>
             <a:r>
-              <a:rPr lang="en-US" sz="2600" dirty="0">
+              <a:rPr lang="en-US" sz="2300" dirty="0">
                 <a:solidFill>
                   <a:srgbClr val="3C3828"/>
                 </a:solidFill>
@@ -8933,7 +8933,7 @@
               </a:rPr>
               <a:t>Bored in the USA: How Lack of Creativity in Schools Hurts Students and Teachers</a:t>
             </a:r>
-            <a:endParaRPr lang="en-US" sz="2600" dirty="0"/>
+            <a:endParaRPr lang="en-US" sz="2300" dirty="0"/>
           </a:p>
         </p:txBody>
       </p:sp>
@@ -9085,7 +9085,7 @@
               <a:buNone/>
             </a:pPr>
             <a:r>
-              <a:rPr lang="en-US" sz="2600" dirty="0">
+              <a:rPr lang="en-US" sz="2300" dirty="0">
                 <a:solidFill>
                   <a:srgbClr val="3C3828"/>
                 </a:solidFill>
@@ -9095,7 +9095,7 @@
               </a:rPr>
               <a:t>Unlocked and Loaded: How Easy Gun Access Puts Children at Risk</a:t>
             </a:r>
-            <a:endParaRPr lang="en-US" sz="2600" dirty="0"/>
+            <a:endParaRPr lang="en-US" sz="2300" dirty="0"/>
           </a:p>
         </p:txBody>
       </p:sp>

--- a/services/web-app/resources/thesis-essay-decks/lesson-7-titles.pptx
+++ b/services/web-app/resources/thesis-essay-decks/lesson-7-titles.pptx
@@ -2978,7 +2978,7 @@
       </p:sp>
       <p:pic>
         <p:nvPicPr>
-          <p:cNvPr id="7" name="Image 0" descr="/home/user/yawp/services/web-app/scripts/thesis-essay-decks/assets/icons/lightbulb.png">    </p:cNvPr>
+          <p:cNvPr id="7" name="Image 0" descr="lightbulb icon">    </p:cNvPr>
           <p:cNvPicPr>
             <a:picLocks noChangeAspect="1"/>
           </p:cNvPicPr>
@@ -3027,7 +3027,7 @@
       </p:sp>
       <p:pic>
         <p:nvPicPr>
-          <p:cNvPr id="9" name="Image 1" descr="/home/user/yawp/services/web-app/scripts/thesis-essay-decks/assets/icons/puzzle.png">    </p:cNvPr>
+          <p:cNvPr id="9" name="Image 1" descr="puzzle icon">    </p:cNvPr>
           <p:cNvPicPr>
             <a:picLocks noChangeAspect="1"/>
           </p:cNvPicPr>
@@ -3076,7 +3076,7 @@
       </p:sp>
       <p:pic>
         <p:nvPicPr>
-          <p:cNvPr id="11" name="Image 2" descr="/home/user/yawp/services/web-app/scripts/thesis-essay-decks/assets/icons/thumbs.png">    </p:cNvPr>
+          <p:cNvPr id="11" name="Image 2" descr="thumbs icon">    </p:cNvPr>
           <p:cNvPicPr>
             <a:picLocks noChangeAspect="1"/>
           </p:cNvPicPr>
@@ -3646,7 +3646,7 @@
       </p:sp>
       <p:pic>
         <p:nvPicPr>
-          <p:cNvPr id="5" name="Image 0" descr="/home/user/yawp/services/web-app/scripts/thesis-essay-decks/assets/icons/question.png">    </p:cNvPr>
+          <p:cNvPr id="5" name="Image 0" descr="question icon">    </p:cNvPr>
           <p:cNvPicPr>
             <a:picLocks noChangeAspect="1"/>
           </p:cNvPicPr>
@@ -4473,7 +4473,7 @@
       </p:sp>
       <p:pic>
         <p:nvPicPr>
-          <p:cNvPr id="5" name="Image 0" descr="/home/user/yawp/services/web-app/scripts/thesis-essay-decks/assets/icons/question.png">    </p:cNvPr>
+          <p:cNvPr id="5" name="Image 0" descr="question icon">    </p:cNvPr>
           <p:cNvPicPr>
             <a:picLocks noChangeAspect="1"/>
           </p:cNvPicPr>
@@ -5194,7 +5194,7 @@
       </p:sp>
       <p:pic>
         <p:nvPicPr>
-          <p:cNvPr id="5" name="Image 0" descr="/home/user/yawp/services/web-app/scripts/thesis-essay-decks/assets/icons/question.png">    </p:cNvPr>
+          <p:cNvPr id="5" name="Image 0" descr="question icon">    </p:cNvPr>
           <p:cNvPicPr>
             <a:picLocks noChangeAspect="1"/>
           </p:cNvPicPr>
@@ -5918,7 +5918,7 @@
       </p:sp>
       <p:pic>
         <p:nvPicPr>
-          <p:cNvPr id="5" name="Image 0" descr="/home/user/yawp/services/web-app/scripts/thesis-essay-decks/assets/icons/question.png">    </p:cNvPr>
+          <p:cNvPr id="5" name="Image 0" descr="question icon">    </p:cNvPr>
           <p:cNvPicPr>
             <a:picLocks noChangeAspect="1"/>
           </p:cNvPicPr>
@@ -6433,7 +6433,7 @@
       </p:sp>
       <p:pic>
         <p:nvPicPr>
-          <p:cNvPr id="5" name="Image 0" descr="/home/user/yawp/services/web-app/scripts/thesis-essay-decks/assets/icons/question.png">    </p:cNvPr>
+          <p:cNvPr id="5" name="Image 0" descr="question icon">    </p:cNvPr>
           <p:cNvPicPr>
             <a:picLocks noChangeAspect="1"/>
           </p:cNvPicPr>
@@ -6951,7 +6951,7 @@
       </p:sp>
       <p:pic>
         <p:nvPicPr>
-          <p:cNvPr id="5" name="Image 0" descr="/home/user/yawp/services/web-app/scripts/thesis-essay-decks/assets/icons/puzzle.png">    </p:cNvPr>
+          <p:cNvPr id="5" name="Image 0" descr="puzzle icon">    </p:cNvPr>
           <p:cNvPicPr>
             <a:picLocks noChangeAspect="1"/>
           </p:cNvPicPr>
@@ -7293,9 +7293,6 @@
               </a:rPr>
               <a:t>Answer it directly (</a:t>
             </a:r>
-            <a:pPr indent="0" marL="0">
-              <a:buNone/>
-            </a:pPr>
             <a:r>
               <a:rPr lang="en-US" sz="2200" dirty="0">
                 <a:solidFill>
@@ -7310,9 +7307,6 @@
               </a:rPr>
               <a:t>“Perhaps…”</a:t>
             </a:r>
-            <a:pPr indent="0" marL="0">
-              <a:buNone/>
-            </a:pPr>
             <a:r>
               <a:rPr lang="en-US" sz="2200" dirty="0">
                 <a:solidFill>
@@ -7998,7 +7992,7 @@
       </p:sp>
       <p:pic>
         <p:nvPicPr>
-          <p:cNvPr id="7" name="Image 0" descr="/home/user/yawp/services/web-app/scripts/thesis-essay-decks/assets/icons/lightbulb.png">    </p:cNvPr>
+          <p:cNvPr id="7" name="Image 0" descr="lightbulb icon">    </p:cNvPr>
           <p:cNvPicPr>
             <a:picLocks noChangeAspect="1"/>
           </p:cNvPicPr>
@@ -8047,7 +8041,7 @@
       </p:sp>
       <p:pic>
         <p:nvPicPr>
-          <p:cNvPr id="9" name="Image 1" descr="/home/user/yawp/services/web-app/scripts/thesis-essay-decks/assets/icons/puzzle.png">    </p:cNvPr>
+          <p:cNvPr id="9" name="Image 1" descr="puzzle icon">    </p:cNvPr>
           <p:cNvPicPr>
             <a:picLocks noChangeAspect="1"/>
           </p:cNvPicPr>
@@ -8096,7 +8090,7 @@
       </p:sp>
       <p:pic>
         <p:nvPicPr>
-          <p:cNvPr id="11" name="Image 2" descr="/home/user/yawp/services/web-app/scripts/thesis-essay-decks/assets/icons/thumbs.png">    </p:cNvPr>
+          <p:cNvPr id="11" name="Image 2" descr="thumbs icon">    </p:cNvPr>
           <p:cNvPicPr>
             <a:picLocks noChangeAspect="1"/>
           </p:cNvPicPr>
@@ -8471,7 +8465,7 @@
       </p:sp>
       <p:pic>
         <p:nvPicPr>
-          <p:cNvPr id="5" name="Image 0" descr="/home/user/yawp/services/web-app/scripts/thesis-essay-decks/assets/icons/pencil.png">    </p:cNvPr>
+          <p:cNvPr id="5" name="Image 0" descr="pencil icon">    </p:cNvPr>
           <p:cNvPicPr>
             <a:picLocks noChangeAspect="1"/>
           </p:cNvPicPr>
@@ -8578,9 +8572,6 @@
               </a:rPr>
               <a:t>Your title should be </a:t>
             </a:r>
-            <a:pPr indent="0" marL="0">
-              <a:buNone/>
-            </a:pPr>
             <a:r>
               <a:rPr lang="en-US" sz="2200" dirty="0">
                 <a:solidFill>
@@ -8595,9 +8586,6 @@
               </a:rPr>
               <a:t>informative, smart, and memorable.</a:t>
             </a:r>
-            <a:pPr indent="0" marL="0">
-              <a:buNone/>
-            </a:pPr>
             <a:r>
               <a:rPr lang="en-US" sz="2200" dirty="0">
                 <a:solidFill>
@@ -9386,12 +9374,6 @@
               </a:rPr>
               <a:t>Beyond the Boys’ Club</a:t>
             </a:r>
-            <a:pPr indent="0" marL="0">
-              <a:lnSpc>
-                <a:spcPct val="110000"/>
-              </a:lnSpc>
-              <a:buNone/>
-            </a:pPr>
             <a:r>
               <a:rPr lang="en-US" sz="2200" dirty="0">
                 <a:solidFill>
@@ -9403,12 +9385,6 @@
               </a:rPr>
               <a:t>: </a:t>
             </a:r>
-            <a:pPr indent="0" marL="0">
-              <a:lnSpc>
-                <a:spcPct val="110000"/>
-              </a:lnSpc>
-              <a:buNone/>
-            </a:pPr>
             <a:r>
               <a:rPr lang="en-US" sz="2200" b="1" dirty="0">
                 <a:solidFill>
@@ -9523,9 +9499,6 @@
               </a:rPr>
               <a:t>Left of the colon · creative, fun: </a:t>
             </a:r>
-            <a:pPr indent="0" marL="0">
-              <a:buNone/>
-            </a:pPr>
             <a:r>
               <a:rPr lang="en-US" sz="2200" dirty="0">
                 <a:solidFill>
@@ -9640,9 +9613,6 @@
               </a:rPr>
               <a:t>Right of the colon · clear, direct: </a:t>
             </a:r>
-            <a:pPr indent="0" marL="0">
-              <a:buNone/>
-            </a:pPr>
             <a:r>
               <a:rPr lang="en-US" sz="2200" dirty="0">
                 <a:solidFill>
@@ -9917,7 +9887,7 @@
       </p:sp>
       <p:pic>
         <p:nvPicPr>
-          <p:cNvPr id="7" name="Image 0" descr="/home/user/yawp/services/web-app/scripts/thesis-essay-decks/assets/icons/lightbulb.png">    </p:cNvPr>
+          <p:cNvPr id="7" name="Image 0" descr="lightbulb icon">    </p:cNvPr>
           <p:cNvPicPr>
             <a:picLocks noChangeAspect="1"/>
           </p:cNvPicPr>
@@ -9966,7 +9936,7 @@
       </p:sp>
       <p:pic>
         <p:nvPicPr>
-          <p:cNvPr id="9" name="Image 1" descr="/home/user/yawp/services/web-app/scripts/thesis-essay-decks/assets/icons/puzzle.png">    </p:cNvPr>
+          <p:cNvPr id="9" name="Image 1" descr="puzzle icon">    </p:cNvPr>
           <p:cNvPicPr>
             <a:picLocks noChangeAspect="1"/>
           </p:cNvPicPr>
@@ -10015,7 +9985,7 @@
       </p:sp>
       <p:pic>
         <p:nvPicPr>
-          <p:cNvPr id="11" name="Image 2" descr="/home/user/yawp/services/web-app/scripts/thesis-essay-decks/assets/icons/thumbs.png">    </p:cNvPr>
+          <p:cNvPr id="11" name="Image 2" descr="thumbs icon">    </p:cNvPr>
           <p:cNvPicPr>
             <a:picLocks noChangeAspect="1"/>
           </p:cNvPicPr>
@@ -10471,7 +10441,7 @@
       </p:sp>
       <p:pic>
         <p:nvPicPr>
-          <p:cNvPr id="7" name="Image 0" descr="/home/user/yawp/services/web-app/scripts/thesis-essay-decks/assets/icons/lightbulb.png">    </p:cNvPr>
+          <p:cNvPr id="7" name="Image 0" descr="lightbulb icon">    </p:cNvPr>
           <p:cNvPicPr>
             <a:picLocks noChangeAspect="1"/>
           </p:cNvPicPr>
@@ -10520,7 +10490,7 @@
       </p:sp>
       <p:pic>
         <p:nvPicPr>
-          <p:cNvPr id="9" name="Image 1" descr="/home/user/yawp/services/web-app/scripts/thesis-essay-decks/assets/icons/puzzle.png">    </p:cNvPr>
+          <p:cNvPr id="9" name="Image 1" descr="puzzle icon">    </p:cNvPr>
           <p:cNvPicPr>
             <a:picLocks noChangeAspect="1"/>
           </p:cNvPicPr>
@@ -10569,7 +10539,7 @@
       </p:sp>
       <p:pic>
         <p:nvPicPr>
-          <p:cNvPr id="11" name="Image 2" descr="/home/user/yawp/services/web-app/scripts/thesis-essay-decks/assets/icons/thumbs.png">    </p:cNvPr>
+          <p:cNvPr id="11" name="Image 2" descr="thumbs icon">    </p:cNvPr>
           <p:cNvPicPr>
             <a:picLocks noChangeAspect="1"/>
           </p:cNvPicPr>
@@ -10944,7 +10914,7 @@
       </p:sp>
       <p:pic>
         <p:nvPicPr>
-          <p:cNvPr id="5" name="Image 0" descr="/home/user/yawp/services/web-app/scripts/thesis-essay-decks/assets/icons/pencil.png">    </p:cNvPr>
+          <p:cNvPr id="5" name="Image 0" descr="pencil icon">    </p:cNvPr>
           <p:cNvPicPr>
             <a:picLocks noChangeAspect="1"/>
           </p:cNvPicPr>
@@ -11177,9 +11147,6 @@
               </a:rPr>
               <a:t>Clean up.</a:t>
             </a:r>
-            <a:pPr indent="0" marL="0">
-              <a:buNone/>
-            </a:pPr>
             <a:r>
               <a:rPr lang="en-US" sz="1800" dirty="0">
                 <a:solidFill>
@@ -11356,9 +11323,6 @@
               </a:rPr>
               <a:t>Title it.</a:t>
             </a:r>
-            <a:pPr indent="0" marL="0">
-              <a:buNone/>
-            </a:pPr>
             <a:r>
               <a:rPr lang="en-US" sz="1800" dirty="0">
                 <a:solidFill>
@@ -11370,9 +11334,6 @@
               </a:rPr>
               <a:t> Type your title on the first line, then use the toolbar to </a:t>
             </a:r>
-            <a:pPr indent="0" marL="0">
-              <a:buNone/>
-            </a:pPr>
             <a:r>
               <a:rPr lang="en-US" sz="1800" dirty="0">
                 <a:solidFill>
@@ -11387,9 +11348,6 @@
               </a:rPr>
               <a:t>center</a:t>
             </a:r>
-            <a:pPr indent="0" marL="0">
-              <a:buNone/>
-            </a:pPr>
             <a:r>
               <a:rPr lang="en-US" sz="1800" dirty="0">
                 <a:solidFill>
@@ -11401,9 +11359,6 @@
               </a:rPr>
               <a:t> and </a:t>
             </a:r>
-            <a:pPr indent="0" marL="0">
-              <a:buNone/>
-            </a:pPr>
             <a:r>
               <a:rPr lang="en-US" sz="1800" dirty="0">
                 <a:solidFill>
@@ -11418,9 +11373,6 @@
               </a:rPr>
               <a:t>italicize</a:t>
             </a:r>
-            <a:pPr indent="0" marL="0">
-              <a:buNone/>
-            </a:pPr>
             <a:r>
               <a:rPr lang="en-US" sz="1800" dirty="0">
                 <a:solidFill>
@@ -11597,9 +11549,6 @@
               </a:rPr>
               <a:t>Keep it simple.</a:t>
             </a:r>
-            <a:pPr indent="0" marL="0">
-              <a:buNone/>
-            </a:pPr>
             <a:r>
               <a:rPr lang="en-US" sz="1800" dirty="0">
                 <a:solidFill>
@@ -11776,9 +11725,6 @@
               </a:rPr>
               <a:t>Read it, then Submit.</a:t>
             </a:r>
-            <a:pPr indent="0" marL="0">
-              <a:buNone/>
-            </a:pPr>
             <a:r>
               <a:rPr lang="en-US" sz="1800" dirty="0">
                 <a:solidFill>
@@ -11790,9 +11736,6 @@
               </a:rPr>
               <a:t> Read it once from the top, ask the Tutor for feedback if you want, then click </a:t>
             </a:r>
-            <a:pPr indent="0" marL="0">
-              <a:buNone/>
-            </a:pPr>
             <a:r>
               <a:rPr lang="en-US" sz="1800" dirty="0">
                 <a:solidFill>
@@ -11998,7 +11941,7 @@
       </p:sp>
       <p:pic>
         <p:nvPicPr>
-          <p:cNvPr id="5" name="Image 0" descr="/home/user/yawp/services/web-app/scripts/thesis-essay-decks/assets/yawp-editor-final.png">    </p:cNvPr>
+          <p:cNvPr id="5" name="Image 0" descr="The YAWP! editor with a finished, titled essay.">    </p:cNvPr>
           <p:cNvPicPr>
             <a:picLocks noChangeAspect="1"/>
           </p:cNvPicPr>
@@ -12080,9 +12023,6 @@
               </a:rPr>
               <a:t>Title on the first line, </a:t>
             </a:r>
-            <a:pPr indent="0" marL="0">
-              <a:buNone/>
-            </a:pPr>
             <a:r>
               <a:rPr lang="en-US" sz="2000" dirty="0">
                 <a:solidFill>
@@ -12289,9 +12229,6 @@
               </a:rPr>
               <a:t>Then click </a:t>
             </a:r>
-            <a:pPr indent="0" marL="0">
-              <a:buNone/>
-            </a:pPr>
             <a:r>
               <a:rPr lang="en-US" sz="2000" dirty="0">
                 <a:solidFill>
@@ -12488,7 +12425,7 @@
       </p:sp>
       <p:pic>
         <p:nvPicPr>
-          <p:cNvPr id="5" name="Image 0" descr="/home/user/yawp/services/web-app/scripts/thesis-essay-decks/assets/icons/question.png">    </p:cNvPr>
+          <p:cNvPr id="5" name="Image 0" descr="question icon">    </p:cNvPr>
           <p:cNvPicPr>
             <a:picLocks noChangeAspect="1"/>
           </p:cNvPicPr>
@@ -13312,7 +13249,7 @@
       </p:sp>
       <p:pic>
         <p:nvPicPr>
-          <p:cNvPr id="5" name="Image 0" descr="/home/user/yawp/services/web-app/scripts/thesis-essay-decks/assets/icons/question.png">    </p:cNvPr>
+          <p:cNvPr id="5" name="Image 0" descr="question icon">    </p:cNvPr>
           <p:cNvPicPr>
             <a:picLocks noChangeAspect="1"/>
           </p:cNvPicPr>
@@ -14139,7 +14076,7 @@
       </p:sp>
       <p:pic>
         <p:nvPicPr>
-          <p:cNvPr id="5" name="Image 0" descr="/home/user/yawp/services/web-app/scripts/thesis-essay-decks/assets/icons/question.png">    </p:cNvPr>
+          <p:cNvPr id="5" name="Image 0" descr="question icon">    </p:cNvPr>
           <p:cNvPicPr>
             <a:picLocks noChangeAspect="1"/>
           </p:cNvPicPr>
@@ -14963,7 +14900,7 @@
       </p:sp>
       <p:pic>
         <p:nvPicPr>
-          <p:cNvPr id="5" name="Image 0" descr="/home/user/yawp/services/web-app/scripts/thesis-essay-decks/assets/icons/question.png">    </p:cNvPr>
+          <p:cNvPr id="5" name="Image 0" descr="question icon">    </p:cNvPr>
           <p:cNvPicPr>
             <a:picLocks noChangeAspect="1"/>
           </p:cNvPicPr>
@@ -15790,7 +15727,7 @@
       </p:sp>
       <p:pic>
         <p:nvPicPr>
-          <p:cNvPr id="5" name="Image 0" descr="/home/user/yawp/services/web-app/scripts/thesis-essay-decks/assets/icons/question.png">    </p:cNvPr>
+          <p:cNvPr id="5" name="Image 0" descr="question icon">    </p:cNvPr>
           <p:cNvPicPr>
             <a:picLocks noChangeAspect="1"/>
           </p:cNvPicPr>
@@ -16614,7 +16551,7 @@
       </p:sp>
       <p:pic>
         <p:nvPicPr>
-          <p:cNvPr id="5" name="Image 0" descr="/home/user/yawp/services/web-app/scripts/thesis-essay-decks/assets/icons/question.png">    </p:cNvPr>
+          <p:cNvPr id="5" name="Image 0" descr="question icon">    </p:cNvPr>
           <p:cNvPicPr>
             <a:picLocks noChangeAspect="1"/>
           </p:cNvPicPr>
@@ -17441,7 +17378,7 @@
       </p:sp>
       <p:pic>
         <p:nvPicPr>
-          <p:cNvPr id="5" name="Image 0" descr="/home/user/yawp/services/web-app/scripts/thesis-essay-decks/assets/icons/question.png">    </p:cNvPr>
+          <p:cNvPr id="5" name="Image 0" descr="question icon">    </p:cNvPr>
           <p:cNvPicPr>
             <a:picLocks noChangeAspect="1"/>
           </p:cNvPicPr>

--- a/services/web-app/resources/thesis-essay-decks/lesson-7-titles.pptx
+++ b/services/web-app/resources/thesis-essay-decks/lesson-7-titles.pptx
@@ -26,9 +26,11 @@
     <p:sldId id="274" r:id="rId20"/>
     <p:sldId id="275" r:id="rId21"/>
     <p:sldId id="276" r:id="rId22"/>
+    <p:sldId id="277" r:id="rId23"/>
+    <p:sldId id="278" r:id="rId24"/>
   </p:sldIdLst>
   <p:notesMasterIdLst>
-    <p:notesMasterId r:id="rId23"/>
+    <p:notesMasterId r:id="rId25"/>
   </p:notesMasterIdLst>
   <p:sldSz cx="12191695" cy="6858000"/>
   <p:notesSz cx="6858000" cy="12191695"/>
@@ -1402,7 +1404,7 @@
           <a:p>
             <a:r>
               <a:rPr lang="en-US" dirty="0"/>
-              <a:t>The last stretch: clean up the document, put the title on it, format it simply, and submit.</a:t>
+              <a:t>Give them about five minutes. On the Title Your Essay! step the Tutor walks them through the colon title and gives feedback on drafts. Have a few students read theirs aloud; vote on favorites if the room is into it. A title without a colon is fine too, as long as it is informative, smart and memorable.</a:t>
             </a:r>
             <a:endParaRPr lang="en-US" dirty="0"/>
           </a:p>
@@ -1578,7 +1580,7 @@
           <a:p>
             <a:r>
               <a:rPr lang="en-US" dirty="0"/>
-              <a:t>Brian: "Be normal with your formatting. This is not the place to be creative." Some students like to center everything or pick fancy fonts; don’t. If you have your own formatting standard, use it. Then celebrate: ask students for a reflection on the process, or have them highlight their favorite part of their essay and add a comment saying why. Share the work: within the class, with other teachers or administrators. (The YAWP! program can also publish a class’s essays as a printed book.)</a:t>
+              <a:t>The last stretch: clean up the document, put the title on it, format it simply, and submit.</a:t>
             </a:r>
             <a:endParaRPr lang="en-US" dirty="0"/>
           </a:p>
@@ -1666,7 +1668,7 @@
           <a:p>
             <a:r>
               <a:rPr lang="en-US" dirty="0"/>
-              <a:t>A finished essay in today’s YAWP! editor, ready to submit. They wrote a critical, thesis-driven essay that could stand up in any high school or college classroom. Good work!</a:t>
+              <a:t>Brian: "Be normal with your formatting. This is not the place to be creative." Some students like to center everything or pick fancy fonts; don’t. If you have your own formatting standard, use it. Then celebrate: ask students for a reflection on the process, or have them highlight their favorite part of their essay and add a comment saying why. Share the work: within the class, with other teachers or administrators. (The YAWP! program can also publish a class’s essays as a printed book.)</a:t>
             </a:r>
             <a:endParaRPr lang="en-US" dirty="0"/>
           </a:p>
@@ -1690,6 +1692,182 @@
             <a:fld id="{F7021451-1387-4CA6-816F-3879F97B5CBC}" type="slidenum">
               <a:rPr lang="en-US"/>
               <a:t>21</a:t>
+            </a:fld>
+            <a:endParaRPr lang="en-US"/>
+          </a:p>
+        </p:txBody>
+      </p:sp>
+    </p:spTree>
+    <p:extLst>
+      <p:ext uri="{BB962C8B-B14F-4D97-AF65-F5344CB8AC3E}">
+        <p14:creationId xmlns:p14="http://schemas.microsoft.com/office/powerpoint/2010/main" val="1024086991"/>
+      </p:ext>
+    </p:extLst>
+  </p:cSld>
+  <p:clrMapOvr>
+    <a:masterClrMapping/>
+  </p:clrMapOvr>
+</p:notes>
+</file>
+
+<file path=ppt/notesSlides/notesSlide22.xml><?xml version="1.0" encoding="utf-8"?>
+<p:notes xmlns:a="http://schemas.openxmlformats.org/drawingml/2006/main" xmlns:r="http://schemas.openxmlformats.org/officeDocument/2006/relationships" xmlns:p="http://schemas.openxmlformats.org/presentationml/2006/main">
+  <p:cSld>
+    <p:spTree>
+      <p:nvGrpSpPr>
+        <p:cNvPr id="1" name=""/>
+        <p:cNvGrpSpPr/>
+        <p:nvPr/>
+      </p:nvGrpSpPr>
+      <p:grpSpPr>
+        <a:xfrm>
+          <a:off x="0" y="0"/>
+          <a:ext cx="0" cy="0"/>
+          <a:chOff x="0" y="0"/>
+          <a:chExt cx="0" cy="0"/>
+        </a:xfrm>
+      </p:grpSpPr>
+      <p:sp>
+        <p:nvSpPr>
+          <p:cNvPr id="2" name="Slide Image Placeholder 1"/>
+          <p:cNvSpPr>
+            <a:spLocks noGrp="1" noRot="1" noChangeAspect="1"/>
+          </p:cNvSpPr>
+          <p:nvPr>
+            <p:ph type="sldImg"/>
+          </p:nvPr>
+        </p:nvSpPr>
+        <p:spPr/>
+      </p:sp>
+      <p:sp>
+        <p:nvSpPr>
+          <p:cNvPr id="3" name="Notes Placeholder 2"/>
+          <p:cNvSpPr>
+            <a:spLocks noGrp="1"/>
+          </p:cNvSpPr>
+          <p:nvPr>
+            <p:ph type="body" idx="1"/>
+          </p:nvPr>
+        </p:nvSpPr>
+        <p:spPr/>
+        <p:txBody>
+          <a:bodyPr/>
+          <a:lstStyle/>
+          <a:p>
+            <a:r>
+              <a:rPr lang="en-US" dirty="0"/>
+              <a:t>A finished essay in today’s YAWP! editor, ready to submit.</a:t>
+            </a:r>
+            <a:endParaRPr lang="en-US" dirty="0"/>
+          </a:p>
+        </p:txBody>
+      </p:sp>
+      <p:sp>
+        <p:nvSpPr>
+          <p:cNvPr id="4" name="Slide Number Placeholder 3"/>
+          <p:cNvSpPr>
+            <a:spLocks noGrp="1"/>
+          </p:cNvSpPr>
+          <p:nvPr>
+            <p:ph type="sldNum" sz="quarter" idx="10"/>
+          </p:nvPr>
+        </p:nvSpPr>
+        <p:spPr/>
+        <p:txBody>
+          <a:bodyPr/>
+          <a:lstStyle/>
+          <a:p>
+            <a:fld id="{F7021451-1387-4CA6-816F-3879F97B5CBC}" type="slidenum">
+              <a:rPr lang="en-US"/>
+              <a:t>22</a:t>
+            </a:fld>
+            <a:endParaRPr lang="en-US"/>
+          </a:p>
+        </p:txBody>
+      </p:sp>
+    </p:spTree>
+    <p:extLst>
+      <p:ext uri="{BB962C8B-B14F-4D97-AF65-F5344CB8AC3E}">
+        <p14:creationId xmlns:p14="http://schemas.microsoft.com/office/powerpoint/2010/main" val="1024086991"/>
+      </p:ext>
+    </p:extLst>
+  </p:cSld>
+  <p:clrMapOvr>
+    <a:masterClrMapping/>
+  </p:clrMapOvr>
+</p:notes>
+</file>
+
+<file path=ppt/notesSlides/notesSlide23.xml><?xml version="1.0" encoding="utf-8"?>
+<p:notes xmlns:a="http://schemas.openxmlformats.org/drawingml/2006/main" xmlns:r="http://schemas.openxmlformats.org/officeDocument/2006/relationships" xmlns:p="http://schemas.openxmlformats.org/presentationml/2006/main">
+  <p:cSld>
+    <p:spTree>
+      <p:nvGrpSpPr>
+        <p:cNvPr id="1" name=""/>
+        <p:cNvGrpSpPr/>
+        <p:nvPr/>
+      </p:nvGrpSpPr>
+      <p:grpSpPr>
+        <a:xfrm>
+          <a:off x="0" y="0"/>
+          <a:ext cx="0" cy="0"/>
+          <a:chOff x="0" y="0"/>
+          <a:chExt cx="0" cy="0"/>
+        </a:xfrm>
+      </p:grpSpPr>
+      <p:sp>
+        <p:nvSpPr>
+          <p:cNvPr id="2" name="Slide Image Placeholder 1"/>
+          <p:cNvSpPr>
+            <a:spLocks noGrp="1" noRot="1" noChangeAspect="1"/>
+          </p:cNvSpPr>
+          <p:nvPr>
+            <p:ph type="sldImg"/>
+          </p:nvPr>
+        </p:nvSpPr>
+        <p:spPr/>
+      </p:sp>
+      <p:sp>
+        <p:nvSpPr>
+          <p:cNvPr id="3" name="Notes Placeholder 2"/>
+          <p:cNvSpPr>
+            <a:spLocks noGrp="1"/>
+          </p:cNvSpPr>
+          <p:nvPr>
+            <p:ph type="body" idx="1"/>
+          </p:nvPr>
+        </p:nvSpPr>
+        <p:spPr/>
+        <p:txBody>
+          <a:bodyPr/>
+          <a:lstStyle/>
+          <a:p>
+            <a:r>
+              <a:rPr lang="en-US" dirty="0"/>
+              <a:t>They wrote a critical, thesis-driven essay that could stand up in any high school or college classroom. Good work! Celebrate it: a reflection on the process, a favorite line read aloud, or sharing the essays beyond the class.</a:t>
+            </a:r>
+            <a:endParaRPr lang="en-US" dirty="0"/>
+          </a:p>
+        </p:txBody>
+      </p:sp>
+      <p:sp>
+        <p:nvSpPr>
+          <p:cNvPr id="4" name="Slide Number Placeholder 3"/>
+          <p:cNvSpPr>
+            <a:spLocks noGrp="1"/>
+          </p:cNvSpPr>
+          <p:nvPr>
+            <p:ph type="sldNum" sz="quarter" idx="10"/>
+          </p:nvPr>
+        </p:nvSpPr>
+        <p:spPr/>
+        <p:txBody>
+          <a:bodyPr/>
+          <a:lstStyle/>
+          <a:p>
+            <a:fld id="{F7021451-1387-4CA6-816F-3879F97B5CBC}" type="slidenum">
+              <a:rPr lang="en-US"/>
+              <a:t>23</a:t>
             </a:fld>
             <a:endParaRPr lang="en-US"/>
           </a:p>
@@ -3613,7 +3791,7 @@
                 <a:ea typeface="Georgia" pitchFamily="34" charset="-122"/>
                 <a:cs typeface="Georgia" pitchFamily="34" charset="-120"/>
               </a:rPr>
-              <a:t>Your introduction paragraph’s MAIN function is to:</a:t>
+              <a:t>Your introduction paragraph’s MAIN function is to:</a:t>
             </a:r>
             <a:endParaRPr lang="en-US" sz="3000" dirty="0"/>
           </a:p>
@@ -4440,7 +4618,7 @@
                 <a:ea typeface="Georgia" pitchFamily="34" charset="-122"/>
                 <a:cs typeface="Georgia" pitchFamily="34" charset="-120"/>
               </a:rPr>
-              <a:t>Which of the following would probably NOT show up in your body paragraphs?</a:t>
+              <a:t>Which of the following would probably NOT show up in your body paragraphs?</a:t>
             </a:r>
             <a:endParaRPr lang="en-US" sz="3000" dirty="0"/>
           </a:p>
@@ -5161,7 +5339,7 @@
                 <a:ea typeface="Georgia" pitchFamily="34" charset="-122"/>
                 <a:cs typeface="Georgia" pitchFamily="34" charset="-120"/>
               </a:rPr>
-              <a:t>Which of the following would probably NOT show up in your body paragraphs?</a:t>
+              <a:t>Which of the following would probably NOT show up in your body paragraphs?</a:t>
             </a:r>
             <a:endParaRPr lang="en-US" sz="3000" dirty="0"/>
           </a:p>
@@ -5885,7 +6063,7 @@
                 <a:ea typeface="Georgia" pitchFamily="34" charset="-122"/>
                 <a:cs typeface="Georgia" pitchFamily="34" charset="-120"/>
               </a:rPr>
-              <a:t>True or False: a good conclusion restates your thesis and main ideas.</a:t>
+              <a:t>True or False: a good conclusion restates your thesis and main ideas.</a:t>
             </a:r>
             <a:endParaRPr lang="en-US" sz="3000" dirty="0"/>
           </a:p>
@@ -6400,7 +6578,7 @@
                 <a:ea typeface="Georgia" pitchFamily="34" charset="-122"/>
                 <a:cs typeface="Georgia" pitchFamily="34" charset="-120"/>
               </a:rPr>
-              <a:t>True or False: a good conclusion restates your thesis and main ideas.</a:t>
+              <a:t>True or False: a good conclusion restates your thesis and main ideas.</a:t>
             </a:r>
             <a:endParaRPr lang="en-US" sz="3000" dirty="0"/>
           </a:p>
@@ -6918,7 +7096,7 @@
                 <a:ea typeface="Georgia" pitchFamily="34" charset="-122"/>
                 <a:cs typeface="Georgia" pitchFamily="34" charset="-120"/>
               </a:rPr>
-              <a:t>A conclusion that works</a:t>
+              <a:t>A conclusion that works</a:t>
             </a:r>
             <a:endParaRPr lang="en-US" sz="3600" dirty="0"/>
           </a:p>
@@ -7107,7 +7285,7 @@
               <a:buNone/>
             </a:pPr>
             <a:r>
-              <a:rPr lang="en-US" sz="1600" b="1" dirty="0">
+              <a:rPr lang="en-US" sz="1800" b="1" dirty="0">
                 <a:solidFill>
                   <a:srgbClr val="FFFEFA"/>
                 </a:solidFill>
@@ -7117,7 +7295,7 @@
               </a:rPr>
               <a:t>1</a:t>
             </a:r>
-            <a:endParaRPr lang="en-US" sz="1600" dirty="0"/>
+            <a:endParaRPr lang="en-US" sz="1800" dirty="0"/>
           </a:p>
         </p:txBody>
       </p:sp>
@@ -7146,7 +7324,7 @@
               <a:buNone/>
             </a:pPr>
             <a:r>
-              <a:rPr lang="en-US" sz="2200" dirty="0">
+              <a:rPr lang="en-US" sz="2400" dirty="0">
                 <a:solidFill>
                   <a:srgbClr val="3C3828"/>
                 </a:solidFill>
@@ -7156,7 +7334,7 @@
               </a:rPr>
               <a:t>Rhetorical question</a:t>
             </a:r>
-            <a:endParaRPr lang="en-US" sz="2200" dirty="0"/>
+            <a:endParaRPr lang="en-US" sz="2400" dirty="0"/>
           </a:p>
         </p:txBody>
       </p:sp>
@@ -7244,7 +7422,7 @@
               <a:buNone/>
             </a:pPr>
             <a:r>
-              <a:rPr lang="en-US" sz="1600" b="1" dirty="0">
+              <a:rPr lang="en-US" sz="1800" b="1" dirty="0">
                 <a:solidFill>
                   <a:srgbClr val="FFFEFA"/>
                 </a:solidFill>
@@ -7254,7 +7432,7 @@
               </a:rPr>
               <a:t>2</a:t>
             </a:r>
-            <a:endParaRPr lang="en-US" sz="1600" dirty="0"/>
+            <a:endParaRPr lang="en-US" sz="1800" dirty="0"/>
           </a:p>
         </p:txBody>
       </p:sp>
@@ -7283,7 +7461,7 @@
               <a:buNone/>
             </a:pPr>
             <a:r>
-              <a:rPr lang="en-US" sz="2200" dirty="0">
+              <a:rPr lang="en-US" sz="2400" dirty="0">
                 <a:solidFill>
                   <a:srgbClr val="3C3828"/>
                 </a:solidFill>
@@ -7294,7 +7472,7 @@
               <a:t>Answer it directly (</a:t>
             </a:r>
             <a:r>
-              <a:rPr lang="en-US" sz="2200" dirty="0">
+              <a:rPr lang="en-US" sz="2400" dirty="0">
                 <a:solidFill>
                   <a:srgbClr val="3C3828"/>
                 </a:solidFill>
@@ -7308,7 +7486,7 @@
               <a:t>“Perhaps…”</a:t>
             </a:r>
             <a:r>
-              <a:rPr lang="en-US" sz="2200" dirty="0">
+              <a:rPr lang="en-US" sz="2400" dirty="0">
                 <a:solidFill>
                   <a:srgbClr val="3C3828"/>
                 </a:solidFill>
@@ -7318,7 +7496,7 @@
               </a:rPr>
               <a:t>)</a:t>
             </a:r>
-            <a:endParaRPr lang="en-US" sz="2200" dirty="0"/>
+            <a:endParaRPr lang="en-US" sz="2400" dirty="0"/>
           </a:p>
         </p:txBody>
       </p:sp>
@@ -7406,7 +7584,7 @@
               <a:buNone/>
             </a:pPr>
             <a:r>
-              <a:rPr lang="en-US" sz="1600" b="1" dirty="0">
+              <a:rPr lang="en-US" sz="1800" b="1" dirty="0">
                 <a:solidFill>
                   <a:srgbClr val="FFFEFA"/>
                 </a:solidFill>
@@ -7416,7 +7594,7 @@
               </a:rPr>
               <a:t>3</a:t>
             </a:r>
-            <a:endParaRPr lang="en-US" sz="1600" dirty="0"/>
+            <a:endParaRPr lang="en-US" sz="1800" dirty="0"/>
           </a:p>
         </p:txBody>
       </p:sp>
@@ -7445,7 +7623,7 @@
               <a:buNone/>
             </a:pPr>
             <a:r>
-              <a:rPr lang="en-US" sz="2200" dirty="0">
+              <a:rPr lang="en-US" sz="2400" dirty="0">
                 <a:solidFill>
                   <a:srgbClr val="3C3828"/>
                 </a:solidFill>
@@ -7455,7 +7633,7 @@
               </a:rPr>
               <a:t>2 sentences of opinion or analysis</a:t>
             </a:r>
-            <a:endParaRPr lang="en-US" sz="2200" dirty="0"/>
+            <a:endParaRPr lang="en-US" sz="2400" dirty="0"/>
           </a:p>
         </p:txBody>
       </p:sp>
@@ -7543,7 +7721,7 @@
               <a:buNone/>
             </a:pPr>
             <a:r>
-              <a:rPr lang="en-US" sz="1600" b="1" dirty="0">
+              <a:rPr lang="en-US" sz="1800" b="1" dirty="0">
                 <a:solidFill>
                   <a:srgbClr val="FFFEFA"/>
                 </a:solidFill>
@@ -7553,7 +7731,7 @@
               </a:rPr>
               <a:t>4</a:t>
             </a:r>
-            <a:endParaRPr lang="en-US" sz="1600" dirty="0"/>
+            <a:endParaRPr lang="en-US" sz="1800" dirty="0"/>
           </a:p>
         </p:txBody>
       </p:sp>
@@ -7582,7 +7760,7 @@
               <a:buNone/>
             </a:pPr>
             <a:r>
-              <a:rPr lang="en-US" sz="2200" dirty="0">
+              <a:rPr lang="en-US" sz="2400" dirty="0">
                 <a:solidFill>
                   <a:srgbClr val="3C3828"/>
                 </a:solidFill>
@@ -7592,7 +7770,7 @@
               </a:rPr>
               <a:t>Supporting quote (if working with a text)</a:t>
             </a:r>
-            <a:endParaRPr lang="en-US" sz="2200" dirty="0"/>
+            <a:endParaRPr lang="en-US" sz="2400" dirty="0"/>
           </a:p>
         </p:txBody>
       </p:sp>
@@ -7680,7 +7858,7 @@
               <a:buNone/>
             </a:pPr>
             <a:r>
-              <a:rPr lang="en-US" sz="1600" b="1" dirty="0">
+              <a:rPr lang="en-US" sz="1800" b="1" dirty="0">
                 <a:solidFill>
                   <a:srgbClr val="FFFEFA"/>
                 </a:solidFill>
@@ -7690,7 +7868,7 @@
               </a:rPr>
               <a:t>5</a:t>
             </a:r>
-            <a:endParaRPr lang="en-US" sz="1600" dirty="0"/>
+            <a:endParaRPr lang="en-US" sz="1800" dirty="0"/>
           </a:p>
         </p:txBody>
       </p:sp>
@@ -7719,7 +7897,7 @@
               <a:buNone/>
             </a:pPr>
             <a:r>
-              <a:rPr lang="en-US" sz="2200" dirty="0">
+              <a:rPr lang="en-US" sz="2400" dirty="0">
                 <a:solidFill>
                   <a:srgbClr val="3C3828"/>
                 </a:solidFill>
@@ -7729,7 +7907,7 @@
               </a:rPr>
               <a:t>Final, concluding sentence: the big, final point</a:t>
             </a:r>
-            <a:endParaRPr lang="en-US" sz="2200" dirty="0"/>
+            <a:endParaRPr lang="en-US" sz="2400" dirty="0"/>
           </a:p>
         </p:txBody>
       </p:sp>
@@ -8749,7 +8927,7 @@
               <a:buNone/>
             </a:pPr>
             <a:r>
-              <a:rPr lang="en-US" sz="2300" dirty="0">
+              <a:rPr lang="en-US" sz="2200" dirty="0">
                 <a:solidFill>
                   <a:srgbClr val="3C3828"/>
                 </a:solidFill>
@@ -8759,7 +8937,7 @@
               </a:rPr>
               <a:t>Beyond the Boys’ Club: How Female Heroes Define the Avengers Legacy</a:t>
             </a:r>
-            <a:endParaRPr lang="en-US" sz="2300" dirty="0"/>
+            <a:endParaRPr lang="en-US" sz="2200" dirty="0"/>
           </a:p>
         </p:txBody>
       </p:sp>
@@ -8911,7 +9089,7 @@
               <a:buNone/>
             </a:pPr>
             <a:r>
-              <a:rPr lang="en-US" sz="2300" dirty="0">
+              <a:rPr lang="en-US" sz="2200" dirty="0">
                 <a:solidFill>
                   <a:srgbClr val="3C3828"/>
                 </a:solidFill>
@@ -8921,7 +9099,7 @@
               </a:rPr>
               <a:t>Bored in the USA: How Lack of Creativity in Schools Hurts Students and Teachers</a:t>
             </a:r>
-            <a:endParaRPr lang="en-US" sz="2300" dirty="0"/>
+            <a:endParaRPr lang="en-US" sz="2200" dirty="0"/>
           </a:p>
         </p:txBody>
       </p:sp>
@@ -9073,7 +9251,7 @@
               <a:buNone/>
             </a:pPr>
             <a:r>
-              <a:rPr lang="en-US" sz="2300" dirty="0">
+              <a:rPr lang="en-US" sz="2200" dirty="0">
                 <a:solidFill>
                   <a:srgbClr val="3C3828"/>
                 </a:solidFill>
@@ -9083,7 +9261,7 @@
               </a:rPr>
               <a:t>Unlocked and Loaded: How Easy Gun Access Puts Children at Risk</a:t>
             </a:r>
-            <a:endParaRPr lang="en-US" sz="2300" dirty="0"/>
+            <a:endParaRPr lang="en-US" sz="2200" dirty="0"/>
           </a:p>
         </p:txBody>
       </p:sp>
@@ -9232,7 +9410,7 @@
                 <a:ea typeface="Georgia" pitchFamily="34" charset="-122"/>
                 <a:cs typeface="Georgia" pitchFamily="34" charset="-120"/>
               </a:rPr>
-              <a:t>Two halves, one great title</a:t>
+              <a:t>Two halves, one great title</a:t>
             </a:r>
             <a:endParaRPr lang="en-US" sz="3600" dirty="0"/>
           </a:p>
@@ -9450,7 +9628,7 @@
               <a:buNone/>
             </a:pPr>
             <a:r>
-              <a:rPr lang="en-US" sz="1600" b="1" dirty="0">
+              <a:rPr lang="en-US" sz="1800" b="1" dirty="0">
                 <a:solidFill>
                   <a:srgbClr val="FFFEFA"/>
                 </a:solidFill>
@@ -9460,7 +9638,7 @@
               </a:rPr>
               <a:t>1</a:t>
             </a:r>
-            <a:endParaRPr lang="en-US" sz="1600" dirty="0"/>
+            <a:endParaRPr lang="en-US" sz="1800" dirty="0"/>
           </a:p>
         </p:txBody>
       </p:sp>
@@ -9564,7 +9742,7 @@
               <a:buNone/>
             </a:pPr>
             <a:r>
-              <a:rPr lang="en-US" sz="1600" b="1" dirty="0">
+              <a:rPr lang="en-US" sz="1800" b="1" dirty="0">
                 <a:solidFill>
                   <a:srgbClr val="FFFEFA"/>
                 </a:solidFill>
@@ -9574,7 +9752,7 @@
               </a:rPr>
               <a:t>2</a:t>
             </a:r>
-            <a:endParaRPr lang="en-US" sz="1600" dirty="0"/>
+            <a:endParaRPr lang="en-US" sz="1800" dirty="0"/>
           </a:p>
         </p:txBody>
       </p:sp>
@@ -9687,13 +9865,6 @@
 <file path=ppt/slides/slide19.xml><?xml version="1.0" encoding="utf-8"?>
 <p:sld xmlns:a="http://schemas.openxmlformats.org/drawingml/2006/main" xmlns:r="http://schemas.openxmlformats.org/officeDocument/2006/relationships" xmlns:p="http://schemas.openxmlformats.org/presentationml/2006/main">
   <p:cSld name="Slide 19">
-    <p:bg>
-      <p:bgPr>
-        <a:solidFill>
-          <a:srgbClr val="C8EEF0"/>
-        </a:solidFill>
-      </p:bgPr>
-    </p:bg>
     <p:spTree>
       <p:nvGrpSpPr>
         <p:cNvPr id="1" name=""/>
@@ -9710,97 +9881,65 @@
       </p:grpSpPr>
       <p:sp>
         <p:nvSpPr>
-          <p:cNvPr id="2" name="Shape 0"/>
-          <p:cNvSpPr/>
-          <p:nvPr/>
-        </p:nvSpPr>
-        <p:spPr>
-          <a:xfrm>
-            <a:off x="3626968" y="960120"/>
-            <a:ext cx="4937760" cy="4937760"/>
-          </a:xfrm>
-          <a:prstGeom prst="ellipse">
-            <a:avLst/>
-          </a:prstGeom>
-          <a:solidFill>
-            <a:srgbClr val="FFFEFA"/>
-          </a:solidFill>
-          <a:ln w="12700">
-            <a:solidFill>
-              <a:srgbClr val="FFFEFA"/>
-            </a:solidFill>
-            <a:prstDash val="solid"/>
-          </a:ln>
-          <a:effectLst>
-            <a:outerShdw sx="100000" sy="100000" kx="0" ky="0" algn="bl" rotWithShape="0" blurRad="203200" dist="50800" dir="5400000">
-              <a:srgbClr val="3C3828">
-                <a:alpha val="14000"/>
-              </a:srgbClr>
-            </a:outerShdw>
-          </a:effectLst>
-        </p:spPr>
-      </p:sp>
-      <p:sp>
-        <p:nvSpPr>
-          <p:cNvPr id="3" name="Text 1"/>
-          <p:cNvSpPr/>
-          <p:nvPr/>
-        </p:nvSpPr>
-        <p:spPr>
-          <a:xfrm>
-            <a:off x="3626968" y="2286000"/>
-            <a:ext cx="4937760" cy="457200"/>
-          </a:xfrm>
-          <a:prstGeom prst="rect">
-            <a:avLst/>
-          </a:prstGeom>
-          <a:noFill/>
-          <a:ln/>
-        </p:spPr>
-        <p:txBody>
-          <a:bodyPr wrap="square" lIns="0" tIns="0" rIns="0" bIns="0" rtlCol="0" anchor="ctr"/>
-          <a:lstStyle/>
-          <a:p>
-            <a:pPr algn="ctr" indent="0" marL="0">
-              <a:buNone/>
-            </a:pPr>
-            <a:r>
-              <a:rPr lang="en-US" sz="1600" b="1" spc="300" kern="0" dirty="0">
-                <a:solidFill>
-                  <a:srgbClr val="02BDC7"/>
+          <p:cNvPr id="2" name="Text 0"/>
+          <p:cNvSpPr/>
+          <p:nvPr/>
+        </p:nvSpPr>
+        <p:spPr>
+          <a:xfrm>
+            <a:off x="685800" y="502920"/>
+            <a:ext cx="9357055" cy="320040"/>
+          </a:xfrm>
+          <a:prstGeom prst="rect">
+            <a:avLst/>
+          </a:prstGeom>
+          <a:noFill/>
+          <a:ln/>
+        </p:spPr>
+        <p:txBody>
+          <a:bodyPr wrap="square" lIns="0" tIns="0" rIns="0" bIns="0" rtlCol="0" anchor="b"/>
+          <a:lstStyle/>
+          <a:p>
+            <a:pPr indent="0" marL="0">
+              <a:buNone/>
+            </a:pPr>
+            <a:r>
+              <a:rPr lang="en-US" sz="1200" b="1" spc="200" kern="0" dirty="0">
+                <a:solidFill>
+                  <a:srgbClr val="FC4540"/>
                 </a:solidFill>
                 <a:latin typeface="Consolas" pitchFamily="34" charset="0"/>
                 <a:ea typeface="Consolas" pitchFamily="34" charset="-122"/>
                 <a:cs typeface="Consolas" pitchFamily="34" charset="-120"/>
               </a:rPr>
-              <a:t>FINISH</a:t>
-            </a:r>
-            <a:endParaRPr lang="en-US" sz="1600" dirty="0"/>
-          </a:p>
-        </p:txBody>
-      </p:sp>
-      <p:sp>
-        <p:nvSpPr>
-          <p:cNvPr id="4" name="Text 2"/>
-          <p:cNvSpPr/>
-          <p:nvPr/>
-        </p:nvSpPr>
-        <p:spPr>
-          <a:xfrm>
-            <a:off x="3626968" y="2743200"/>
-            <a:ext cx="4937760" cy="1143000"/>
-          </a:xfrm>
-          <a:prstGeom prst="rect">
-            <a:avLst/>
-          </a:prstGeom>
-          <a:noFill/>
-          <a:ln/>
-        </p:spPr>
-        <p:txBody>
-          <a:bodyPr wrap="square" lIns="0" tIns="0" rIns="0" bIns="0" rtlCol="0" anchor="ctr"/>
-          <a:lstStyle/>
-          <a:p>
-            <a:pPr algn="ctr" indent="0" marL="0">
+              <a:t>YOUR TURN</a:t>
+            </a:r>
+            <a:endParaRPr lang="en-US" sz="1200" dirty="0"/>
+          </a:p>
+        </p:txBody>
+      </p:sp>
+      <p:sp>
+        <p:nvSpPr>
+          <p:cNvPr id="3" name="Text 1"/>
+          <p:cNvSpPr/>
+          <p:nvPr/>
+        </p:nvSpPr>
+        <p:spPr>
+          <a:xfrm>
+            <a:off x="685800" y="868680"/>
+            <a:ext cx="9357055" cy="960120"/>
+          </a:xfrm>
+          <a:prstGeom prst="rect">
+            <a:avLst/>
+          </a:prstGeom>
+          <a:noFill/>
+          <a:ln/>
+        </p:spPr>
+        <p:txBody>
+          <a:bodyPr wrap="square" lIns="0" tIns="0" rIns="0" bIns="0" rtlCol="0" anchor="t"/>
+          <a:lstStyle/>
+          <a:p>
+            <a:pPr indent="0" marL="0">
               <a:buNone/>
             </a:pPr>
             <a:r>
@@ -9808,14 +9947,11 @@
                 <a:solidFill>
                   <a:srgbClr val="3C3828"/>
                 </a:solidFill>
-                <a:highlight>
-                  <a:srgbClr val="FFE14D"/>
-                </a:highlight>
                 <a:latin typeface="Georgia" pitchFamily="34" charset="0"/>
                 <a:ea typeface="Georgia" pitchFamily="34" charset="-122"/>
                 <a:cs typeface="Georgia" pitchFamily="34" charset="-120"/>
               </a:rPr>
-              <a:t>Putting it All Together</a:t>
+              <a:t>Write your title</a:t>
             </a:r>
             <a:endParaRPr lang="en-US" sz="3600" dirty="0"/>
           </a:p>
@@ -9823,63 +9959,24 @@
       </p:sp>
       <p:sp>
         <p:nvSpPr>
-          <p:cNvPr id="5" name="Text 3"/>
-          <p:cNvSpPr/>
-          <p:nvPr/>
-        </p:nvSpPr>
-        <p:spPr>
-          <a:xfrm>
-            <a:off x="4358488" y="3977640"/>
-            <a:ext cx="3474720" cy="822960"/>
-          </a:xfrm>
-          <a:prstGeom prst="rect">
-            <a:avLst/>
-          </a:prstGeom>
-          <a:noFill/>
-          <a:ln/>
-        </p:spPr>
-        <p:txBody>
-          <a:bodyPr wrap="square" lIns="0" tIns="0" rIns="0" bIns="0" rtlCol="0" anchor="t"/>
-          <a:lstStyle/>
-          <a:p>
-            <a:pPr algn="ctr" indent="0" marL="0">
-              <a:buNone/>
-            </a:pPr>
-            <a:r>
-              <a:rPr lang="en-US" sz="1800" i="1" dirty="0">
-                <a:solidFill>
-                  <a:srgbClr val="7E7C78"/>
-                </a:solidFill>
-                <a:latin typeface="Calibri" pitchFamily="34" charset="0"/>
-                <a:ea typeface="Calibri" pitchFamily="34" charset="-122"/>
-                <a:cs typeface="Calibri" pitchFamily="34" charset="-120"/>
-              </a:rPr>
-              <a:t>Clean up, title, submit, celebrate.</a:t>
-            </a:r>
-            <a:endParaRPr lang="en-US" sz="1800" dirty="0"/>
-          </a:p>
-        </p:txBody>
-      </p:sp>
-      <p:sp>
-        <p:nvSpPr>
-          <p:cNvPr id="6" name="Shape 4"/>
-          <p:cNvSpPr/>
-          <p:nvPr/>
-        </p:nvSpPr>
-        <p:spPr>
-          <a:xfrm>
-            <a:off x="7558888" y="640080"/>
-            <a:ext cx="1417320" cy="1417320"/>
+          <p:cNvPr id="4" name="Shape 2"/>
+          <p:cNvSpPr/>
+          <p:nvPr/>
+        </p:nvSpPr>
+        <p:spPr>
+          <a:xfrm>
+            <a:off x="10637215" y="457200"/>
+            <a:ext cx="868680" cy="868680"/>
           </a:xfrm>
           <a:prstGeom prst="ellipse">
             <a:avLst/>
           </a:prstGeom>
           <a:solidFill>
-            <a:srgbClr val="FFB600"/>
+            <a:srgbClr val="FC4540"/>
           </a:solidFill>
           <a:ln w="12700">
             <a:solidFill>
-              <a:srgbClr val="FFB600"/>
+              <a:srgbClr val="FC4540"/>
             </a:solidFill>
             <a:prstDash val="solid"/>
           </a:ln>
@@ -9887,7 +9984,7 @@
       </p:sp>
       <p:pic>
         <p:nvPicPr>
-          <p:cNvPr id="7" name="Image 0" descr="lightbulb icon">    </p:cNvPr>
+          <p:cNvPr id="5" name="Image 0" descr="pencil icon">    </p:cNvPr>
           <p:cNvPicPr>
             <a:picLocks noChangeAspect="1"/>
           </p:cNvPicPr>
@@ -9901,8 +9998,8 @@
         </p:blipFill>
         <p:spPr>
           <a:xfrm>
-            <a:off x="7842352" y="923544"/>
-            <a:ext cx="850392" cy="850392"/>
+            <a:off x="10810951" y="630936"/>
+            <a:ext cx="521208" cy="521208"/>
           </a:xfrm>
           <a:prstGeom prst="rect">
             <a:avLst/>
@@ -9911,19 +10008,290 @@
       </p:pic>
       <p:sp>
         <p:nvSpPr>
+          <p:cNvPr id="6" name="Shape 3"/>
+          <p:cNvSpPr/>
+          <p:nvPr/>
+        </p:nvSpPr>
+        <p:spPr>
+          <a:xfrm>
+            <a:off x="10344607" y="530352"/>
+            <a:ext cx="182880" cy="182880"/>
+          </a:xfrm>
+          <a:prstGeom prst="ellipse">
+            <a:avLst/>
+          </a:prstGeom>
+          <a:solidFill>
+            <a:srgbClr val="FC4067"/>
+          </a:solidFill>
+          <a:ln w="12700">
+            <a:solidFill>
+              <a:srgbClr val="FC4067"/>
+            </a:solidFill>
+            <a:prstDash val="solid"/>
+          </a:ln>
+        </p:spPr>
+      </p:sp>
+      <p:sp>
+        <p:nvSpPr>
+          <p:cNvPr id="7" name="Shape 4"/>
+          <p:cNvSpPr/>
+          <p:nvPr/>
+        </p:nvSpPr>
+        <p:spPr>
+          <a:xfrm>
+            <a:off x="11460175" y="1307592"/>
+            <a:ext cx="128016" cy="128016"/>
+          </a:xfrm>
+          <a:prstGeom prst="ellipse">
+            <a:avLst/>
+          </a:prstGeom>
+          <a:solidFill>
+            <a:srgbClr val="02BDC7"/>
+          </a:solidFill>
+          <a:ln w="12700">
+            <a:solidFill>
+              <a:srgbClr val="02BDC7"/>
+            </a:solidFill>
+            <a:prstDash val="solid"/>
+          </a:ln>
+        </p:spPr>
+      </p:sp>
+      <p:sp>
+        <p:nvSpPr>
           <p:cNvPr id="8" name="Shape 5"/>
           <p:cNvSpPr/>
           <p:nvPr/>
         </p:nvSpPr>
         <p:spPr>
           <a:xfrm>
-            <a:off x="2941168" y="1463040"/>
-            <a:ext cx="1005840" cy="1005840"/>
+            <a:off x="685800" y="1965960"/>
+            <a:ext cx="5250028" cy="1897380"/>
+          </a:xfrm>
+          <a:prstGeom prst="roundRect">
+            <a:avLst>
+              <a:gd name="adj" fmla="val 6747"/>
+            </a:avLst>
+          </a:prstGeom>
+          <a:solidFill>
+            <a:srgbClr val="FFFEFA"/>
+          </a:solidFill>
+          <a:ln w="9525">
+            <a:solidFill>
+              <a:srgbClr val="D6D4CC"/>
+            </a:solidFill>
+            <a:prstDash val="solid"/>
+          </a:ln>
+          <a:effectLst>
+            <a:outerShdw sx="100000" sy="100000" kx="0" ky="0" algn="bl" rotWithShape="0" blurRad="127000" dist="38100" dir="5400000">
+              <a:srgbClr val="3C3828">
+                <a:alpha val="12000"/>
+              </a:srgbClr>
+            </a:outerShdw>
+          </a:effectLst>
+        </p:spPr>
+      </p:sp>
+      <p:sp>
+        <p:nvSpPr>
+          <p:cNvPr id="9" name="Shape 6"/>
+          <p:cNvSpPr/>
+          <p:nvPr/>
+        </p:nvSpPr>
+        <p:spPr>
+          <a:xfrm>
+            <a:off x="813816" y="1965960"/>
+            <a:ext cx="4993996" cy="91440"/>
+          </a:xfrm>
+          <a:prstGeom prst="rect">
+            <a:avLst/>
+          </a:prstGeom>
+          <a:solidFill>
+            <a:srgbClr val="FC4540"/>
+          </a:solidFill>
+          <a:ln w="12700">
+            <a:solidFill>
+              <a:srgbClr val="FC4540"/>
+            </a:solidFill>
+            <a:prstDash val="solid"/>
+          </a:ln>
+        </p:spPr>
+      </p:sp>
+      <p:sp>
+        <p:nvSpPr>
+          <p:cNvPr id="10" name="Shape 7"/>
+          <p:cNvSpPr/>
+          <p:nvPr/>
+        </p:nvSpPr>
+        <p:spPr>
+          <a:xfrm>
+            <a:off x="960120" y="2286000"/>
+            <a:ext cx="548640" cy="548640"/>
           </a:xfrm>
           <a:prstGeom prst="ellipse">
             <a:avLst/>
           </a:prstGeom>
           <a:solidFill>
+            <a:srgbClr val="FC4540"/>
+          </a:solidFill>
+          <a:ln w="12700">
+            <a:solidFill>
+              <a:srgbClr val="FC4540"/>
+            </a:solidFill>
+            <a:prstDash val="solid"/>
+          </a:ln>
+        </p:spPr>
+      </p:sp>
+      <p:sp>
+        <p:nvSpPr>
+          <p:cNvPr id="11" name="Text 8"/>
+          <p:cNvSpPr/>
+          <p:nvPr/>
+        </p:nvSpPr>
+        <p:spPr>
+          <a:xfrm>
+            <a:off x="960120" y="2286000"/>
+            <a:ext cx="548640" cy="548640"/>
+          </a:xfrm>
+          <a:prstGeom prst="rect">
+            <a:avLst/>
+          </a:prstGeom>
+          <a:noFill/>
+          <a:ln/>
+        </p:spPr>
+        <p:txBody>
+          <a:bodyPr wrap="square" lIns="0" tIns="0" rIns="0" bIns="0" rtlCol="0" anchor="ctr"/>
+          <a:lstStyle/>
+          <a:p>
+            <a:pPr algn="ctr" indent="0" marL="0">
+              <a:buNone/>
+            </a:pPr>
+            <a:r>
+              <a:rPr lang="en-US" sz="2200" b="1" dirty="0">
+                <a:solidFill>
+                  <a:srgbClr val="FFFEFA"/>
+                </a:solidFill>
+                <a:latin typeface="Georgia" pitchFamily="34" charset="0"/>
+                <a:ea typeface="Georgia" pitchFamily="34" charset="-122"/>
+                <a:cs typeface="Georgia" pitchFamily="34" charset="-120"/>
+              </a:rPr>
+              <a:t>1</a:t>
+            </a:r>
+            <a:endParaRPr lang="en-US" sz="2200" dirty="0"/>
+          </a:p>
+        </p:txBody>
+      </p:sp>
+      <p:sp>
+        <p:nvSpPr>
+          <p:cNvPr id="12" name="Text 9"/>
+          <p:cNvSpPr/>
+          <p:nvPr/>
+        </p:nvSpPr>
+        <p:spPr>
+          <a:xfrm>
+            <a:off x="1737360" y="2194560"/>
+            <a:ext cx="3924148" cy="1485900"/>
+          </a:xfrm>
+          <a:prstGeom prst="rect">
+            <a:avLst/>
+          </a:prstGeom>
+          <a:noFill/>
+          <a:ln/>
+        </p:spPr>
+        <p:txBody>
+          <a:bodyPr wrap="square" lIns="0" tIns="0" rIns="0" bIns="0" rtlCol="0" anchor="t"/>
+          <a:lstStyle/>
+          <a:p>
+            <a:pPr indent="0" marL="0">
+              <a:buNone/>
+            </a:pPr>
+            <a:r>
+              <a:rPr lang="en-US" sz="2600" dirty="0">
+                <a:solidFill>
+                  <a:srgbClr val="3C3828"/>
+                </a:solidFill>
+                <a:latin typeface="Calibri" pitchFamily="34" charset="0"/>
+                <a:ea typeface="Calibri" pitchFamily="34" charset="-122"/>
+                <a:cs typeface="Calibri" pitchFamily="34" charset="-120"/>
+              </a:rPr>
+              <a:t>Reread your </a:t>
+            </a:r>
+            <a:r>
+              <a:rPr lang="en-US" sz="2600" dirty="0">
+                <a:solidFill>
+                  <a:srgbClr val="3C3828"/>
+                </a:solidFill>
+                <a:highlight>
+                  <a:srgbClr val="FFE14D"/>
+                </a:highlight>
+                <a:latin typeface="Calibri" pitchFamily="34" charset="0"/>
+                <a:ea typeface="Calibri" pitchFamily="34" charset="-122"/>
+                <a:cs typeface="Calibri" pitchFamily="34" charset="-120"/>
+              </a:rPr>
+              <a:t>thesis</a:t>
+            </a:r>
+            <a:r>
+              <a:rPr lang="en-US" sz="2600" dirty="0">
+                <a:solidFill>
+                  <a:srgbClr val="3C3828"/>
+                </a:solidFill>
+                <a:latin typeface="Calibri" pitchFamily="34" charset="0"/>
+                <a:ea typeface="Calibri" pitchFamily="34" charset="-122"/>
+                <a:cs typeface="Calibri" pitchFamily="34" charset="-120"/>
+              </a:rPr>
+              <a:t>: your title is about the same thing</a:t>
+            </a:r>
+            <a:endParaRPr lang="en-US" sz="2600" dirty="0"/>
+          </a:p>
+        </p:txBody>
+      </p:sp>
+      <p:sp>
+        <p:nvSpPr>
+          <p:cNvPr id="13" name="Shape 10"/>
+          <p:cNvSpPr/>
+          <p:nvPr/>
+        </p:nvSpPr>
+        <p:spPr>
+          <a:xfrm>
+            <a:off x="6255868" y="1965960"/>
+            <a:ext cx="5250028" cy="1897380"/>
+          </a:xfrm>
+          <a:prstGeom prst="roundRect">
+            <a:avLst>
+              <a:gd name="adj" fmla="val 6747"/>
+            </a:avLst>
+          </a:prstGeom>
+          <a:solidFill>
+            <a:srgbClr val="FFFEFA"/>
+          </a:solidFill>
+          <a:ln w="9525">
+            <a:solidFill>
+              <a:srgbClr val="D6D4CC"/>
+            </a:solidFill>
+            <a:prstDash val="solid"/>
+          </a:ln>
+          <a:effectLst>
+            <a:outerShdw sx="100000" sy="100000" kx="0" ky="0" algn="bl" rotWithShape="0" blurRad="127000" dist="38100" dir="5400000">
+              <a:srgbClr val="3C3828">
+                <a:alpha val="12000"/>
+              </a:srgbClr>
+            </a:outerShdw>
+          </a:effectLst>
+        </p:spPr>
+      </p:sp>
+      <p:sp>
+        <p:nvSpPr>
+          <p:cNvPr id="14" name="Shape 11"/>
+          <p:cNvSpPr/>
+          <p:nvPr/>
+        </p:nvSpPr>
+        <p:spPr>
+          <a:xfrm>
+            <a:off x="6383884" y="1965960"/>
+            <a:ext cx="4993996" cy="91440"/>
+          </a:xfrm>
+          <a:prstGeom prst="rect">
+            <a:avLst/>
+          </a:prstGeom>
+          <a:solidFill>
             <a:srgbClr val="FF9755"/>
           </a:solidFill>
           <a:ln w="12700">
@@ -9934,253 +10302,485 @@
           </a:ln>
         </p:spPr>
       </p:sp>
-      <p:pic>
-        <p:nvPicPr>
-          <p:cNvPr id="9" name="Image 1" descr="puzzle icon">    </p:cNvPr>
-          <p:cNvPicPr>
-            <a:picLocks noChangeAspect="1"/>
-          </p:cNvPicPr>
-          <p:nvPr/>
-        </p:nvPicPr>
-        <p:blipFill>
-          <a:blip r:embed="rId2"/>
-          <a:stretch>
-            <a:fillRect/>
-          </a:stretch>
-        </p:blipFill>
-        <p:spPr>
-          <a:xfrm>
-            <a:off x="3142336" y="1664208"/>
-            <a:ext cx="603504" cy="603504"/>
-          </a:xfrm>
-          <a:prstGeom prst="rect">
-            <a:avLst/>
-          </a:prstGeom>
-        </p:spPr>
-      </p:pic>
-      <p:sp>
-        <p:nvSpPr>
-          <p:cNvPr id="10" name="Shape 6"/>
-          <p:cNvSpPr/>
-          <p:nvPr/>
-        </p:nvSpPr>
-        <p:spPr>
-          <a:xfrm>
-            <a:off x="3718408" y="4800600"/>
-            <a:ext cx="1188720" cy="1188720"/>
+      <p:sp>
+        <p:nvSpPr>
+          <p:cNvPr id="15" name="Shape 12"/>
+          <p:cNvSpPr/>
+          <p:nvPr/>
+        </p:nvSpPr>
+        <p:spPr>
+          <a:xfrm>
+            <a:off x="6530188" y="2286000"/>
+            <a:ext cx="548640" cy="548640"/>
           </a:xfrm>
           <a:prstGeom prst="ellipse">
             <a:avLst/>
           </a:prstGeom>
           <a:solidFill>
-            <a:srgbClr val="FC4540"/>
+            <a:srgbClr val="FF9755"/>
           </a:solidFill>
           <a:ln w="12700">
             <a:solidFill>
-              <a:srgbClr val="FC4540"/>
-            </a:solidFill>
-            <a:prstDash val="solid"/>
-          </a:ln>
-        </p:spPr>
-      </p:sp>
-      <p:pic>
-        <p:nvPicPr>
-          <p:cNvPr id="11" name="Image 2" descr="thumbs icon">    </p:cNvPr>
-          <p:cNvPicPr>
-            <a:picLocks noChangeAspect="1"/>
-          </p:cNvPicPr>
-          <p:nvPr/>
-        </p:nvPicPr>
-        <p:blipFill>
-          <a:blip r:embed="rId3"/>
-          <a:stretch>
-            <a:fillRect/>
-          </a:stretch>
-        </p:blipFill>
-        <p:spPr>
-          <a:xfrm>
-            <a:off x="3956152" y="5038344"/>
-            <a:ext cx="713232" cy="713232"/>
-          </a:xfrm>
-          <a:prstGeom prst="rect">
-            <a:avLst/>
-          </a:prstGeom>
-        </p:spPr>
-      </p:pic>
-      <p:sp>
-        <p:nvSpPr>
-          <p:cNvPr id="12" name="Shape 7"/>
-          <p:cNvSpPr/>
-          <p:nvPr/>
-        </p:nvSpPr>
-        <p:spPr>
-          <a:xfrm>
-            <a:off x="3124048" y="2743200"/>
-            <a:ext cx="274320" cy="274320"/>
+              <a:srgbClr val="FF9755"/>
+            </a:solidFill>
+            <a:prstDash val="solid"/>
+          </a:ln>
+        </p:spPr>
+      </p:sp>
+      <p:sp>
+        <p:nvSpPr>
+          <p:cNvPr id="16" name="Text 13"/>
+          <p:cNvSpPr/>
+          <p:nvPr/>
+        </p:nvSpPr>
+        <p:spPr>
+          <a:xfrm>
+            <a:off x="6530188" y="2286000"/>
+            <a:ext cx="548640" cy="548640"/>
+          </a:xfrm>
+          <a:prstGeom prst="rect">
+            <a:avLst/>
+          </a:prstGeom>
+          <a:noFill/>
+          <a:ln/>
+        </p:spPr>
+        <p:txBody>
+          <a:bodyPr wrap="square" lIns="0" tIns="0" rIns="0" bIns="0" rtlCol="0" anchor="ctr"/>
+          <a:lstStyle/>
+          <a:p>
+            <a:pPr algn="ctr" indent="0" marL="0">
+              <a:buNone/>
+            </a:pPr>
+            <a:r>
+              <a:rPr lang="en-US" sz="2200" b="1" dirty="0">
+                <a:solidFill>
+                  <a:srgbClr val="FFFEFA"/>
+                </a:solidFill>
+                <a:latin typeface="Georgia" pitchFamily="34" charset="0"/>
+                <a:ea typeface="Georgia" pitchFamily="34" charset="-122"/>
+                <a:cs typeface="Georgia" pitchFamily="34" charset="-120"/>
+              </a:rPr>
+              <a:t>2</a:t>
+            </a:r>
+            <a:endParaRPr lang="en-US" sz="2200" dirty="0"/>
+          </a:p>
+        </p:txBody>
+      </p:sp>
+      <p:sp>
+        <p:nvSpPr>
+          <p:cNvPr id="17" name="Text 14"/>
+          <p:cNvSpPr/>
+          <p:nvPr/>
+        </p:nvSpPr>
+        <p:spPr>
+          <a:xfrm>
+            <a:off x="7307428" y="2194560"/>
+            <a:ext cx="3924148" cy="1485900"/>
+          </a:xfrm>
+          <a:prstGeom prst="rect">
+            <a:avLst/>
+          </a:prstGeom>
+          <a:noFill/>
+          <a:ln/>
+        </p:spPr>
+        <p:txBody>
+          <a:bodyPr wrap="square" lIns="0" tIns="0" rIns="0" bIns="0" rtlCol="0" anchor="t"/>
+          <a:lstStyle/>
+          <a:p>
+            <a:pPr indent="0" marL="0">
+              <a:buNone/>
+            </a:pPr>
+            <a:r>
+              <a:rPr lang="en-US" sz="2600" dirty="0">
+                <a:solidFill>
+                  <a:srgbClr val="3C3828"/>
+                </a:solidFill>
+                <a:highlight>
+                  <a:srgbClr val="FFE14D"/>
+                </a:highlight>
+                <a:latin typeface="Calibri" pitchFamily="34" charset="0"/>
+                <a:ea typeface="Calibri" pitchFamily="34" charset="-122"/>
+                <a:cs typeface="Calibri" pitchFamily="34" charset="-120"/>
+              </a:rPr>
+              <a:t>Right of the colon:</a:t>
+            </a:r>
+            <a:r>
+              <a:rPr lang="en-US" sz="2600" dirty="0">
+                <a:solidFill>
+                  <a:srgbClr val="3C3828"/>
+                </a:solidFill>
+                <a:latin typeface="Calibri" pitchFamily="34" charset="0"/>
+                <a:ea typeface="Calibri" pitchFamily="34" charset="-122"/>
+                <a:cs typeface="Calibri" pitchFamily="34" charset="-120"/>
+              </a:rPr>
+              <a:t> say clearly what your essay is about</a:t>
+            </a:r>
+            <a:endParaRPr lang="en-US" sz="2600" dirty="0"/>
+          </a:p>
+        </p:txBody>
+      </p:sp>
+      <p:sp>
+        <p:nvSpPr>
+          <p:cNvPr id="18" name="Shape 15"/>
+          <p:cNvSpPr/>
+          <p:nvPr/>
+        </p:nvSpPr>
+        <p:spPr>
+          <a:xfrm>
+            <a:off x="685800" y="4183380"/>
+            <a:ext cx="5250028" cy="1897380"/>
+          </a:xfrm>
+          <a:prstGeom prst="roundRect">
+            <a:avLst>
+              <a:gd name="adj" fmla="val 6747"/>
+            </a:avLst>
+          </a:prstGeom>
+          <a:solidFill>
+            <a:srgbClr val="FFFEFA"/>
+          </a:solidFill>
+          <a:ln w="9525">
+            <a:solidFill>
+              <a:srgbClr val="D6D4CC"/>
+            </a:solidFill>
+            <a:prstDash val="solid"/>
+          </a:ln>
+          <a:effectLst>
+            <a:outerShdw sx="100000" sy="100000" kx="0" ky="0" algn="bl" rotWithShape="0" blurRad="127000" dist="38100" dir="5400000">
+              <a:srgbClr val="3C3828">
+                <a:alpha val="12000"/>
+              </a:srgbClr>
+            </a:outerShdw>
+          </a:effectLst>
+        </p:spPr>
+      </p:sp>
+      <p:sp>
+        <p:nvSpPr>
+          <p:cNvPr id="19" name="Shape 16"/>
+          <p:cNvSpPr/>
+          <p:nvPr/>
+        </p:nvSpPr>
+        <p:spPr>
+          <a:xfrm>
+            <a:off x="813816" y="4183380"/>
+            <a:ext cx="4993996" cy="91440"/>
+          </a:xfrm>
+          <a:prstGeom prst="rect">
+            <a:avLst/>
+          </a:prstGeom>
+          <a:solidFill>
+            <a:srgbClr val="FC4067"/>
+          </a:solidFill>
+          <a:ln w="12700">
+            <a:solidFill>
+              <a:srgbClr val="FC4067"/>
+            </a:solidFill>
+            <a:prstDash val="solid"/>
+          </a:ln>
+        </p:spPr>
+      </p:sp>
+      <p:sp>
+        <p:nvSpPr>
+          <p:cNvPr id="20" name="Shape 17"/>
+          <p:cNvSpPr/>
+          <p:nvPr/>
+        </p:nvSpPr>
+        <p:spPr>
+          <a:xfrm>
+            <a:off x="960120" y="4503420"/>
+            <a:ext cx="548640" cy="548640"/>
           </a:xfrm>
           <a:prstGeom prst="ellipse">
             <a:avLst/>
           </a:prstGeom>
           <a:solidFill>
+            <a:srgbClr val="FC4067"/>
+          </a:solidFill>
+          <a:ln w="12700">
+            <a:solidFill>
+              <a:srgbClr val="FC4067"/>
+            </a:solidFill>
+            <a:prstDash val="solid"/>
+          </a:ln>
+        </p:spPr>
+      </p:sp>
+      <p:sp>
+        <p:nvSpPr>
+          <p:cNvPr id="21" name="Text 18"/>
+          <p:cNvSpPr/>
+          <p:nvPr/>
+        </p:nvSpPr>
+        <p:spPr>
+          <a:xfrm>
+            <a:off x="960120" y="4503420"/>
+            <a:ext cx="548640" cy="548640"/>
+          </a:xfrm>
+          <a:prstGeom prst="rect">
+            <a:avLst/>
+          </a:prstGeom>
+          <a:noFill/>
+          <a:ln/>
+        </p:spPr>
+        <p:txBody>
+          <a:bodyPr wrap="square" lIns="0" tIns="0" rIns="0" bIns="0" rtlCol="0" anchor="ctr"/>
+          <a:lstStyle/>
+          <a:p>
+            <a:pPr algn="ctr" indent="0" marL="0">
+              <a:buNone/>
+            </a:pPr>
+            <a:r>
+              <a:rPr lang="en-US" sz="2200" b="1" dirty="0">
+                <a:solidFill>
+                  <a:srgbClr val="FFFEFA"/>
+                </a:solidFill>
+                <a:latin typeface="Georgia" pitchFamily="34" charset="0"/>
+                <a:ea typeface="Georgia" pitchFamily="34" charset="-122"/>
+                <a:cs typeface="Georgia" pitchFamily="34" charset="-120"/>
+              </a:rPr>
+              <a:t>3</a:t>
+            </a:r>
+            <a:endParaRPr lang="en-US" sz="2200" dirty="0"/>
+          </a:p>
+        </p:txBody>
+      </p:sp>
+      <p:sp>
+        <p:nvSpPr>
+          <p:cNvPr id="22" name="Text 19"/>
+          <p:cNvSpPr/>
+          <p:nvPr/>
+        </p:nvSpPr>
+        <p:spPr>
+          <a:xfrm>
+            <a:off x="1737360" y="4411980"/>
+            <a:ext cx="3924148" cy="1485900"/>
+          </a:xfrm>
+          <a:prstGeom prst="rect">
+            <a:avLst/>
+          </a:prstGeom>
+          <a:noFill/>
+          <a:ln/>
+        </p:spPr>
+        <p:txBody>
+          <a:bodyPr wrap="square" lIns="0" tIns="0" rIns="0" bIns="0" rtlCol="0" anchor="t"/>
+          <a:lstStyle/>
+          <a:p>
+            <a:pPr indent="0" marL="0">
+              <a:buNone/>
+            </a:pPr>
+            <a:r>
+              <a:rPr lang="en-US" sz="2600" dirty="0">
+                <a:solidFill>
+                  <a:srgbClr val="3C3828"/>
+                </a:solidFill>
+                <a:highlight>
+                  <a:srgbClr val="FFE14D"/>
+                </a:highlight>
+                <a:latin typeface="Calibri" pitchFamily="34" charset="0"/>
+                <a:ea typeface="Calibri" pitchFamily="34" charset="-122"/>
+                <a:cs typeface="Calibri" pitchFamily="34" charset="-120"/>
+              </a:rPr>
+              <a:t>Left of the colon:</a:t>
+            </a:r>
+            <a:r>
+              <a:rPr lang="en-US" sz="2600" dirty="0">
+                <a:solidFill>
+                  <a:srgbClr val="3C3828"/>
+                </a:solidFill>
+                <a:latin typeface="Calibri" pitchFamily="34" charset="0"/>
+                <a:ea typeface="Calibri" pitchFamily="34" charset="-122"/>
+                <a:cs typeface="Calibri" pitchFamily="34" charset="-120"/>
+              </a:rPr>
+              <a:t> something creative, like a phrase, a pun or an image</a:t>
+            </a:r>
+            <a:endParaRPr lang="en-US" sz="2600" dirty="0"/>
+          </a:p>
+        </p:txBody>
+      </p:sp>
+      <p:sp>
+        <p:nvSpPr>
+          <p:cNvPr id="23" name="Shape 20"/>
+          <p:cNvSpPr/>
+          <p:nvPr/>
+        </p:nvSpPr>
+        <p:spPr>
+          <a:xfrm>
+            <a:off x="6255868" y="4183380"/>
+            <a:ext cx="5250028" cy="1897380"/>
+          </a:xfrm>
+          <a:prstGeom prst="roundRect">
+            <a:avLst>
+              <a:gd name="adj" fmla="val 6747"/>
+            </a:avLst>
+          </a:prstGeom>
+          <a:solidFill>
             <a:srgbClr val="FFFEFA"/>
           </a:solidFill>
+          <a:ln w="9525">
+            <a:solidFill>
+              <a:srgbClr val="D6D4CC"/>
+            </a:solidFill>
+            <a:prstDash val="solid"/>
+          </a:ln>
+          <a:effectLst>
+            <a:outerShdw sx="100000" sy="100000" kx="0" ky="0" algn="bl" rotWithShape="0" blurRad="127000" dist="38100" dir="5400000">
+              <a:srgbClr val="3C3828">
+                <a:alpha val="12000"/>
+              </a:srgbClr>
+            </a:outerShdw>
+          </a:effectLst>
+        </p:spPr>
+      </p:sp>
+      <p:sp>
+        <p:nvSpPr>
+          <p:cNvPr id="24" name="Shape 21"/>
+          <p:cNvSpPr/>
+          <p:nvPr/>
+        </p:nvSpPr>
+        <p:spPr>
+          <a:xfrm>
+            <a:off x="6383884" y="4183380"/>
+            <a:ext cx="4993996" cy="91440"/>
+          </a:xfrm>
+          <a:prstGeom prst="rect">
+            <a:avLst/>
+          </a:prstGeom>
+          <a:solidFill>
+            <a:srgbClr val="02BDC7"/>
+          </a:solidFill>
           <a:ln w="12700">
             <a:solidFill>
-              <a:srgbClr val="FFFEFA"/>
-            </a:solidFill>
-            <a:prstDash val="solid"/>
-          </a:ln>
-        </p:spPr>
-      </p:sp>
-      <p:sp>
-        <p:nvSpPr>
-          <p:cNvPr id="13" name="Shape 8"/>
-          <p:cNvSpPr/>
-          <p:nvPr/>
-        </p:nvSpPr>
-        <p:spPr>
-          <a:xfrm>
-            <a:off x="8701888" y="2423160"/>
-            <a:ext cx="438912" cy="438912"/>
+              <a:srgbClr val="02BDC7"/>
+            </a:solidFill>
+            <a:prstDash val="solid"/>
+          </a:ln>
+        </p:spPr>
+      </p:sp>
+      <p:sp>
+        <p:nvSpPr>
+          <p:cNvPr id="25" name="Shape 22"/>
+          <p:cNvSpPr/>
+          <p:nvPr/>
+        </p:nvSpPr>
+        <p:spPr>
+          <a:xfrm>
+            <a:off x="6530188" y="4503420"/>
+            <a:ext cx="548640" cy="548640"/>
           </a:xfrm>
           <a:prstGeom prst="ellipse">
             <a:avLst/>
           </a:prstGeom>
           <a:solidFill>
-            <a:srgbClr val="FC4067"/>
+            <a:srgbClr val="02BDC7"/>
           </a:solidFill>
           <a:ln w="12700">
             <a:solidFill>
-              <a:srgbClr val="FC4067"/>
-            </a:solidFill>
-            <a:prstDash val="solid"/>
-          </a:ln>
-        </p:spPr>
-      </p:sp>
-      <p:sp>
-        <p:nvSpPr>
-          <p:cNvPr id="14" name="Shape 9"/>
-          <p:cNvSpPr/>
-          <p:nvPr/>
-        </p:nvSpPr>
-        <p:spPr>
-          <a:xfrm>
-            <a:off x="8976208" y="2057400"/>
-            <a:ext cx="146304" cy="146304"/>
-          </a:xfrm>
-          <a:prstGeom prst="ellipse">
-            <a:avLst/>
-          </a:prstGeom>
-          <a:solidFill>
-            <a:srgbClr val="FFFEFA"/>
-          </a:solidFill>
-          <a:ln w="12700">
-            <a:solidFill>
-              <a:srgbClr val="FFFEFA"/>
-            </a:solidFill>
-            <a:prstDash val="solid"/>
-          </a:ln>
-        </p:spPr>
-      </p:sp>
-      <p:sp>
-        <p:nvSpPr>
-          <p:cNvPr id="15" name="Shape 10"/>
-          <p:cNvSpPr/>
-          <p:nvPr/>
-        </p:nvSpPr>
-        <p:spPr>
-          <a:xfrm>
-            <a:off x="7650328" y="5760720"/>
-            <a:ext cx="457200" cy="457200"/>
-          </a:xfrm>
-          <a:prstGeom prst="ellipse">
-            <a:avLst/>
-          </a:prstGeom>
-          <a:solidFill>
-            <a:srgbClr val="FC4067"/>
-          </a:solidFill>
-          <a:ln w="12700">
-            <a:solidFill>
-              <a:srgbClr val="FC4067"/>
-            </a:solidFill>
-            <a:prstDash val="solid"/>
-          </a:ln>
-        </p:spPr>
-      </p:sp>
-      <p:sp>
-        <p:nvSpPr>
-          <p:cNvPr id="16" name="Shape 11"/>
-          <p:cNvSpPr/>
-          <p:nvPr/>
-        </p:nvSpPr>
-        <p:spPr>
-          <a:xfrm>
-            <a:off x="8290408" y="5989320"/>
-            <a:ext cx="640080" cy="640080"/>
-          </a:xfrm>
-          <a:prstGeom prst="ellipse">
-            <a:avLst/>
-          </a:prstGeom>
-          <a:solidFill>
-            <a:srgbClr val="FF9755"/>
-          </a:solidFill>
-          <a:ln w="12700">
-            <a:solidFill>
-              <a:srgbClr val="FF9755"/>
-            </a:solidFill>
-            <a:prstDash val="solid"/>
-          </a:ln>
-        </p:spPr>
-      </p:sp>
-      <p:sp>
-        <p:nvSpPr>
-          <p:cNvPr id="17" name="Shape 12"/>
-          <p:cNvSpPr/>
-          <p:nvPr/>
-        </p:nvSpPr>
-        <p:spPr>
-          <a:xfrm>
-            <a:off x="3306928" y="4480560"/>
-            <a:ext cx="365760" cy="365760"/>
-          </a:xfrm>
-          <a:prstGeom prst="ellipse">
-            <a:avLst/>
-          </a:prstGeom>
-          <a:solidFill>
-            <a:srgbClr val="FF9755"/>
-          </a:solidFill>
-          <a:ln w="12700">
-            <a:solidFill>
-              <a:srgbClr val="FF9755"/>
-            </a:solidFill>
-            <a:prstDash val="solid"/>
-          </a:ln>
-        </p:spPr>
-      </p:sp>
-      <p:sp>
-        <p:nvSpPr>
-          <p:cNvPr id="18" name="Shape 13"/>
-          <p:cNvSpPr/>
-          <p:nvPr/>
-        </p:nvSpPr>
-        <p:spPr>
-          <a:xfrm>
-            <a:off x="4815688" y="5852160"/>
-            <a:ext cx="219456" cy="219456"/>
-          </a:xfrm>
-          <a:prstGeom prst="ellipse">
-            <a:avLst/>
-          </a:prstGeom>
-          <a:solidFill>
-            <a:srgbClr val="02BDC7"/>
-          </a:solidFill>
-          <a:ln w="12700">
-            <a:solidFill>
               <a:srgbClr val="02BDC7"/>
             </a:solidFill>
             <a:prstDash val="solid"/>
           </a:ln>
         </p:spPr>
+      </p:sp>
+      <p:sp>
+        <p:nvSpPr>
+          <p:cNvPr id="26" name="Text 23"/>
+          <p:cNvSpPr/>
+          <p:nvPr/>
+        </p:nvSpPr>
+        <p:spPr>
+          <a:xfrm>
+            <a:off x="6530188" y="4503420"/>
+            <a:ext cx="548640" cy="548640"/>
+          </a:xfrm>
+          <a:prstGeom prst="rect">
+            <a:avLst/>
+          </a:prstGeom>
+          <a:noFill/>
+          <a:ln/>
+        </p:spPr>
+        <p:txBody>
+          <a:bodyPr wrap="square" lIns="0" tIns="0" rIns="0" bIns="0" rtlCol="0" anchor="ctr"/>
+          <a:lstStyle/>
+          <a:p>
+            <a:pPr algn="ctr" indent="0" marL="0">
+              <a:buNone/>
+            </a:pPr>
+            <a:r>
+              <a:rPr lang="en-US" sz="2200" b="1" dirty="0">
+                <a:solidFill>
+                  <a:srgbClr val="FFFEFA"/>
+                </a:solidFill>
+                <a:latin typeface="Georgia" pitchFamily="34" charset="0"/>
+                <a:ea typeface="Georgia" pitchFamily="34" charset="-122"/>
+                <a:cs typeface="Georgia" pitchFamily="34" charset="-120"/>
+              </a:rPr>
+              <a:t>4</a:t>
+            </a:r>
+            <a:endParaRPr lang="en-US" sz="2200" dirty="0"/>
+          </a:p>
+        </p:txBody>
+      </p:sp>
+      <p:sp>
+        <p:nvSpPr>
+          <p:cNvPr id="27" name="Text 24"/>
+          <p:cNvSpPr/>
+          <p:nvPr/>
+        </p:nvSpPr>
+        <p:spPr>
+          <a:xfrm>
+            <a:off x="7307428" y="4411980"/>
+            <a:ext cx="3924148" cy="1485900"/>
+          </a:xfrm>
+          <a:prstGeom prst="rect">
+            <a:avLst/>
+          </a:prstGeom>
+          <a:noFill/>
+          <a:ln/>
+        </p:spPr>
+        <p:txBody>
+          <a:bodyPr wrap="square" lIns="0" tIns="0" rIns="0" bIns="0" rtlCol="0" anchor="t"/>
+          <a:lstStyle/>
+          <a:p>
+            <a:pPr indent="0" marL="0">
+              <a:buNone/>
+            </a:pPr>
+            <a:r>
+              <a:rPr lang="en-US" sz="2600" dirty="0">
+                <a:solidFill>
+                  <a:srgbClr val="3C3828"/>
+                </a:solidFill>
+                <a:latin typeface="Calibri" pitchFamily="34" charset="0"/>
+                <a:ea typeface="Calibri" pitchFamily="34" charset="-122"/>
+                <a:cs typeface="Calibri" pitchFamily="34" charset="-120"/>
+              </a:rPr>
+              <a:t>Ask the </a:t>
+            </a:r>
+            <a:r>
+              <a:rPr lang="en-US" sz="2600" dirty="0">
+                <a:solidFill>
+                  <a:srgbClr val="3C3828"/>
+                </a:solidFill>
+                <a:highlight>
+                  <a:srgbClr val="FFE14D"/>
+                </a:highlight>
+                <a:latin typeface="Calibri" pitchFamily="34" charset="0"/>
+                <a:ea typeface="Calibri" pitchFamily="34" charset="-122"/>
+                <a:cs typeface="Calibri" pitchFamily="34" charset="-120"/>
+              </a:rPr>
+              <a:t>Tutor</a:t>
+            </a:r>
+            <a:r>
+              <a:rPr lang="en-US" sz="2600" dirty="0">
+                <a:solidFill>
+                  <a:srgbClr val="3C3828"/>
+                </a:solidFill>
+                <a:latin typeface="Calibri" pitchFamily="34" charset="0"/>
+                <a:ea typeface="Calibri" pitchFamily="34" charset="-122"/>
+                <a:cs typeface="Calibri" pitchFamily="34" charset="-120"/>
+              </a:rPr>
+              <a:t> for feedback, then try a second version</a:t>
+            </a:r>
+            <a:endParaRPr lang="en-US" sz="2600" dirty="0"/>
+          </a:p>
+        </p:txBody>
       </p:sp>
       <p:sp>
         <p:nvSpPr>
@@ -10795,6 +11395,13 @@
 <file path=ppt/slides/slide20.xml><?xml version="1.0" encoding="utf-8"?>
 <p:sld xmlns:a="http://schemas.openxmlformats.org/drawingml/2006/main" xmlns:r="http://schemas.openxmlformats.org/officeDocument/2006/relationships" xmlns:p="http://schemas.openxmlformats.org/presentationml/2006/main">
   <p:cSld name="Slide 20">
+    <p:bg>
+      <p:bgPr>
+        <a:solidFill>
+          <a:srgbClr val="C8EEF0"/>
+        </a:solidFill>
+      </p:bgPr>
+    </p:bg>
     <p:spTree>
       <p:nvGrpSpPr>
         <p:cNvPr id="1" name=""/>
@@ -10811,30 +11418,62 @@
       </p:grpSpPr>
       <p:sp>
         <p:nvSpPr>
-          <p:cNvPr id="2" name="Text 0"/>
-          <p:cNvSpPr/>
-          <p:nvPr/>
-        </p:nvSpPr>
-        <p:spPr>
-          <a:xfrm>
-            <a:off x="685800" y="502920"/>
-            <a:ext cx="9357055" cy="320040"/>
-          </a:xfrm>
-          <a:prstGeom prst="rect">
-            <a:avLst/>
-          </a:prstGeom>
-          <a:noFill/>
-          <a:ln/>
-        </p:spPr>
-        <p:txBody>
-          <a:bodyPr wrap="square" lIns="0" tIns="0" rIns="0" bIns="0" rtlCol="0" anchor="b"/>
-          <a:lstStyle/>
-          <a:p>
-            <a:pPr indent="0" marL="0">
-              <a:buNone/>
-            </a:pPr>
-            <a:r>
-              <a:rPr lang="en-US" sz="1200" b="1" spc="200" kern="0" dirty="0">
+          <p:cNvPr id="2" name="Shape 0"/>
+          <p:cNvSpPr/>
+          <p:nvPr/>
+        </p:nvSpPr>
+        <p:spPr>
+          <a:xfrm>
+            <a:off x="3626968" y="960120"/>
+            <a:ext cx="4937760" cy="4937760"/>
+          </a:xfrm>
+          <a:prstGeom prst="ellipse">
+            <a:avLst/>
+          </a:prstGeom>
+          <a:solidFill>
+            <a:srgbClr val="FFFEFA"/>
+          </a:solidFill>
+          <a:ln w="12700">
+            <a:solidFill>
+              <a:srgbClr val="FFFEFA"/>
+            </a:solidFill>
+            <a:prstDash val="solid"/>
+          </a:ln>
+          <a:effectLst>
+            <a:outerShdw sx="100000" sy="100000" kx="0" ky="0" algn="bl" rotWithShape="0" blurRad="203200" dist="50800" dir="5400000">
+              <a:srgbClr val="3C3828">
+                <a:alpha val="14000"/>
+              </a:srgbClr>
+            </a:outerShdw>
+          </a:effectLst>
+        </p:spPr>
+      </p:sp>
+      <p:sp>
+        <p:nvSpPr>
+          <p:cNvPr id="3" name="Text 1"/>
+          <p:cNvSpPr/>
+          <p:nvPr/>
+        </p:nvSpPr>
+        <p:spPr>
+          <a:xfrm>
+            <a:off x="3626968" y="2286000"/>
+            <a:ext cx="4937760" cy="457200"/>
+          </a:xfrm>
+          <a:prstGeom prst="rect">
+            <a:avLst/>
+          </a:prstGeom>
+          <a:noFill/>
+          <a:ln/>
+        </p:spPr>
+        <p:txBody>
+          <a:bodyPr wrap="square" lIns="0" tIns="0" rIns="0" bIns="0" rtlCol="0" anchor="ctr"/>
+          <a:lstStyle/>
+          <a:p>
+            <a:pPr algn="ctr" indent="0" marL="0">
+              <a:buNone/>
+            </a:pPr>
+            <a:r>
+              <a:rPr lang="en-US" sz="1600" b="1" spc="300" kern="0" dirty="0">
                 <a:solidFill>
                   <a:srgbClr val="02BDC7"/>
                 </a:solidFill>
@@ -10842,34 +11481,34 @@
                 <a:ea typeface="Consolas" pitchFamily="34" charset="-122"/>
                 <a:cs typeface="Consolas" pitchFamily="34" charset="-120"/>
               </a:rPr>
-              <a:t>FINISHING TOUCHES IN YAWP!</a:t>
-            </a:r>
-            <a:endParaRPr lang="en-US" sz="1200" dirty="0"/>
-          </a:p>
-        </p:txBody>
-      </p:sp>
-      <p:sp>
-        <p:nvSpPr>
-          <p:cNvPr id="3" name="Text 1"/>
-          <p:cNvSpPr/>
-          <p:nvPr/>
-        </p:nvSpPr>
-        <p:spPr>
-          <a:xfrm>
-            <a:off x="685800" y="868680"/>
-            <a:ext cx="9357055" cy="960120"/>
-          </a:xfrm>
-          <a:prstGeom prst="rect">
-            <a:avLst/>
-          </a:prstGeom>
-          <a:noFill/>
-          <a:ln/>
-        </p:spPr>
-        <p:txBody>
-          <a:bodyPr wrap="square" lIns="0" tIns="0" rIns="0" bIns="0" rtlCol="0" anchor="t"/>
-          <a:lstStyle/>
-          <a:p>
-            <a:pPr indent="0" marL="0">
+              <a:t>FINISH</a:t>
+            </a:r>
+            <a:endParaRPr lang="en-US" sz="1600" dirty="0"/>
+          </a:p>
+        </p:txBody>
+      </p:sp>
+      <p:sp>
+        <p:nvSpPr>
+          <p:cNvPr id="4" name="Text 2"/>
+          <p:cNvSpPr/>
+          <p:nvPr/>
+        </p:nvSpPr>
+        <p:spPr>
+          <a:xfrm>
+            <a:off x="3626968" y="2743200"/>
+            <a:ext cx="4937760" cy="1143000"/>
+          </a:xfrm>
+          <a:prstGeom prst="rect">
+            <a:avLst/>
+          </a:prstGeom>
+          <a:noFill/>
+          <a:ln/>
+        </p:spPr>
+        <p:txBody>
+          <a:bodyPr wrap="square" lIns="0" tIns="0" rIns="0" bIns="0" rtlCol="0" anchor="ctr"/>
+          <a:lstStyle/>
+          <a:p>
+            <a:pPr algn="ctr" indent="0" marL="0">
               <a:buNone/>
             </a:pPr>
             <a:r>
@@ -10877,11 +11516,14 @@
                 <a:solidFill>
                   <a:srgbClr val="3C3828"/>
                 </a:solidFill>
+                <a:highlight>
+                  <a:srgbClr val="FFE14D"/>
+                </a:highlight>
                 <a:latin typeface="Georgia" pitchFamily="34" charset="0"/>
                 <a:ea typeface="Georgia" pitchFamily="34" charset="-122"/>
                 <a:cs typeface="Georgia" pitchFamily="34" charset="-120"/>
               </a:rPr>
-              <a:t>Finishing touches</a:t>
+              <a:t>Putting it All Together</a:t>
             </a:r>
             <a:endParaRPr lang="en-US" sz="3600" dirty="0"/>
           </a:p>
@@ -10889,24 +11531,63 @@
       </p:sp>
       <p:sp>
         <p:nvSpPr>
-          <p:cNvPr id="4" name="Shape 2"/>
-          <p:cNvSpPr/>
-          <p:nvPr/>
-        </p:nvSpPr>
-        <p:spPr>
-          <a:xfrm>
-            <a:off x="10637215" y="457200"/>
-            <a:ext cx="868680" cy="868680"/>
+          <p:cNvPr id="5" name="Text 3"/>
+          <p:cNvSpPr/>
+          <p:nvPr/>
+        </p:nvSpPr>
+        <p:spPr>
+          <a:xfrm>
+            <a:off x="4358488" y="3977640"/>
+            <a:ext cx="3474720" cy="822960"/>
+          </a:xfrm>
+          <a:prstGeom prst="rect">
+            <a:avLst/>
+          </a:prstGeom>
+          <a:noFill/>
+          <a:ln/>
+        </p:spPr>
+        <p:txBody>
+          <a:bodyPr wrap="square" lIns="0" tIns="0" rIns="0" bIns="0" rtlCol="0" anchor="t"/>
+          <a:lstStyle/>
+          <a:p>
+            <a:pPr algn="ctr" indent="0" marL="0">
+              <a:buNone/>
+            </a:pPr>
+            <a:r>
+              <a:rPr lang="en-US" sz="1800" i="1" dirty="0">
+                <a:solidFill>
+                  <a:srgbClr val="7E7C78"/>
+                </a:solidFill>
+                <a:latin typeface="Calibri" pitchFamily="34" charset="0"/>
+                <a:ea typeface="Calibri" pitchFamily="34" charset="-122"/>
+                <a:cs typeface="Calibri" pitchFamily="34" charset="-120"/>
+              </a:rPr>
+              <a:t>Clean up, title, submit, celebrate.</a:t>
+            </a:r>
+            <a:endParaRPr lang="en-US" sz="1800" dirty="0"/>
+          </a:p>
+        </p:txBody>
+      </p:sp>
+      <p:sp>
+        <p:nvSpPr>
+          <p:cNvPr id="6" name="Shape 4"/>
+          <p:cNvSpPr/>
+          <p:nvPr/>
+        </p:nvSpPr>
+        <p:spPr>
+          <a:xfrm>
+            <a:off x="7558888" y="640080"/>
+            <a:ext cx="1417320" cy="1417320"/>
           </a:xfrm>
           <a:prstGeom prst="ellipse">
             <a:avLst/>
           </a:prstGeom>
           <a:solidFill>
-            <a:srgbClr val="02BDC7"/>
+            <a:srgbClr val="FFB600"/>
           </a:solidFill>
           <a:ln w="12700">
             <a:solidFill>
-              <a:srgbClr val="02BDC7"/>
+              <a:srgbClr val="FFB600"/>
             </a:solidFill>
             <a:prstDash val="solid"/>
           </a:ln>
@@ -10914,7 +11595,7 @@
       </p:sp>
       <p:pic>
         <p:nvPicPr>
-          <p:cNvPr id="5" name="Image 0" descr="pencil icon">    </p:cNvPr>
+          <p:cNvPr id="7" name="Image 0" descr="lightbulb icon">    </p:cNvPr>
           <p:cNvPicPr>
             <a:picLocks noChangeAspect="1"/>
           </p:cNvPicPr>
@@ -10928,8 +11609,8 @@
         </p:blipFill>
         <p:spPr>
           <a:xfrm>
-            <a:off x="10810951" y="630936"/>
-            <a:ext cx="521208" cy="521208"/>
+            <a:off x="7842352" y="923544"/>
+            <a:ext cx="850392" cy="850392"/>
           </a:xfrm>
           <a:prstGeom prst="rect">
             <a:avLst/>
@@ -10938,19 +11619,68 @@
       </p:pic>
       <p:sp>
         <p:nvSpPr>
-          <p:cNvPr id="6" name="Shape 3"/>
-          <p:cNvSpPr/>
-          <p:nvPr/>
-        </p:nvSpPr>
-        <p:spPr>
-          <a:xfrm>
-            <a:off x="10344607" y="530352"/>
-            <a:ext cx="182880" cy="182880"/>
+          <p:cNvPr id="8" name="Shape 5"/>
+          <p:cNvSpPr/>
+          <p:nvPr/>
+        </p:nvSpPr>
+        <p:spPr>
+          <a:xfrm>
+            <a:off x="2941168" y="1463040"/>
+            <a:ext cx="1005840" cy="1005840"/>
           </a:xfrm>
           <a:prstGeom prst="ellipse">
             <a:avLst/>
           </a:prstGeom>
           <a:solidFill>
+            <a:srgbClr val="FF9755"/>
+          </a:solidFill>
+          <a:ln w="12700">
+            <a:solidFill>
+              <a:srgbClr val="FF9755"/>
+            </a:solidFill>
+            <a:prstDash val="solid"/>
+          </a:ln>
+        </p:spPr>
+      </p:sp>
+      <p:pic>
+        <p:nvPicPr>
+          <p:cNvPr id="9" name="Image 1" descr="puzzle icon">    </p:cNvPr>
+          <p:cNvPicPr>
+            <a:picLocks noChangeAspect="1"/>
+          </p:cNvPicPr>
+          <p:nvPr/>
+        </p:nvPicPr>
+        <p:blipFill>
+          <a:blip r:embed="rId2"/>
+          <a:stretch>
+            <a:fillRect/>
+          </a:stretch>
+        </p:blipFill>
+        <p:spPr>
+          <a:xfrm>
+            <a:off x="3142336" y="1664208"/>
+            <a:ext cx="603504" cy="603504"/>
+          </a:xfrm>
+          <a:prstGeom prst="rect">
+            <a:avLst/>
+          </a:prstGeom>
+        </p:spPr>
+      </p:pic>
+      <p:sp>
+        <p:nvSpPr>
+          <p:cNvPr id="10" name="Shape 6"/>
+          <p:cNvSpPr/>
+          <p:nvPr/>
+        </p:nvSpPr>
+        <p:spPr>
+          <a:xfrm>
+            <a:off x="3718408" y="4800600"/>
+            <a:ext cx="1188720" cy="1188720"/>
+          </a:xfrm>
+          <a:prstGeom prst="ellipse">
+            <a:avLst/>
+          </a:prstGeom>
+          <a:solidFill>
             <a:srgbClr val="FC4540"/>
           </a:solidFill>
           <a:ln w="12700">
@@ -10961,21 +11691,145 @@
           </a:ln>
         </p:spPr>
       </p:sp>
-      <p:sp>
-        <p:nvSpPr>
-          <p:cNvPr id="7" name="Shape 4"/>
-          <p:cNvSpPr/>
-          <p:nvPr/>
-        </p:nvSpPr>
-        <p:spPr>
-          <a:xfrm>
-            <a:off x="11460175" y="1307592"/>
-            <a:ext cx="128016" cy="128016"/>
+      <p:pic>
+        <p:nvPicPr>
+          <p:cNvPr id="11" name="Image 2" descr="thumbs icon">    </p:cNvPr>
+          <p:cNvPicPr>
+            <a:picLocks noChangeAspect="1"/>
+          </p:cNvPicPr>
+          <p:nvPr/>
+        </p:nvPicPr>
+        <p:blipFill>
+          <a:blip r:embed="rId3"/>
+          <a:stretch>
+            <a:fillRect/>
+          </a:stretch>
+        </p:blipFill>
+        <p:spPr>
+          <a:xfrm>
+            <a:off x="3956152" y="5038344"/>
+            <a:ext cx="713232" cy="713232"/>
+          </a:xfrm>
+          <a:prstGeom prst="rect">
+            <a:avLst/>
+          </a:prstGeom>
+        </p:spPr>
+      </p:pic>
+      <p:sp>
+        <p:nvSpPr>
+          <p:cNvPr id="12" name="Shape 7"/>
+          <p:cNvSpPr/>
+          <p:nvPr/>
+        </p:nvSpPr>
+        <p:spPr>
+          <a:xfrm>
+            <a:off x="3124048" y="2743200"/>
+            <a:ext cx="274320" cy="274320"/>
           </a:xfrm>
           <a:prstGeom prst="ellipse">
             <a:avLst/>
           </a:prstGeom>
           <a:solidFill>
+            <a:srgbClr val="FFFEFA"/>
+          </a:solidFill>
+          <a:ln w="12700">
+            <a:solidFill>
+              <a:srgbClr val="FFFEFA"/>
+            </a:solidFill>
+            <a:prstDash val="solid"/>
+          </a:ln>
+        </p:spPr>
+      </p:sp>
+      <p:sp>
+        <p:nvSpPr>
+          <p:cNvPr id="13" name="Shape 8"/>
+          <p:cNvSpPr/>
+          <p:nvPr/>
+        </p:nvSpPr>
+        <p:spPr>
+          <a:xfrm>
+            <a:off x="8701888" y="2423160"/>
+            <a:ext cx="438912" cy="438912"/>
+          </a:xfrm>
+          <a:prstGeom prst="ellipse">
+            <a:avLst/>
+          </a:prstGeom>
+          <a:solidFill>
+            <a:srgbClr val="FC4067"/>
+          </a:solidFill>
+          <a:ln w="12700">
+            <a:solidFill>
+              <a:srgbClr val="FC4067"/>
+            </a:solidFill>
+            <a:prstDash val="solid"/>
+          </a:ln>
+        </p:spPr>
+      </p:sp>
+      <p:sp>
+        <p:nvSpPr>
+          <p:cNvPr id="14" name="Shape 9"/>
+          <p:cNvSpPr/>
+          <p:nvPr/>
+        </p:nvSpPr>
+        <p:spPr>
+          <a:xfrm>
+            <a:off x="8976208" y="2057400"/>
+            <a:ext cx="146304" cy="146304"/>
+          </a:xfrm>
+          <a:prstGeom prst="ellipse">
+            <a:avLst/>
+          </a:prstGeom>
+          <a:solidFill>
+            <a:srgbClr val="FFFEFA"/>
+          </a:solidFill>
+          <a:ln w="12700">
+            <a:solidFill>
+              <a:srgbClr val="FFFEFA"/>
+            </a:solidFill>
+            <a:prstDash val="solid"/>
+          </a:ln>
+        </p:spPr>
+      </p:sp>
+      <p:sp>
+        <p:nvSpPr>
+          <p:cNvPr id="15" name="Shape 10"/>
+          <p:cNvSpPr/>
+          <p:nvPr/>
+        </p:nvSpPr>
+        <p:spPr>
+          <a:xfrm>
+            <a:off x="7650328" y="5760720"/>
+            <a:ext cx="457200" cy="457200"/>
+          </a:xfrm>
+          <a:prstGeom prst="ellipse">
+            <a:avLst/>
+          </a:prstGeom>
+          <a:solidFill>
+            <a:srgbClr val="FC4067"/>
+          </a:solidFill>
+          <a:ln w="12700">
+            <a:solidFill>
+              <a:srgbClr val="FC4067"/>
+            </a:solidFill>
+            <a:prstDash val="solid"/>
+          </a:ln>
+        </p:spPr>
+      </p:sp>
+      <p:sp>
+        <p:nvSpPr>
+          <p:cNvPr id="16" name="Shape 11"/>
+          <p:cNvSpPr/>
+          <p:nvPr/>
+        </p:nvSpPr>
+        <p:spPr>
+          <a:xfrm>
+            <a:off x="8290408" y="5989320"/>
+            <a:ext cx="640080" cy="640080"/>
+          </a:xfrm>
+          <a:prstGeom prst="ellipse">
+            <a:avLst/>
+          </a:prstGeom>
+          <a:solidFill>
             <a:srgbClr val="FF9755"/>
           </a:solidFill>
           <a:ln w="12700">
@@ -10988,50 +11842,41 @@
       </p:sp>
       <p:sp>
         <p:nvSpPr>
-          <p:cNvPr id="8" name="Shape 5"/>
-          <p:cNvSpPr/>
-          <p:nvPr/>
-        </p:nvSpPr>
-        <p:spPr>
-          <a:xfrm>
-            <a:off x="685800" y="1965960"/>
-            <a:ext cx="5250028" cy="1897380"/>
-          </a:xfrm>
-          <a:prstGeom prst="roundRect">
-            <a:avLst>
-              <a:gd name="adj" fmla="val 6747"/>
-            </a:avLst>
-          </a:prstGeom>
-          <a:solidFill>
-            <a:srgbClr val="FFFEFA"/>
-          </a:solidFill>
-          <a:ln w="9525">
-            <a:solidFill>
-              <a:srgbClr val="D6D4CC"/>
-            </a:solidFill>
-            <a:prstDash val="solid"/>
-          </a:ln>
-          <a:effectLst>
-            <a:outerShdw sx="100000" sy="100000" kx="0" ky="0" algn="bl" rotWithShape="0" blurRad="127000" dist="38100" dir="5400000">
-              <a:srgbClr val="3C3828">
-                <a:alpha val="12000"/>
-              </a:srgbClr>
-            </a:outerShdw>
-          </a:effectLst>
-        </p:spPr>
-      </p:sp>
-      <p:sp>
-        <p:nvSpPr>
-          <p:cNvPr id="9" name="Shape 6"/>
-          <p:cNvSpPr/>
-          <p:nvPr/>
-        </p:nvSpPr>
-        <p:spPr>
-          <a:xfrm>
-            <a:off x="813816" y="1965960"/>
-            <a:ext cx="4993996" cy="91440"/>
-          </a:xfrm>
-          <a:prstGeom prst="rect">
+          <p:cNvPr id="17" name="Shape 12"/>
+          <p:cNvSpPr/>
+          <p:nvPr/>
+        </p:nvSpPr>
+        <p:spPr>
+          <a:xfrm>
+            <a:off x="3306928" y="4480560"/>
+            <a:ext cx="365760" cy="365760"/>
+          </a:xfrm>
+          <a:prstGeom prst="ellipse">
+            <a:avLst/>
+          </a:prstGeom>
+          <a:solidFill>
+            <a:srgbClr val="FF9755"/>
+          </a:solidFill>
+          <a:ln w="12700">
+            <a:solidFill>
+              <a:srgbClr val="FF9755"/>
+            </a:solidFill>
+            <a:prstDash val="solid"/>
+          </a:ln>
+        </p:spPr>
+      </p:sp>
+      <p:sp>
+        <p:nvSpPr>
+          <p:cNvPr id="18" name="Shape 13"/>
+          <p:cNvSpPr/>
+          <p:nvPr/>
+        </p:nvSpPr>
+        <p:spPr>
+          <a:xfrm>
+            <a:off x="4815688" y="5852160"/>
+            <a:ext cx="219456" cy="219456"/>
+          </a:xfrm>
+          <a:prstGeom prst="ellipse">
             <a:avLst/>
           </a:prstGeom>
           <a:solidFill>
@@ -11044,715 +11889,6 @@
             <a:prstDash val="solid"/>
           </a:ln>
         </p:spPr>
-      </p:sp>
-      <p:sp>
-        <p:nvSpPr>
-          <p:cNvPr id="10" name="Shape 7"/>
-          <p:cNvSpPr/>
-          <p:nvPr/>
-        </p:nvSpPr>
-        <p:spPr>
-          <a:xfrm>
-            <a:off x="960120" y="2286000"/>
-            <a:ext cx="548640" cy="548640"/>
-          </a:xfrm>
-          <a:prstGeom prst="ellipse">
-            <a:avLst/>
-          </a:prstGeom>
-          <a:solidFill>
-            <a:srgbClr val="02BDC7"/>
-          </a:solidFill>
-          <a:ln w="12700">
-            <a:solidFill>
-              <a:srgbClr val="02BDC7"/>
-            </a:solidFill>
-            <a:prstDash val="solid"/>
-          </a:ln>
-        </p:spPr>
-      </p:sp>
-      <p:sp>
-        <p:nvSpPr>
-          <p:cNvPr id="11" name="Text 8"/>
-          <p:cNvSpPr/>
-          <p:nvPr/>
-        </p:nvSpPr>
-        <p:spPr>
-          <a:xfrm>
-            <a:off x="960120" y="2286000"/>
-            <a:ext cx="548640" cy="548640"/>
-          </a:xfrm>
-          <a:prstGeom prst="rect">
-            <a:avLst/>
-          </a:prstGeom>
-          <a:noFill/>
-          <a:ln/>
-        </p:spPr>
-        <p:txBody>
-          <a:bodyPr wrap="square" lIns="0" tIns="0" rIns="0" bIns="0" rtlCol="0" anchor="ctr"/>
-          <a:lstStyle/>
-          <a:p>
-            <a:pPr algn="ctr" indent="0" marL="0">
-              <a:buNone/>
-            </a:pPr>
-            <a:r>
-              <a:rPr lang="en-US" sz="2200" b="1" dirty="0">
-                <a:solidFill>
-                  <a:srgbClr val="FFFEFA"/>
-                </a:solidFill>
-                <a:latin typeface="Georgia" pitchFamily="34" charset="0"/>
-                <a:ea typeface="Georgia" pitchFamily="34" charset="-122"/>
-                <a:cs typeface="Georgia" pitchFamily="34" charset="-120"/>
-              </a:rPr>
-              <a:t>1</a:t>
-            </a:r>
-            <a:endParaRPr lang="en-US" sz="2200" dirty="0"/>
-          </a:p>
-        </p:txBody>
-      </p:sp>
-      <p:sp>
-        <p:nvSpPr>
-          <p:cNvPr id="12" name="Text 9"/>
-          <p:cNvSpPr/>
-          <p:nvPr/>
-        </p:nvSpPr>
-        <p:spPr>
-          <a:xfrm>
-            <a:off x="1737360" y="2194560"/>
-            <a:ext cx="3924148" cy="1485900"/>
-          </a:xfrm>
-          <a:prstGeom prst="rect">
-            <a:avLst/>
-          </a:prstGeom>
-          <a:noFill/>
-          <a:ln/>
-        </p:spPr>
-        <p:txBody>
-          <a:bodyPr wrap="square" lIns="0" tIns="0" rIns="0" bIns="0" rtlCol="0" anchor="t"/>
-          <a:lstStyle/>
-          <a:p>
-            <a:pPr indent="0" marL="0">
-              <a:buNone/>
-            </a:pPr>
-            <a:r>
-              <a:rPr lang="en-US" sz="1800" dirty="0">
-                <a:solidFill>
-                  <a:srgbClr val="3C3828"/>
-                </a:solidFill>
-                <a:highlight>
-                  <a:srgbClr val="FFE14D"/>
-                </a:highlight>
-                <a:latin typeface="Calibri" pitchFamily="34" charset="0"/>
-                <a:ea typeface="Calibri" pitchFamily="34" charset="-122"/>
-                <a:cs typeface="Calibri" pitchFamily="34" charset="-120"/>
-              </a:rPr>
-              <a:t>Clean up.</a:t>
-            </a:r>
-            <a:r>
-              <a:rPr lang="en-US" sz="1800" dirty="0">
-                <a:solidFill>
-                  <a:srgbClr val="3C3828"/>
-                </a:solidFill>
-                <a:latin typeface="Calibri" pitchFamily="34" charset="0"/>
-                <a:ea typeface="Calibri" pitchFamily="34" charset="-122"/>
-                <a:cs typeface="Calibri" pitchFamily="34" charset="-120"/>
-              </a:rPr>
-              <a:t> Delete your pre-writing, your observation and analysis notes, and headings like “Introduction.” Only the essay stays.</a:t>
-            </a:r>
-            <a:endParaRPr lang="en-US" sz="1800" dirty="0"/>
-          </a:p>
-        </p:txBody>
-      </p:sp>
-      <p:sp>
-        <p:nvSpPr>
-          <p:cNvPr id="13" name="Shape 10"/>
-          <p:cNvSpPr/>
-          <p:nvPr/>
-        </p:nvSpPr>
-        <p:spPr>
-          <a:xfrm>
-            <a:off x="6255868" y="1965960"/>
-            <a:ext cx="5250028" cy="1897380"/>
-          </a:xfrm>
-          <a:prstGeom prst="roundRect">
-            <a:avLst>
-              <a:gd name="adj" fmla="val 6747"/>
-            </a:avLst>
-          </a:prstGeom>
-          <a:solidFill>
-            <a:srgbClr val="FFFEFA"/>
-          </a:solidFill>
-          <a:ln w="9525">
-            <a:solidFill>
-              <a:srgbClr val="D6D4CC"/>
-            </a:solidFill>
-            <a:prstDash val="solid"/>
-          </a:ln>
-          <a:effectLst>
-            <a:outerShdw sx="100000" sy="100000" kx="0" ky="0" algn="bl" rotWithShape="0" blurRad="127000" dist="38100" dir="5400000">
-              <a:srgbClr val="3C3828">
-                <a:alpha val="12000"/>
-              </a:srgbClr>
-            </a:outerShdw>
-          </a:effectLst>
-        </p:spPr>
-      </p:sp>
-      <p:sp>
-        <p:nvSpPr>
-          <p:cNvPr id="14" name="Shape 11"/>
-          <p:cNvSpPr/>
-          <p:nvPr/>
-        </p:nvSpPr>
-        <p:spPr>
-          <a:xfrm>
-            <a:off x="6383884" y="1965960"/>
-            <a:ext cx="4993996" cy="91440"/>
-          </a:xfrm>
-          <a:prstGeom prst="rect">
-            <a:avLst/>
-          </a:prstGeom>
-          <a:solidFill>
-            <a:srgbClr val="FFB600"/>
-          </a:solidFill>
-          <a:ln w="12700">
-            <a:solidFill>
-              <a:srgbClr val="FFB600"/>
-            </a:solidFill>
-            <a:prstDash val="solid"/>
-          </a:ln>
-        </p:spPr>
-      </p:sp>
-      <p:sp>
-        <p:nvSpPr>
-          <p:cNvPr id="15" name="Shape 12"/>
-          <p:cNvSpPr/>
-          <p:nvPr/>
-        </p:nvSpPr>
-        <p:spPr>
-          <a:xfrm>
-            <a:off x="6530188" y="2286000"/>
-            <a:ext cx="548640" cy="548640"/>
-          </a:xfrm>
-          <a:prstGeom prst="ellipse">
-            <a:avLst/>
-          </a:prstGeom>
-          <a:solidFill>
-            <a:srgbClr val="FFB600"/>
-          </a:solidFill>
-          <a:ln w="12700">
-            <a:solidFill>
-              <a:srgbClr val="FFB600"/>
-            </a:solidFill>
-            <a:prstDash val="solid"/>
-          </a:ln>
-        </p:spPr>
-      </p:sp>
-      <p:sp>
-        <p:nvSpPr>
-          <p:cNvPr id="16" name="Text 13"/>
-          <p:cNvSpPr/>
-          <p:nvPr/>
-        </p:nvSpPr>
-        <p:spPr>
-          <a:xfrm>
-            <a:off x="6530188" y="2286000"/>
-            <a:ext cx="548640" cy="548640"/>
-          </a:xfrm>
-          <a:prstGeom prst="rect">
-            <a:avLst/>
-          </a:prstGeom>
-          <a:noFill/>
-          <a:ln/>
-        </p:spPr>
-        <p:txBody>
-          <a:bodyPr wrap="square" lIns="0" tIns="0" rIns="0" bIns="0" rtlCol="0" anchor="ctr"/>
-          <a:lstStyle/>
-          <a:p>
-            <a:pPr algn="ctr" indent="0" marL="0">
-              <a:buNone/>
-            </a:pPr>
-            <a:r>
-              <a:rPr lang="en-US" sz="2200" b="1" dirty="0">
-                <a:solidFill>
-                  <a:srgbClr val="FFFEFA"/>
-                </a:solidFill>
-                <a:latin typeface="Georgia" pitchFamily="34" charset="0"/>
-                <a:ea typeface="Georgia" pitchFamily="34" charset="-122"/>
-                <a:cs typeface="Georgia" pitchFamily="34" charset="-120"/>
-              </a:rPr>
-              <a:t>2</a:t>
-            </a:r>
-            <a:endParaRPr lang="en-US" sz="2200" dirty="0"/>
-          </a:p>
-        </p:txBody>
-      </p:sp>
-      <p:sp>
-        <p:nvSpPr>
-          <p:cNvPr id="17" name="Text 14"/>
-          <p:cNvSpPr/>
-          <p:nvPr/>
-        </p:nvSpPr>
-        <p:spPr>
-          <a:xfrm>
-            <a:off x="7307428" y="2194560"/>
-            <a:ext cx="3924148" cy="1485900"/>
-          </a:xfrm>
-          <a:prstGeom prst="rect">
-            <a:avLst/>
-          </a:prstGeom>
-          <a:noFill/>
-          <a:ln/>
-        </p:spPr>
-        <p:txBody>
-          <a:bodyPr wrap="square" lIns="0" tIns="0" rIns="0" bIns="0" rtlCol="0" anchor="t"/>
-          <a:lstStyle/>
-          <a:p>
-            <a:pPr indent="0" marL="0">
-              <a:buNone/>
-            </a:pPr>
-            <a:r>
-              <a:rPr lang="en-US" sz="1800" dirty="0">
-                <a:solidFill>
-                  <a:srgbClr val="3C3828"/>
-                </a:solidFill>
-                <a:highlight>
-                  <a:srgbClr val="FFE14D"/>
-                </a:highlight>
-                <a:latin typeface="Calibri" pitchFamily="34" charset="0"/>
-                <a:ea typeface="Calibri" pitchFamily="34" charset="-122"/>
-                <a:cs typeface="Calibri" pitchFamily="34" charset="-120"/>
-              </a:rPr>
-              <a:t>Title it.</a:t>
-            </a:r>
-            <a:r>
-              <a:rPr lang="en-US" sz="1800" dirty="0">
-                <a:solidFill>
-                  <a:srgbClr val="3C3828"/>
-                </a:solidFill>
-                <a:latin typeface="Calibri" pitchFamily="34" charset="0"/>
-                <a:ea typeface="Calibri" pitchFamily="34" charset="-122"/>
-                <a:cs typeface="Calibri" pitchFamily="34" charset="-120"/>
-              </a:rPr>
-              <a:t> Type your title on the first line, then use the toolbar to </a:t>
-            </a:r>
-            <a:r>
-              <a:rPr lang="en-US" sz="1800" dirty="0">
-                <a:solidFill>
-                  <a:srgbClr val="3C3828"/>
-                </a:solidFill>
-                <a:highlight>
-                  <a:srgbClr val="FFE14D"/>
-                </a:highlight>
-                <a:latin typeface="Calibri" pitchFamily="34" charset="0"/>
-                <a:ea typeface="Calibri" pitchFamily="34" charset="-122"/>
-                <a:cs typeface="Calibri" pitchFamily="34" charset="-120"/>
-              </a:rPr>
-              <a:t>center</a:t>
-            </a:r>
-            <a:r>
-              <a:rPr lang="en-US" sz="1800" dirty="0">
-                <a:solidFill>
-                  <a:srgbClr val="3C3828"/>
-                </a:solidFill>
-                <a:latin typeface="Calibri" pitchFamily="34" charset="0"/>
-                <a:ea typeface="Calibri" pitchFamily="34" charset="-122"/>
-                <a:cs typeface="Calibri" pitchFamily="34" charset="-120"/>
-              </a:rPr>
-              <a:t> and </a:t>
-            </a:r>
-            <a:r>
-              <a:rPr lang="en-US" sz="1800" dirty="0">
-                <a:solidFill>
-                  <a:srgbClr val="3C3828"/>
-                </a:solidFill>
-                <a:highlight>
-                  <a:srgbClr val="FFE14D"/>
-                </a:highlight>
-                <a:latin typeface="Calibri" pitchFamily="34" charset="0"/>
-                <a:ea typeface="Calibri" pitchFamily="34" charset="-122"/>
-                <a:cs typeface="Calibri" pitchFamily="34" charset="-120"/>
-              </a:rPr>
-              <a:t>italicize</a:t>
-            </a:r>
-            <a:r>
-              <a:rPr lang="en-US" sz="1800" dirty="0">
-                <a:solidFill>
-                  <a:srgbClr val="3C3828"/>
-                </a:solidFill>
-                <a:latin typeface="Calibri" pitchFamily="34" charset="0"/>
-                <a:ea typeface="Calibri" pitchFamily="34" charset="-122"/>
-                <a:cs typeface="Calibri" pitchFamily="34" charset="-120"/>
-              </a:rPr>
-              <a:t> it.</a:t>
-            </a:r>
-            <a:endParaRPr lang="en-US" sz="1800" dirty="0"/>
-          </a:p>
-        </p:txBody>
-      </p:sp>
-      <p:sp>
-        <p:nvSpPr>
-          <p:cNvPr id="18" name="Shape 15"/>
-          <p:cNvSpPr/>
-          <p:nvPr/>
-        </p:nvSpPr>
-        <p:spPr>
-          <a:xfrm>
-            <a:off x="685800" y="4183380"/>
-            <a:ext cx="5250028" cy="1897380"/>
-          </a:xfrm>
-          <a:prstGeom prst="roundRect">
-            <a:avLst>
-              <a:gd name="adj" fmla="val 6747"/>
-            </a:avLst>
-          </a:prstGeom>
-          <a:solidFill>
-            <a:srgbClr val="FFFEFA"/>
-          </a:solidFill>
-          <a:ln w="9525">
-            <a:solidFill>
-              <a:srgbClr val="D6D4CC"/>
-            </a:solidFill>
-            <a:prstDash val="solid"/>
-          </a:ln>
-          <a:effectLst>
-            <a:outerShdw sx="100000" sy="100000" kx="0" ky="0" algn="bl" rotWithShape="0" blurRad="127000" dist="38100" dir="5400000">
-              <a:srgbClr val="3C3828">
-                <a:alpha val="12000"/>
-              </a:srgbClr>
-            </a:outerShdw>
-          </a:effectLst>
-        </p:spPr>
-      </p:sp>
-      <p:sp>
-        <p:nvSpPr>
-          <p:cNvPr id="19" name="Shape 16"/>
-          <p:cNvSpPr/>
-          <p:nvPr/>
-        </p:nvSpPr>
-        <p:spPr>
-          <a:xfrm>
-            <a:off x="813816" y="4183380"/>
-            <a:ext cx="4993996" cy="91440"/>
-          </a:xfrm>
-          <a:prstGeom prst="rect">
-            <a:avLst/>
-          </a:prstGeom>
-          <a:solidFill>
-            <a:srgbClr val="FC4540"/>
-          </a:solidFill>
-          <a:ln w="12700">
-            <a:solidFill>
-              <a:srgbClr val="FC4540"/>
-            </a:solidFill>
-            <a:prstDash val="solid"/>
-          </a:ln>
-        </p:spPr>
-      </p:sp>
-      <p:sp>
-        <p:nvSpPr>
-          <p:cNvPr id="20" name="Shape 17"/>
-          <p:cNvSpPr/>
-          <p:nvPr/>
-        </p:nvSpPr>
-        <p:spPr>
-          <a:xfrm>
-            <a:off x="960120" y="4503420"/>
-            <a:ext cx="548640" cy="548640"/>
-          </a:xfrm>
-          <a:prstGeom prst="ellipse">
-            <a:avLst/>
-          </a:prstGeom>
-          <a:solidFill>
-            <a:srgbClr val="FC4540"/>
-          </a:solidFill>
-          <a:ln w="12700">
-            <a:solidFill>
-              <a:srgbClr val="FC4540"/>
-            </a:solidFill>
-            <a:prstDash val="solid"/>
-          </a:ln>
-        </p:spPr>
-      </p:sp>
-      <p:sp>
-        <p:nvSpPr>
-          <p:cNvPr id="21" name="Text 18"/>
-          <p:cNvSpPr/>
-          <p:nvPr/>
-        </p:nvSpPr>
-        <p:spPr>
-          <a:xfrm>
-            <a:off x="960120" y="4503420"/>
-            <a:ext cx="548640" cy="548640"/>
-          </a:xfrm>
-          <a:prstGeom prst="rect">
-            <a:avLst/>
-          </a:prstGeom>
-          <a:noFill/>
-          <a:ln/>
-        </p:spPr>
-        <p:txBody>
-          <a:bodyPr wrap="square" lIns="0" tIns="0" rIns="0" bIns="0" rtlCol="0" anchor="ctr"/>
-          <a:lstStyle/>
-          <a:p>
-            <a:pPr algn="ctr" indent="0" marL="0">
-              <a:buNone/>
-            </a:pPr>
-            <a:r>
-              <a:rPr lang="en-US" sz="2200" b="1" dirty="0">
-                <a:solidFill>
-                  <a:srgbClr val="FFFEFA"/>
-                </a:solidFill>
-                <a:latin typeface="Georgia" pitchFamily="34" charset="0"/>
-                <a:ea typeface="Georgia" pitchFamily="34" charset="-122"/>
-                <a:cs typeface="Georgia" pitchFamily="34" charset="-120"/>
-              </a:rPr>
-              <a:t>3</a:t>
-            </a:r>
-            <a:endParaRPr lang="en-US" sz="2200" dirty="0"/>
-          </a:p>
-        </p:txBody>
-      </p:sp>
-      <p:sp>
-        <p:nvSpPr>
-          <p:cNvPr id="22" name="Text 19"/>
-          <p:cNvSpPr/>
-          <p:nvPr/>
-        </p:nvSpPr>
-        <p:spPr>
-          <a:xfrm>
-            <a:off x="1737360" y="4411980"/>
-            <a:ext cx="3924148" cy="1485900"/>
-          </a:xfrm>
-          <a:prstGeom prst="rect">
-            <a:avLst/>
-          </a:prstGeom>
-          <a:noFill/>
-          <a:ln/>
-        </p:spPr>
-        <p:txBody>
-          <a:bodyPr wrap="square" lIns="0" tIns="0" rIns="0" bIns="0" rtlCol="0" anchor="t"/>
-          <a:lstStyle/>
-          <a:p>
-            <a:pPr indent="0" marL="0">
-              <a:buNone/>
-            </a:pPr>
-            <a:r>
-              <a:rPr lang="en-US" sz="1800" dirty="0">
-                <a:solidFill>
-                  <a:srgbClr val="3C3828"/>
-                </a:solidFill>
-                <a:highlight>
-                  <a:srgbClr val="FFE14D"/>
-                </a:highlight>
-                <a:latin typeface="Calibri" pitchFamily="34" charset="0"/>
-                <a:ea typeface="Calibri" pitchFamily="34" charset="-122"/>
-                <a:cs typeface="Calibri" pitchFamily="34" charset="-120"/>
-              </a:rPr>
-              <a:t>Keep it simple.</a:t>
-            </a:r>
-            <a:r>
-              <a:rPr lang="en-US" sz="1800" dirty="0">
-                <a:solidFill>
-                  <a:srgbClr val="3C3828"/>
-                </a:solidFill>
-                <a:latin typeface="Calibri" pitchFamily="34" charset="0"/>
-                <a:ea typeface="Calibri" pitchFamily="34" charset="-122"/>
-                <a:cs typeface="Calibri" pitchFamily="34" charset="-120"/>
-              </a:rPr>
-              <a:t> YAWP! sets the font for you. Paragraphs stay left-aligned (only the title is centered), with an empty line between them.</a:t>
-            </a:r>
-            <a:endParaRPr lang="en-US" sz="1800" dirty="0"/>
-          </a:p>
-        </p:txBody>
-      </p:sp>
-      <p:sp>
-        <p:nvSpPr>
-          <p:cNvPr id="23" name="Shape 20"/>
-          <p:cNvSpPr/>
-          <p:nvPr/>
-        </p:nvSpPr>
-        <p:spPr>
-          <a:xfrm>
-            <a:off x="6255868" y="4183380"/>
-            <a:ext cx="5250028" cy="1897380"/>
-          </a:xfrm>
-          <a:prstGeom prst="roundRect">
-            <a:avLst>
-              <a:gd name="adj" fmla="val 6747"/>
-            </a:avLst>
-          </a:prstGeom>
-          <a:solidFill>
-            <a:srgbClr val="FFFEFA"/>
-          </a:solidFill>
-          <a:ln w="9525">
-            <a:solidFill>
-              <a:srgbClr val="D6D4CC"/>
-            </a:solidFill>
-            <a:prstDash val="solid"/>
-          </a:ln>
-          <a:effectLst>
-            <a:outerShdw sx="100000" sy="100000" kx="0" ky="0" algn="bl" rotWithShape="0" blurRad="127000" dist="38100" dir="5400000">
-              <a:srgbClr val="3C3828">
-                <a:alpha val="12000"/>
-              </a:srgbClr>
-            </a:outerShdw>
-          </a:effectLst>
-        </p:spPr>
-      </p:sp>
-      <p:sp>
-        <p:nvSpPr>
-          <p:cNvPr id="24" name="Shape 21"/>
-          <p:cNvSpPr/>
-          <p:nvPr/>
-        </p:nvSpPr>
-        <p:spPr>
-          <a:xfrm>
-            <a:off x="6383884" y="4183380"/>
-            <a:ext cx="4993996" cy="91440"/>
-          </a:xfrm>
-          <a:prstGeom prst="rect">
-            <a:avLst/>
-          </a:prstGeom>
-          <a:solidFill>
-            <a:srgbClr val="FF9755"/>
-          </a:solidFill>
-          <a:ln w="12700">
-            <a:solidFill>
-              <a:srgbClr val="FF9755"/>
-            </a:solidFill>
-            <a:prstDash val="solid"/>
-          </a:ln>
-        </p:spPr>
-      </p:sp>
-      <p:sp>
-        <p:nvSpPr>
-          <p:cNvPr id="25" name="Shape 22"/>
-          <p:cNvSpPr/>
-          <p:nvPr/>
-        </p:nvSpPr>
-        <p:spPr>
-          <a:xfrm>
-            <a:off x="6530188" y="4503420"/>
-            <a:ext cx="548640" cy="548640"/>
-          </a:xfrm>
-          <a:prstGeom prst="ellipse">
-            <a:avLst/>
-          </a:prstGeom>
-          <a:solidFill>
-            <a:srgbClr val="FF9755"/>
-          </a:solidFill>
-          <a:ln w="12700">
-            <a:solidFill>
-              <a:srgbClr val="FF9755"/>
-            </a:solidFill>
-            <a:prstDash val="solid"/>
-          </a:ln>
-        </p:spPr>
-      </p:sp>
-      <p:sp>
-        <p:nvSpPr>
-          <p:cNvPr id="26" name="Text 23"/>
-          <p:cNvSpPr/>
-          <p:nvPr/>
-        </p:nvSpPr>
-        <p:spPr>
-          <a:xfrm>
-            <a:off x="6530188" y="4503420"/>
-            <a:ext cx="548640" cy="548640"/>
-          </a:xfrm>
-          <a:prstGeom prst="rect">
-            <a:avLst/>
-          </a:prstGeom>
-          <a:noFill/>
-          <a:ln/>
-        </p:spPr>
-        <p:txBody>
-          <a:bodyPr wrap="square" lIns="0" tIns="0" rIns="0" bIns="0" rtlCol="0" anchor="ctr"/>
-          <a:lstStyle/>
-          <a:p>
-            <a:pPr algn="ctr" indent="0" marL="0">
-              <a:buNone/>
-            </a:pPr>
-            <a:r>
-              <a:rPr lang="en-US" sz="2200" b="1" dirty="0">
-                <a:solidFill>
-                  <a:srgbClr val="FFFEFA"/>
-                </a:solidFill>
-                <a:latin typeface="Georgia" pitchFamily="34" charset="0"/>
-                <a:ea typeface="Georgia" pitchFamily="34" charset="-122"/>
-                <a:cs typeface="Georgia" pitchFamily="34" charset="-120"/>
-              </a:rPr>
-              <a:t>4</a:t>
-            </a:r>
-            <a:endParaRPr lang="en-US" sz="2200" dirty="0"/>
-          </a:p>
-        </p:txBody>
-      </p:sp>
-      <p:sp>
-        <p:nvSpPr>
-          <p:cNvPr id="27" name="Text 24"/>
-          <p:cNvSpPr/>
-          <p:nvPr/>
-        </p:nvSpPr>
-        <p:spPr>
-          <a:xfrm>
-            <a:off x="7307428" y="4411980"/>
-            <a:ext cx="3924148" cy="1485900"/>
-          </a:xfrm>
-          <a:prstGeom prst="rect">
-            <a:avLst/>
-          </a:prstGeom>
-          <a:noFill/>
-          <a:ln/>
-        </p:spPr>
-        <p:txBody>
-          <a:bodyPr wrap="square" lIns="0" tIns="0" rIns="0" bIns="0" rtlCol="0" anchor="t"/>
-          <a:lstStyle/>
-          <a:p>
-            <a:pPr indent="0" marL="0">
-              <a:buNone/>
-            </a:pPr>
-            <a:r>
-              <a:rPr lang="en-US" sz="1800" dirty="0">
-                <a:solidFill>
-                  <a:srgbClr val="3C3828"/>
-                </a:solidFill>
-                <a:highlight>
-                  <a:srgbClr val="FFE14D"/>
-                </a:highlight>
-                <a:latin typeface="Calibri" pitchFamily="34" charset="0"/>
-                <a:ea typeface="Calibri" pitchFamily="34" charset="-122"/>
-                <a:cs typeface="Calibri" pitchFamily="34" charset="-120"/>
-              </a:rPr>
-              <a:t>Read it, then Submit.</a:t>
-            </a:r>
-            <a:r>
-              <a:rPr lang="en-US" sz="1800" dirty="0">
-                <a:solidFill>
-                  <a:srgbClr val="3C3828"/>
-                </a:solidFill>
-                <a:latin typeface="Calibri" pitchFamily="34" charset="0"/>
-                <a:ea typeface="Calibri" pitchFamily="34" charset="-122"/>
-                <a:cs typeface="Calibri" pitchFamily="34" charset="-120"/>
-              </a:rPr>
-              <a:t> Read it once from the top, ask the Tutor for feedback if you want, then click </a:t>
-            </a:r>
-            <a:r>
-              <a:rPr lang="en-US" sz="1800" dirty="0">
-                <a:solidFill>
-                  <a:srgbClr val="3C3828"/>
-                </a:solidFill>
-                <a:highlight>
-                  <a:srgbClr val="FFE14D"/>
-                </a:highlight>
-                <a:latin typeface="Calibri" pitchFamily="34" charset="0"/>
-                <a:ea typeface="Calibri" pitchFamily="34" charset="-122"/>
-                <a:cs typeface="Calibri" pitchFamily="34" charset="-120"/>
-              </a:rPr>
-              <a:t>Submit.</a:t>
-            </a:r>
-            <a:endParaRPr lang="en-US" sz="1800" dirty="0"/>
-          </a:p>
-        </p:txBody>
       </p:sp>
       <p:sp>
         <p:nvSpPr>
@@ -11854,13 +11990,13 @@
             <a:r>
               <a:rPr lang="en-US" sz="1200" b="1" spc="200" kern="0" dirty="0">
                 <a:solidFill>
-                  <a:srgbClr val="FFB600"/>
+                  <a:srgbClr val="02BDC7"/>
                 </a:solidFill>
                 <a:latin typeface="Consolas" pitchFamily="34" charset="0"/>
                 <a:ea typeface="Consolas" pitchFamily="34" charset="-122"/>
                 <a:cs typeface="Consolas" pitchFamily="34" charset="-120"/>
               </a:rPr>
-              <a:t>DONE</a:t>
+              <a:t>FINISHING TOUCHES IN YAWP!</a:t>
             </a:r>
             <a:endParaRPr lang="en-US" sz="1200" dirty="0"/>
           </a:p>
@@ -11899,7 +12035,7 @@
                 <a:ea typeface="Georgia" pitchFamily="34" charset="-122"/>
                 <a:cs typeface="Georgia" pitchFamily="34" charset="-120"/>
               </a:rPr>
-              <a:t>What finished looks like</a:t>
+              <a:t>Finishing touches</a:t>
             </a:r>
             <a:endParaRPr lang="en-US" sz="3600" dirty="0"/>
           </a:p>
@@ -11913,12 +12049,111 @@
         </p:nvSpPr>
         <p:spPr>
           <a:xfrm>
-            <a:off x="685800" y="1828800"/>
-            <a:ext cx="6949440" cy="4150360"/>
+            <a:off x="10637215" y="457200"/>
+            <a:ext cx="868680" cy="868680"/>
+          </a:xfrm>
+          <a:prstGeom prst="ellipse">
+            <a:avLst/>
+          </a:prstGeom>
+          <a:solidFill>
+            <a:srgbClr val="02BDC7"/>
+          </a:solidFill>
+          <a:ln w="12700">
+            <a:solidFill>
+              <a:srgbClr val="02BDC7"/>
+            </a:solidFill>
+            <a:prstDash val="solid"/>
+          </a:ln>
+        </p:spPr>
+      </p:sp>
+      <p:pic>
+        <p:nvPicPr>
+          <p:cNvPr id="5" name="Image 0" descr="pencil icon">    </p:cNvPr>
+          <p:cNvPicPr>
+            <a:picLocks noChangeAspect="1"/>
+          </p:cNvPicPr>
+          <p:nvPr/>
+        </p:nvPicPr>
+        <p:blipFill>
+          <a:blip r:embed="rId1"/>
+          <a:stretch>
+            <a:fillRect/>
+          </a:stretch>
+        </p:blipFill>
+        <p:spPr>
+          <a:xfrm>
+            <a:off x="10810951" y="630936"/>
+            <a:ext cx="521208" cy="521208"/>
+          </a:xfrm>
+          <a:prstGeom prst="rect">
+            <a:avLst/>
+          </a:prstGeom>
+        </p:spPr>
+      </p:pic>
+      <p:sp>
+        <p:nvSpPr>
+          <p:cNvPr id="6" name="Shape 3"/>
+          <p:cNvSpPr/>
+          <p:nvPr/>
+        </p:nvSpPr>
+        <p:spPr>
+          <a:xfrm>
+            <a:off x="10344607" y="530352"/>
+            <a:ext cx="182880" cy="182880"/>
+          </a:xfrm>
+          <a:prstGeom prst="ellipse">
+            <a:avLst/>
+          </a:prstGeom>
+          <a:solidFill>
+            <a:srgbClr val="FC4540"/>
+          </a:solidFill>
+          <a:ln w="12700">
+            <a:solidFill>
+              <a:srgbClr val="FC4540"/>
+            </a:solidFill>
+            <a:prstDash val="solid"/>
+          </a:ln>
+        </p:spPr>
+      </p:sp>
+      <p:sp>
+        <p:nvSpPr>
+          <p:cNvPr id="7" name="Shape 4"/>
+          <p:cNvSpPr/>
+          <p:nvPr/>
+        </p:nvSpPr>
+        <p:spPr>
+          <a:xfrm>
+            <a:off x="11460175" y="1307592"/>
+            <a:ext cx="128016" cy="128016"/>
+          </a:xfrm>
+          <a:prstGeom prst="ellipse">
+            <a:avLst/>
+          </a:prstGeom>
+          <a:solidFill>
+            <a:srgbClr val="FF9755"/>
+          </a:solidFill>
+          <a:ln w="12700">
+            <a:solidFill>
+              <a:srgbClr val="FF9755"/>
+            </a:solidFill>
+            <a:prstDash val="solid"/>
+          </a:ln>
+        </p:spPr>
+      </p:sp>
+      <p:sp>
+        <p:nvSpPr>
+          <p:cNvPr id="8" name="Shape 5"/>
+          <p:cNvSpPr/>
+          <p:nvPr/>
+        </p:nvSpPr>
+        <p:spPr>
+          <a:xfrm>
+            <a:off x="685800" y="1965960"/>
+            <a:ext cx="5250028" cy="1897380"/>
           </a:xfrm>
           <a:prstGeom prst="roundRect">
             <a:avLst>
-              <a:gd name="adj" fmla="val 3084"/>
+              <a:gd name="adj" fmla="val 6747"/>
             </a:avLst>
           </a:prstGeom>
           <a:solidFill>
@@ -11939,6 +12174,925 @@
           </a:effectLst>
         </p:spPr>
       </p:sp>
+      <p:sp>
+        <p:nvSpPr>
+          <p:cNvPr id="9" name="Shape 6"/>
+          <p:cNvSpPr/>
+          <p:nvPr/>
+        </p:nvSpPr>
+        <p:spPr>
+          <a:xfrm>
+            <a:off x="813816" y="1965960"/>
+            <a:ext cx="4993996" cy="91440"/>
+          </a:xfrm>
+          <a:prstGeom prst="rect">
+            <a:avLst/>
+          </a:prstGeom>
+          <a:solidFill>
+            <a:srgbClr val="02BDC7"/>
+          </a:solidFill>
+          <a:ln w="12700">
+            <a:solidFill>
+              <a:srgbClr val="02BDC7"/>
+            </a:solidFill>
+            <a:prstDash val="solid"/>
+          </a:ln>
+        </p:spPr>
+      </p:sp>
+      <p:sp>
+        <p:nvSpPr>
+          <p:cNvPr id="10" name="Shape 7"/>
+          <p:cNvSpPr/>
+          <p:nvPr/>
+        </p:nvSpPr>
+        <p:spPr>
+          <a:xfrm>
+            <a:off x="960120" y="2286000"/>
+            <a:ext cx="548640" cy="548640"/>
+          </a:xfrm>
+          <a:prstGeom prst="ellipse">
+            <a:avLst/>
+          </a:prstGeom>
+          <a:solidFill>
+            <a:srgbClr val="02BDC7"/>
+          </a:solidFill>
+          <a:ln w="12700">
+            <a:solidFill>
+              <a:srgbClr val="02BDC7"/>
+            </a:solidFill>
+            <a:prstDash val="solid"/>
+          </a:ln>
+        </p:spPr>
+      </p:sp>
+      <p:sp>
+        <p:nvSpPr>
+          <p:cNvPr id="11" name="Text 8"/>
+          <p:cNvSpPr/>
+          <p:nvPr/>
+        </p:nvSpPr>
+        <p:spPr>
+          <a:xfrm>
+            <a:off x="960120" y="2286000"/>
+            <a:ext cx="548640" cy="548640"/>
+          </a:xfrm>
+          <a:prstGeom prst="rect">
+            <a:avLst/>
+          </a:prstGeom>
+          <a:noFill/>
+          <a:ln/>
+        </p:spPr>
+        <p:txBody>
+          <a:bodyPr wrap="square" lIns="0" tIns="0" rIns="0" bIns="0" rtlCol="0" anchor="ctr"/>
+          <a:lstStyle/>
+          <a:p>
+            <a:pPr algn="ctr" indent="0" marL="0">
+              <a:buNone/>
+            </a:pPr>
+            <a:r>
+              <a:rPr lang="en-US" sz="2200" b="1" dirty="0">
+                <a:solidFill>
+                  <a:srgbClr val="FFFEFA"/>
+                </a:solidFill>
+                <a:latin typeface="Georgia" pitchFamily="34" charset="0"/>
+                <a:ea typeface="Georgia" pitchFamily="34" charset="-122"/>
+                <a:cs typeface="Georgia" pitchFamily="34" charset="-120"/>
+              </a:rPr>
+              <a:t>1</a:t>
+            </a:r>
+            <a:endParaRPr lang="en-US" sz="2200" dirty="0"/>
+          </a:p>
+        </p:txBody>
+      </p:sp>
+      <p:sp>
+        <p:nvSpPr>
+          <p:cNvPr id="12" name="Text 9"/>
+          <p:cNvSpPr/>
+          <p:nvPr/>
+        </p:nvSpPr>
+        <p:spPr>
+          <a:xfrm>
+            <a:off x="1737360" y="2194560"/>
+            <a:ext cx="3924148" cy="1485900"/>
+          </a:xfrm>
+          <a:prstGeom prst="rect">
+            <a:avLst/>
+          </a:prstGeom>
+          <a:noFill/>
+          <a:ln/>
+        </p:spPr>
+        <p:txBody>
+          <a:bodyPr wrap="square" lIns="0" tIns="0" rIns="0" bIns="0" rtlCol="0" anchor="t"/>
+          <a:lstStyle/>
+          <a:p>
+            <a:pPr indent="0" marL="0">
+              <a:buNone/>
+            </a:pPr>
+            <a:r>
+              <a:rPr lang="en-US" sz="1800" dirty="0">
+                <a:solidFill>
+                  <a:srgbClr val="3C3828"/>
+                </a:solidFill>
+                <a:highlight>
+                  <a:srgbClr val="FFE14D"/>
+                </a:highlight>
+                <a:latin typeface="Calibri" pitchFamily="34" charset="0"/>
+                <a:ea typeface="Calibri" pitchFamily="34" charset="-122"/>
+                <a:cs typeface="Calibri" pitchFamily="34" charset="-120"/>
+              </a:rPr>
+              <a:t>Clean up.</a:t>
+            </a:r>
+            <a:r>
+              <a:rPr lang="en-US" sz="1800" dirty="0">
+                <a:solidFill>
+                  <a:srgbClr val="3C3828"/>
+                </a:solidFill>
+                <a:latin typeface="Calibri" pitchFamily="34" charset="0"/>
+                <a:ea typeface="Calibri" pitchFamily="34" charset="-122"/>
+                <a:cs typeface="Calibri" pitchFamily="34" charset="-120"/>
+              </a:rPr>
+              <a:t> Delete your pre-writing, your observation and analysis notes, and headings like “Introduction.” Only the essay stays.</a:t>
+            </a:r>
+            <a:endParaRPr lang="en-US" sz="1800" dirty="0"/>
+          </a:p>
+        </p:txBody>
+      </p:sp>
+      <p:sp>
+        <p:nvSpPr>
+          <p:cNvPr id="13" name="Shape 10"/>
+          <p:cNvSpPr/>
+          <p:nvPr/>
+        </p:nvSpPr>
+        <p:spPr>
+          <a:xfrm>
+            <a:off x="6255868" y="1965960"/>
+            <a:ext cx="5250028" cy="1897380"/>
+          </a:xfrm>
+          <a:prstGeom prst="roundRect">
+            <a:avLst>
+              <a:gd name="adj" fmla="val 6747"/>
+            </a:avLst>
+          </a:prstGeom>
+          <a:solidFill>
+            <a:srgbClr val="FFFEFA"/>
+          </a:solidFill>
+          <a:ln w="9525">
+            <a:solidFill>
+              <a:srgbClr val="D6D4CC"/>
+            </a:solidFill>
+            <a:prstDash val="solid"/>
+          </a:ln>
+          <a:effectLst>
+            <a:outerShdw sx="100000" sy="100000" kx="0" ky="0" algn="bl" rotWithShape="0" blurRad="127000" dist="38100" dir="5400000">
+              <a:srgbClr val="3C3828">
+                <a:alpha val="12000"/>
+              </a:srgbClr>
+            </a:outerShdw>
+          </a:effectLst>
+        </p:spPr>
+      </p:sp>
+      <p:sp>
+        <p:nvSpPr>
+          <p:cNvPr id="14" name="Shape 11"/>
+          <p:cNvSpPr/>
+          <p:nvPr/>
+        </p:nvSpPr>
+        <p:spPr>
+          <a:xfrm>
+            <a:off x="6383884" y="1965960"/>
+            <a:ext cx="4993996" cy="91440"/>
+          </a:xfrm>
+          <a:prstGeom prst="rect">
+            <a:avLst/>
+          </a:prstGeom>
+          <a:solidFill>
+            <a:srgbClr val="FFB600"/>
+          </a:solidFill>
+          <a:ln w="12700">
+            <a:solidFill>
+              <a:srgbClr val="FFB600"/>
+            </a:solidFill>
+            <a:prstDash val="solid"/>
+          </a:ln>
+        </p:spPr>
+      </p:sp>
+      <p:sp>
+        <p:nvSpPr>
+          <p:cNvPr id="15" name="Shape 12"/>
+          <p:cNvSpPr/>
+          <p:nvPr/>
+        </p:nvSpPr>
+        <p:spPr>
+          <a:xfrm>
+            <a:off x="6530188" y="2286000"/>
+            <a:ext cx="548640" cy="548640"/>
+          </a:xfrm>
+          <a:prstGeom prst="ellipse">
+            <a:avLst/>
+          </a:prstGeom>
+          <a:solidFill>
+            <a:srgbClr val="FFB600"/>
+          </a:solidFill>
+          <a:ln w="12700">
+            <a:solidFill>
+              <a:srgbClr val="FFB600"/>
+            </a:solidFill>
+            <a:prstDash val="solid"/>
+          </a:ln>
+        </p:spPr>
+      </p:sp>
+      <p:sp>
+        <p:nvSpPr>
+          <p:cNvPr id="16" name="Text 13"/>
+          <p:cNvSpPr/>
+          <p:nvPr/>
+        </p:nvSpPr>
+        <p:spPr>
+          <a:xfrm>
+            <a:off x="6530188" y="2286000"/>
+            <a:ext cx="548640" cy="548640"/>
+          </a:xfrm>
+          <a:prstGeom prst="rect">
+            <a:avLst/>
+          </a:prstGeom>
+          <a:noFill/>
+          <a:ln/>
+        </p:spPr>
+        <p:txBody>
+          <a:bodyPr wrap="square" lIns="0" tIns="0" rIns="0" bIns="0" rtlCol="0" anchor="ctr"/>
+          <a:lstStyle/>
+          <a:p>
+            <a:pPr algn="ctr" indent="0" marL="0">
+              <a:buNone/>
+            </a:pPr>
+            <a:r>
+              <a:rPr lang="en-US" sz="2200" b="1" dirty="0">
+                <a:solidFill>
+                  <a:srgbClr val="FFFEFA"/>
+                </a:solidFill>
+                <a:latin typeface="Georgia" pitchFamily="34" charset="0"/>
+                <a:ea typeface="Georgia" pitchFamily="34" charset="-122"/>
+                <a:cs typeface="Georgia" pitchFamily="34" charset="-120"/>
+              </a:rPr>
+              <a:t>2</a:t>
+            </a:r>
+            <a:endParaRPr lang="en-US" sz="2200" dirty="0"/>
+          </a:p>
+        </p:txBody>
+      </p:sp>
+      <p:sp>
+        <p:nvSpPr>
+          <p:cNvPr id="17" name="Text 14"/>
+          <p:cNvSpPr/>
+          <p:nvPr/>
+        </p:nvSpPr>
+        <p:spPr>
+          <a:xfrm>
+            <a:off x="7307428" y="2194560"/>
+            <a:ext cx="3924148" cy="1485900"/>
+          </a:xfrm>
+          <a:prstGeom prst="rect">
+            <a:avLst/>
+          </a:prstGeom>
+          <a:noFill/>
+          <a:ln/>
+        </p:spPr>
+        <p:txBody>
+          <a:bodyPr wrap="square" lIns="0" tIns="0" rIns="0" bIns="0" rtlCol="0" anchor="t"/>
+          <a:lstStyle/>
+          <a:p>
+            <a:pPr indent="0" marL="0">
+              <a:buNone/>
+            </a:pPr>
+            <a:r>
+              <a:rPr lang="en-US" sz="1800" dirty="0">
+                <a:solidFill>
+                  <a:srgbClr val="3C3828"/>
+                </a:solidFill>
+                <a:highlight>
+                  <a:srgbClr val="FFE14D"/>
+                </a:highlight>
+                <a:latin typeface="Calibri" pitchFamily="34" charset="0"/>
+                <a:ea typeface="Calibri" pitchFamily="34" charset="-122"/>
+                <a:cs typeface="Calibri" pitchFamily="34" charset="-120"/>
+              </a:rPr>
+              <a:t>Title it.</a:t>
+            </a:r>
+            <a:r>
+              <a:rPr lang="en-US" sz="1800" dirty="0">
+                <a:solidFill>
+                  <a:srgbClr val="3C3828"/>
+                </a:solidFill>
+                <a:latin typeface="Calibri" pitchFamily="34" charset="0"/>
+                <a:ea typeface="Calibri" pitchFamily="34" charset="-122"/>
+                <a:cs typeface="Calibri" pitchFamily="34" charset="-120"/>
+              </a:rPr>
+              <a:t> Type your title on the first line, then use the toolbar to </a:t>
+            </a:r>
+            <a:r>
+              <a:rPr lang="en-US" sz="1800" dirty="0">
+                <a:solidFill>
+                  <a:srgbClr val="3C3828"/>
+                </a:solidFill>
+                <a:highlight>
+                  <a:srgbClr val="FFE14D"/>
+                </a:highlight>
+                <a:latin typeface="Calibri" pitchFamily="34" charset="0"/>
+                <a:ea typeface="Calibri" pitchFamily="34" charset="-122"/>
+                <a:cs typeface="Calibri" pitchFamily="34" charset="-120"/>
+              </a:rPr>
+              <a:t>center</a:t>
+            </a:r>
+            <a:r>
+              <a:rPr lang="en-US" sz="1800" dirty="0">
+                <a:solidFill>
+                  <a:srgbClr val="3C3828"/>
+                </a:solidFill>
+                <a:latin typeface="Calibri" pitchFamily="34" charset="0"/>
+                <a:ea typeface="Calibri" pitchFamily="34" charset="-122"/>
+                <a:cs typeface="Calibri" pitchFamily="34" charset="-120"/>
+              </a:rPr>
+              <a:t> and </a:t>
+            </a:r>
+            <a:r>
+              <a:rPr lang="en-US" sz="1800" dirty="0">
+                <a:solidFill>
+                  <a:srgbClr val="3C3828"/>
+                </a:solidFill>
+                <a:highlight>
+                  <a:srgbClr val="FFE14D"/>
+                </a:highlight>
+                <a:latin typeface="Calibri" pitchFamily="34" charset="0"/>
+                <a:ea typeface="Calibri" pitchFamily="34" charset="-122"/>
+                <a:cs typeface="Calibri" pitchFamily="34" charset="-120"/>
+              </a:rPr>
+              <a:t>italicize</a:t>
+            </a:r>
+            <a:r>
+              <a:rPr lang="en-US" sz="1800" dirty="0">
+                <a:solidFill>
+                  <a:srgbClr val="3C3828"/>
+                </a:solidFill>
+                <a:latin typeface="Calibri" pitchFamily="34" charset="0"/>
+                <a:ea typeface="Calibri" pitchFamily="34" charset="-122"/>
+                <a:cs typeface="Calibri" pitchFamily="34" charset="-120"/>
+              </a:rPr>
+              <a:t> it.</a:t>
+            </a:r>
+            <a:endParaRPr lang="en-US" sz="1800" dirty="0"/>
+          </a:p>
+        </p:txBody>
+      </p:sp>
+      <p:sp>
+        <p:nvSpPr>
+          <p:cNvPr id="18" name="Shape 15"/>
+          <p:cNvSpPr/>
+          <p:nvPr/>
+        </p:nvSpPr>
+        <p:spPr>
+          <a:xfrm>
+            <a:off x="685800" y="4183380"/>
+            <a:ext cx="5250028" cy="1897380"/>
+          </a:xfrm>
+          <a:prstGeom prst="roundRect">
+            <a:avLst>
+              <a:gd name="adj" fmla="val 6747"/>
+            </a:avLst>
+          </a:prstGeom>
+          <a:solidFill>
+            <a:srgbClr val="FFFEFA"/>
+          </a:solidFill>
+          <a:ln w="9525">
+            <a:solidFill>
+              <a:srgbClr val="D6D4CC"/>
+            </a:solidFill>
+            <a:prstDash val="solid"/>
+          </a:ln>
+          <a:effectLst>
+            <a:outerShdw sx="100000" sy="100000" kx="0" ky="0" algn="bl" rotWithShape="0" blurRad="127000" dist="38100" dir="5400000">
+              <a:srgbClr val="3C3828">
+                <a:alpha val="12000"/>
+              </a:srgbClr>
+            </a:outerShdw>
+          </a:effectLst>
+        </p:spPr>
+      </p:sp>
+      <p:sp>
+        <p:nvSpPr>
+          <p:cNvPr id="19" name="Shape 16"/>
+          <p:cNvSpPr/>
+          <p:nvPr/>
+        </p:nvSpPr>
+        <p:spPr>
+          <a:xfrm>
+            <a:off x="813816" y="4183380"/>
+            <a:ext cx="4993996" cy="91440"/>
+          </a:xfrm>
+          <a:prstGeom prst="rect">
+            <a:avLst/>
+          </a:prstGeom>
+          <a:solidFill>
+            <a:srgbClr val="FC4540"/>
+          </a:solidFill>
+          <a:ln w="12700">
+            <a:solidFill>
+              <a:srgbClr val="FC4540"/>
+            </a:solidFill>
+            <a:prstDash val="solid"/>
+          </a:ln>
+        </p:spPr>
+      </p:sp>
+      <p:sp>
+        <p:nvSpPr>
+          <p:cNvPr id="20" name="Shape 17"/>
+          <p:cNvSpPr/>
+          <p:nvPr/>
+        </p:nvSpPr>
+        <p:spPr>
+          <a:xfrm>
+            <a:off x="960120" y="4503420"/>
+            <a:ext cx="548640" cy="548640"/>
+          </a:xfrm>
+          <a:prstGeom prst="ellipse">
+            <a:avLst/>
+          </a:prstGeom>
+          <a:solidFill>
+            <a:srgbClr val="FC4540"/>
+          </a:solidFill>
+          <a:ln w="12700">
+            <a:solidFill>
+              <a:srgbClr val="FC4540"/>
+            </a:solidFill>
+            <a:prstDash val="solid"/>
+          </a:ln>
+        </p:spPr>
+      </p:sp>
+      <p:sp>
+        <p:nvSpPr>
+          <p:cNvPr id="21" name="Text 18"/>
+          <p:cNvSpPr/>
+          <p:nvPr/>
+        </p:nvSpPr>
+        <p:spPr>
+          <a:xfrm>
+            <a:off x="960120" y="4503420"/>
+            <a:ext cx="548640" cy="548640"/>
+          </a:xfrm>
+          <a:prstGeom prst="rect">
+            <a:avLst/>
+          </a:prstGeom>
+          <a:noFill/>
+          <a:ln/>
+        </p:spPr>
+        <p:txBody>
+          <a:bodyPr wrap="square" lIns="0" tIns="0" rIns="0" bIns="0" rtlCol="0" anchor="ctr"/>
+          <a:lstStyle/>
+          <a:p>
+            <a:pPr algn="ctr" indent="0" marL="0">
+              <a:buNone/>
+            </a:pPr>
+            <a:r>
+              <a:rPr lang="en-US" sz="2200" b="1" dirty="0">
+                <a:solidFill>
+                  <a:srgbClr val="FFFEFA"/>
+                </a:solidFill>
+                <a:latin typeface="Georgia" pitchFamily="34" charset="0"/>
+                <a:ea typeface="Georgia" pitchFamily="34" charset="-122"/>
+                <a:cs typeface="Georgia" pitchFamily="34" charset="-120"/>
+              </a:rPr>
+              <a:t>3</a:t>
+            </a:r>
+            <a:endParaRPr lang="en-US" sz="2200" dirty="0"/>
+          </a:p>
+        </p:txBody>
+      </p:sp>
+      <p:sp>
+        <p:nvSpPr>
+          <p:cNvPr id="22" name="Text 19"/>
+          <p:cNvSpPr/>
+          <p:nvPr/>
+        </p:nvSpPr>
+        <p:spPr>
+          <a:xfrm>
+            <a:off x="1737360" y="4411980"/>
+            <a:ext cx="3924148" cy="1485900"/>
+          </a:xfrm>
+          <a:prstGeom prst="rect">
+            <a:avLst/>
+          </a:prstGeom>
+          <a:noFill/>
+          <a:ln/>
+        </p:spPr>
+        <p:txBody>
+          <a:bodyPr wrap="square" lIns="0" tIns="0" rIns="0" bIns="0" rtlCol="0" anchor="t"/>
+          <a:lstStyle/>
+          <a:p>
+            <a:pPr indent="0" marL="0">
+              <a:buNone/>
+            </a:pPr>
+            <a:r>
+              <a:rPr lang="en-US" sz="1800" dirty="0">
+                <a:solidFill>
+                  <a:srgbClr val="3C3828"/>
+                </a:solidFill>
+                <a:highlight>
+                  <a:srgbClr val="FFE14D"/>
+                </a:highlight>
+                <a:latin typeface="Calibri" pitchFamily="34" charset="0"/>
+                <a:ea typeface="Calibri" pitchFamily="34" charset="-122"/>
+                <a:cs typeface="Calibri" pitchFamily="34" charset="-120"/>
+              </a:rPr>
+              <a:t>Keep it simple.</a:t>
+            </a:r>
+            <a:r>
+              <a:rPr lang="en-US" sz="1800" dirty="0">
+                <a:solidFill>
+                  <a:srgbClr val="3C3828"/>
+                </a:solidFill>
+                <a:latin typeface="Calibri" pitchFamily="34" charset="0"/>
+                <a:ea typeface="Calibri" pitchFamily="34" charset="-122"/>
+                <a:cs typeface="Calibri" pitchFamily="34" charset="-120"/>
+              </a:rPr>
+              <a:t> YAWP! sets the font for you. Paragraphs stay left-aligned (only the title is centered), with an empty line between them.</a:t>
+            </a:r>
+            <a:endParaRPr lang="en-US" sz="1800" dirty="0"/>
+          </a:p>
+        </p:txBody>
+      </p:sp>
+      <p:sp>
+        <p:nvSpPr>
+          <p:cNvPr id="23" name="Shape 20"/>
+          <p:cNvSpPr/>
+          <p:nvPr/>
+        </p:nvSpPr>
+        <p:spPr>
+          <a:xfrm>
+            <a:off x="6255868" y="4183380"/>
+            <a:ext cx="5250028" cy="1897380"/>
+          </a:xfrm>
+          <a:prstGeom prst="roundRect">
+            <a:avLst>
+              <a:gd name="adj" fmla="val 6747"/>
+            </a:avLst>
+          </a:prstGeom>
+          <a:solidFill>
+            <a:srgbClr val="FFFEFA"/>
+          </a:solidFill>
+          <a:ln w="9525">
+            <a:solidFill>
+              <a:srgbClr val="D6D4CC"/>
+            </a:solidFill>
+            <a:prstDash val="solid"/>
+          </a:ln>
+          <a:effectLst>
+            <a:outerShdw sx="100000" sy="100000" kx="0" ky="0" algn="bl" rotWithShape="0" blurRad="127000" dist="38100" dir="5400000">
+              <a:srgbClr val="3C3828">
+                <a:alpha val="12000"/>
+              </a:srgbClr>
+            </a:outerShdw>
+          </a:effectLst>
+        </p:spPr>
+      </p:sp>
+      <p:sp>
+        <p:nvSpPr>
+          <p:cNvPr id="24" name="Shape 21"/>
+          <p:cNvSpPr/>
+          <p:nvPr/>
+        </p:nvSpPr>
+        <p:spPr>
+          <a:xfrm>
+            <a:off x="6383884" y="4183380"/>
+            <a:ext cx="4993996" cy="91440"/>
+          </a:xfrm>
+          <a:prstGeom prst="rect">
+            <a:avLst/>
+          </a:prstGeom>
+          <a:solidFill>
+            <a:srgbClr val="FF9755"/>
+          </a:solidFill>
+          <a:ln w="12700">
+            <a:solidFill>
+              <a:srgbClr val="FF9755"/>
+            </a:solidFill>
+            <a:prstDash val="solid"/>
+          </a:ln>
+        </p:spPr>
+      </p:sp>
+      <p:sp>
+        <p:nvSpPr>
+          <p:cNvPr id="25" name="Shape 22"/>
+          <p:cNvSpPr/>
+          <p:nvPr/>
+        </p:nvSpPr>
+        <p:spPr>
+          <a:xfrm>
+            <a:off x="6530188" y="4503420"/>
+            <a:ext cx="548640" cy="548640"/>
+          </a:xfrm>
+          <a:prstGeom prst="ellipse">
+            <a:avLst/>
+          </a:prstGeom>
+          <a:solidFill>
+            <a:srgbClr val="FF9755"/>
+          </a:solidFill>
+          <a:ln w="12700">
+            <a:solidFill>
+              <a:srgbClr val="FF9755"/>
+            </a:solidFill>
+            <a:prstDash val="solid"/>
+          </a:ln>
+        </p:spPr>
+      </p:sp>
+      <p:sp>
+        <p:nvSpPr>
+          <p:cNvPr id="26" name="Text 23"/>
+          <p:cNvSpPr/>
+          <p:nvPr/>
+        </p:nvSpPr>
+        <p:spPr>
+          <a:xfrm>
+            <a:off x="6530188" y="4503420"/>
+            <a:ext cx="548640" cy="548640"/>
+          </a:xfrm>
+          <a:prstGeom prst="rect">
+            <a:avLst/>
+          </a:prstGeom>
+          <a:noFill/>
+          <a:ln/>
+        </p:spPr>
+        <p:txBody>
+          <a:bodyPr wrap="square" lIns="0" tIns="0" rIns="0" bIns="0" rtlCol="0" anchor="ctr"/>
+          <a:lstStyle/>
+          <a:p>
+            <a:pPr algn="ctr" indent="0" marL="0">
+              <a:buNone/>
+            </a:pPr>
+            <a:r>
+              <a:rPr lang="en-US" sz="2200" b="1" dirty="0">
+                <a:solidFill>
+                  <a:srgbClr val="FFFEFA"/>
+                </a:solidFill>
+                <a:latin typeface="Georgia" pitchFamily="34" charset="0"/>
+                <a:ea typeface="Georgia" pitchFamily="34" charset="-122"/>
+                <a:cs typeface="Georgia" pitchFamily="34" charset="-120"/>
+              </a:rPr>
+              <a:t>4</a:t>
+            </a:r>
+            <a:endParaRPr lang="en-US" sz="2200" dirty="0"/>
+          </a:p>
+        </p:txBody>
+      </p:sp>
+      <p:sp>
+        <p:nvSpPr>
+          <p:cNvPr id="27" name="Text 24"/>
+          <p:cNvSpPr/>
+          <p:nvPr/>
+        </p:nvSpPr>
+        <p:spPr>
+          <a:xfrm>
+            <a:off x="7307428" y="4411980"/>
+            <a:ext cx="3924148" cy="1485900"/>
+          </a:xfrm>
+          <a:prstGeom prst="rect">
+            <a:avLst/>
+          </a:prstGeom>
+          <a:noFill/>
+          <a:ln/>
+        </p:spPr>
+        <p:txBody>
+          <a:bodyPr wrap="square" lIns="0" tIns="0" rIns="0" bIns="0" rtlCol="0" anchor="t"/>
+          <a:lstStyle/>
+          <a:p>
+            <a:pPr indent="0" marL="0">
+              <a:buNone/>
+            </a:pPr>
+            <a:r>
+              <a:rPr lang="en-US" sz="1800" dirty="0">
+                <a:solidFill>
+                  <a:srgbClr val="3C3828"/>
+                </a:solidFill>
+                <a:highlight>
+                  <a:srgbClr val="FFE14D"/>
+                </a:highlight>
+                <a:latin typeface="Calibri" pitchFamily="34" charset="0"/>
+                <a:ea typeface="Calibri" pitchFamily="34" charset="-122"/>
+                <a:cs typeface="Calibri" pitchFamily="34" charset="-120"/>
+              </a:rPr>
+              <a:t>Read it, then Submit.</a:t>
+            </a:r>
+            <a:r>
+              <a:rPr lang="en-US" sz="1800" dirty="0">
+                <a:solidFill>
+                  <a:srgbClr val="3C3828"/>
+                </a:solidFill>
+                <a:latin typeface="Calibri" pitchFamily="34" charset="0"/>
+                <a:ea typeface="Calibri" pitchFamily="34" charset="-122"/>
+                <a:cs typeface="Calibri" pitchFamily="34" charset="-120"/>
+              </a:rPr>
+              <a:t> Read it once from the top, ask the Tutor for feedback if you want, then click </a:t>
+            </a:r>
+            <a:r>
+              <a:rPr lang="en-US" sz="1800" dirty="0">
+                <a:solidFill>
+                  <a:srgbClr val="3C3828"/>
+                </a:solidFill>
+                <a:highlight>
+                  <a:srgbClr val="FFE14D"/>
+                </a:highlight>
+                <a:latin typeface="Calibri" pitchFamily="34" charset="0"/>
+                <a:ea typeface="Calibri" pitchFamily="34" charset="-122"/>
+                <a:cs typeface="Calibri" pitchFamily="34" charset="-120"/>
+              </a:rPr>
+              <a:t>Submit.</a:t>
+            </a:r>
+            <a:endParaRPr lang="en-US" sz="1800" dirty="0"/>
+          </a:p>
+        </p:txBody>
+      </p:sp>
+      <p:sp>
+        <p:nvSpPr>
+          <p:cNvPr id="25" name="Slide Number Placeholder 0"/>
+          <p:cNvSpPr>
+            <a:spLocks noGrp="1"/>
+          </p:cNvSpPr>
+          <p:nvPr>
+            <p:ph type="sldNum" sz="quarter" idx="4294967295"/>
+          </p:nvPr>
+        </p:nvSpPr>
+        <p:spPr>
+          <a:xfrm>
+            <a:off x="10957255" y="6355080"/>
+            <a:ext cx="548640" cy="320040"/>
+          </a:xfrm>
+          <a:prstGeom prst="rect">
+            <a:avLst/>
+          </a:prstGeom>
+          <a:extLst>
+            <a:ext uri="{C572A759-6A51-4108-AA02-DFA0A04FC94B}">
+              <ma14:wrappingTextBoxFlag xmlns:ma14="http://schemas.microsoft.com/office/mac/drawingml/2011/main" val="0"/>
+            </a:ext>
+          </a:extLst>
+        </p:spPr>
+        <p:txBody>
+          <a:bodyPr/>
+          <a:lstStyle>
+            <a:lvl1pPr>
+              <a:defRPr sz="1000">
+                <a:solidFill>
+                  <a:srgbClr val="7E7C78"/>
+                </a:solidFill>
+                <a:latin typeface="Consolas"/>
+                <a:ea typeface="Consolas"/>
+                <a:cs typeface="Consolas"/>
+              </a:defRPr>
+            </a:lvl1pPr>
+          </a:lstStyle>
+          <a:p>
+            <a:pPr algn="r"/>
+            <a:fld id="{F7021451-1387-4CA6-816F-3879F97B5CBC}" type="slidenum">
+              <a:rPr b="0" lang="en-US"/>
+              <a:t>21</a:t>
+            </a:fld>
+            <a:endParaRPr lang="en-US"/>
+          </a:p>
+        </p:txBody>
+      </p:sp>
+    </p:spTree>
+  </p:cSld>
+  <p:clrMapOvr>
+    <a:masterClrMapping/>
+  </p:clrMapOvr>
+</p:sld>
+</file>
+
+<file path=ppt/slides/slide22.xml><?xml version="1.0" encoding="utf-8"?>
+<p:sld xmlns:a="http://schemas.openxmlformats.org/drawingml/2006/main" xmlns:r="http://schemas.openxmlformats.org/officeDocument/2006/relationships" xmlns:p="http://schemas.openxmlformats.org/presentationml/2006/main">
+  <p:cSld name="Slide 22">
+    <p:spTree>
+      <p:nvGrpSpPr>
+        <p:cNvPr id="1" name=""/>
+        <p:cNvGrpSpPr/>
+        <p:nvPr/>
+      </p:nvGrpSpPr>
+      <p:grpSpPr>
+        <a:xfrm>
+          <a:off x="0" y="0"/>
+          <a:ext cx="0" cy="0"/>
+          <a:chOff x="0" y="0"/>
+          <a:chExt cx="0" cy="0"/>
+        </a:xfrm>
+      </p:grpSpPr>
+      <p:sp>
+        <p:nvSpPr>
+          <p:cNvPr id="2" name="Text 0"/>
+          <p:cNvSpPr/>
+          <p:nvPr/>
+        </p:nvSpPr>
+        <p:spPr>
+          <a:xfrm>
+            <a:off x="685800" y="274320"/>
+            <a:ext cx="9357055" cy="320040"/>
+          </a:xfrm>
+          <a:prstGeom prst="rect">
+            <a:avLst/>
+          </a:prstGeom>
+          <a:noFill/>
+          <a:ln/>
+        </p:spPr>
+        <p:txBody>
+          <a:bodyPr wrap="square" lIns="0" tIns="0" rIns="0" bIns="0" rtlCol="0" anchor="b"/>
+          <a:lstStyle/>
+          <a:p>
+            <a:pPr indent="0" marL="0">
+              <a:buNone/>
+            </a:pPr>
+            <a:r>
+              <a:rPr lang="en-US" sz="1200" b="1" spc="200" kern="0" dirty="0">
+                <a:solidFill>
+                  <a:srgbClr val="FFB600"/>
+                </a:solidFill>
+                <a:latin typeface="Consolas" pitchFamily="34" charset="0"/>
+                <a:ea typeface="Consolas" pitchFamily="34" charset="-122"/>
+                <a:cs typeface="Consolas" pitchFamily="34" charset="-120"/>
+              </a:rPr>
+              <a:t>DONE</a:t>
+            </a:r>
+            <a:endParaRPr lang="en-US" sz="1200" dirty="0"/>
+          </a:p>
+        </p:txBody>
+      </p:sp>
+      <p:sp>
+        <p:nvSpPr>
+          <p:cNvPr id="3" name="Text 1"/>
+          <p:cNvSpPr/>
+          <p:nvPr/>
+        </p:nvSpPr>
+        <p:spPr>
+          <a:xfrm>
+            <a:off x="685800" y="621792"/>
+            <a:ext cx="9357055" cy="640080"/>
+          </a:xfrm>
+          <a:prstGeom prst="rect">
+            <a:avLst/>
+          </a:prstGeom>
+          <a:noFill/>
+          <a:ln/>
+        </p:spPr>
+        <p:txBody>
+          <a:bodyPr wrap="square" lIns="0" tIns="0" rIns="0" bIns="0" rtlCol="0" anchor="t"/>
+          <a:lstStyle/>
+          <a:p>
+            <a:pPr indent="0" marL="0">
+              <a:buNone/>
+            </a:pPr>
+            <a:r>
+              <a:rPr lang="en-US" sz="3200" dirty="0">
+                <a:solidFill>
+                  <a:srgbClr val="3C3828"/>
+                </a:solidFill>
+                <a:latin typeface="Georgia" pitchFamily="34" charset="0"/>
+                <a:ea typeface="Georgia" pitchFamily="34" charset="-122"/>
+                <a:cs typeface="Georgia" pitchFamily="34" charset="-120"/>
+              </a:rPr>
+              <a:t>What finished looks like</a:t>
+            </a:r>
+            <a:endParaRPr lang="en-US" sz="3200" dirty="0"/>
+          </a:p>
+        </p:txBody>
+      </p:sp>
+      <p:sp>
+        <p:nvSpPr>
+          <p:cNvPr id="4" name="Shape 2"/>
+          <p:cNvSpPr/>
+          <p:nvPr/>
+        </p:nvSpPr>
+        <p:spPr>
+          <a:xfrm>
+            <a:off x="685800" y="1596904"/>
+            <a:ext cx="7436815" cy="4441431"/>
+          </a:xfrm>
+          <a:prstGeom prst="roundRect">
+            <a:avLst>
+              <a:gd name="adj" fmla="val 2882"/>
+            </a:avLst>
+          </a:prstGeom>
+          <a:solidFill>
+            <a:srgbClr val="FFFEFA"/>
+          </a:solidFill>
+          <a:ln w="9525">
+            <a:solidFill>
+              <a:srgbClr val="D6D4CC"/>
+            </a:solidFill>
+            <a:prstDash val="solid"/>
+          </a:ln>
+          <a:effectLst>
+            <a:outerShdw sx="100000" sy="100000" kx="0" ky="0" algn="bl" rotWithShape="0" blurRad="127000" dist="38100" dir="5400000">
+              <a:srgbClr val="3C3828">
+                <a:alpha val="12000"/>
+              </a:srgbClr>
+            </a:outerShdw>
+          </a:effectLst>
+        </p:spPr>
+      </p:sp>
       <p:pic>
         <p:nvPicPr>
           <p:cNvPr id="5" name="Image 0" descr="The YAWP! editor with a finished, titled essay.">    </p:cNvPr>
@@ -11955,8 +13109,8 @@
         </p:blipFill>
         <p:spPr>
           <a:xfrm>
-            <a:off x="813816" y="1956816"/>
-            <a:ext cx="6693408" cy="3894328"/>
+            <a:off x="813816" y="1724920"/>
+            <a:ext cx="7180783" cy="4185399"/>
           </a:xfrm>
           <a:prstGeom prst="rect">
             <a:avLst/>
@@ -11971,8 +13125,8 @@
         </p:nvSpPr>
         <p:spPr>
           <a:xfrm>
-            <a:off x="8183880" y="2505456"/>
-            <a:ext cx="292608" cy="292608"/>
+            <a:off x="5539956" y="2417108"/>
+            <a:ext cx="457200" cy="457200"/>
           </a:xfrm>
           <a:prstGeom prst="ellipse">
             <a:avLst/>
@@ -11980,12 +13134,19 @@
           <a:solidFill>
             <a:srgbClr val="FFB600"/>
           </a:solidFill>
-          <a:ln w="12700">
-            <a:solidFill>
-              <a:srgbClr val="FFB600"/>
-            </a:solidFill>
-            <a:prstDash val="solid"/>
-          </a:ln>
+          <a:ln w="25400">
+            <a:solidFill>
+              <a:srgbClr val="FFFEFA"/>
+            </a:solidFill>
+            <a:prstDash val="solid"/>
+          </a:ln>
+          <a:effectLst>
+            <a:outerShdw sx="100000" sy="100000" kx="0" ky="0" algn="bl" rotWithShape="0" blurRad="50800" dist="19050" dir="5400000">
+              <a:srgbClr val="3C3828">
+                <a:alpha val="25000"/>
+              </a:srgbClr>
+            </a:outerShdw>
+          </a:effectLst>
         </p:spPr>
       </p:sp>
       <p:sp>
@@ -11996,8 +13157,331 @@
         </p:nvSpPr>
         <p:spPr>
           <a:xfrm>
-            <a:off x="8659368" y="2194560"/>
-            <a:ext cx="2846527" cy="914400"/>
+            <a:off x="5539956" y="2417108"/>
+            <a:ext cx="457200" cy="457200"/>
+          </a:xfrm>
+          <a:prstGeom prst="rect">
+            <a:avLst/>
+          </a:prstGeom>
+          <a:noFill/>
+          <a:ln/>
+        </p:spPr>
+        <p:txBody>
+          <a:bodyPr wrap="square" lIns="0" tIns="0" rIns="0" bIns="0" rtlCol="0" anchor="ctr"/>
+          <a:lstStyle/>
+          <a:p>
+            <a:pPr algn="ctr" indent="0" marL="0">
+              <a:buNone/>
+            </a:pPr>
+            <a:r>
+              <a:rPr lang="en-US" sz="1800" b="1" dirty="0">
+                <a:solidFill>
+                  <a:srgbClr val="FFFEFA"/>
+                </a:solidFill>
+                <a:latin typeface="Georgia" pitchFamily="34" charset="0"/>
+                <a:ea typeface="Georgia" pitchFamily="34" charset="-122"/>
+                <a:cs typeface="Georgia" pitchFamily="34" charset="-120"/>
+              </a:rPr>
+              <a:t>1</a:t>
+            </a:r>
+            <a:endParaRPr lang="en-US" sz="1800" dirty="0"/>
+          </a:p>
+        </p:txBody>
+      </p:sp>
+      <p:sp>
+        <p:nvSpPr>
+          <p:cNvPr id="8" name="Shape 5"/>
+          <p:cNvSpPr/>
+          <p:nvPr/>
+        </p:nvSpPr>
+        <p:spPr>
+          <a:xfrm>
+            <a:off x="5898996" y="2793794"/>
+            <a:ext cx="457200" cy="457200"/>
+          </a:xfrm>
+          <a:prstGeom prst="ellipse">
+            <a:avLst/>
+          </a:prstGeom>
+          <a:solidFill>
+            <a:srgbClr val="FC4540"/>
+          </a:solidFill>
+          <a:ln w="25400">
+            <a:solidFill>
+              <a:srgbClr val="FFFEFA"/>
+            </a:solidFill>
+            <a:prstDash val="solid"/>
+          </a:ln>
+          <a:effectLst>
+            <a:outerShdw sx="100000" sy="100000" kx="0" ky="0" algn="bl" rotWithShape="0" blurRad="50800" dist="19050" dir="5400000">
+              <a:srgbClr val="3C3828">
+                <a:alpha val="25000"/>
+              </a:srgbClr>
+            </a:outerShdw>
+          </a:effectLst>
+        </p:spPr>
+      </p:sp>
+      <p:sp>
+        <p:nvSpPr>
+          <p:cNvPr id="9" name="Text 6"/>
+          <p:cNvSpPr/>
+          <p:nvPr/>
+        </p:nvSpPr>
+        <p:spPr>
+          <a:xfrm>
+            <a:off x="5898996" y="2793794"/>
+            <a:ext cx="457200" cy="457200"/>
+          </a:xfrm>
+          <a:prstGeom prst="rect">
+            <a:avLst/>
+          </a:prstGeom>
+          <a:noFill/>
+          <a:ln/>
+        </p:spPr>
+        <p:txBody>
+          <a:bodyPr wrap="square" lIns="0" tIns="0" rIns="0" bIns="0" rtlCol="0" anchor="ctr"/>
+          <a:lstStyle/>
+          <a:p>
+            <a:pPr algn="ctr" indent="0" marL="0">
+              <a:buNone/>
+            </a:pPr>
+            <a:r>
+              <a:rPr lang="en-US" sz="1800" b="1" dirty="0">
+                <a:solidFill>
+                  <a:srgbClr val="FFFEFA"/>
+                </a:solidFill>
+                <a:latin typeface="Georgia" pitchFamily="34" charset="0"/>
+                <a:ea typeface="Georgia" pitchFamily="34" charset="-122"/>
+                <a:cs typeface="Georgia" pitchFamily="34" charset="-120"/>
+              </a:rPr>
+              <a:t>2</a:t>
+            </a:r>
+            <a:endParaRPr lang="en-US" sz="1800" dirty="0"/>
+          </a:p>
+        </p:txBody>
+      </p:sp>
+      <p:sp>
+        <p:nvSpPr>
+          <p:cNvPr id="10" name="Shape 7"/>
+          <p:cNvSpPr/>
+          <p:nvPr/>
+        </p:nvSpPr>
+        <p:spPr>
+          <a:xfrm>
+            <a:off x="2595835" y="3714582"/>
+            <a:ext cx="457200" cy="457200"/>
+          </a:xfrm>
+          <a:prstGeom prst="ellipse">
+            <a:avLst/>
+          </a:prstGeom>
+          <a:solidFill>
+            <a:srgbClr val="FF9755"/>
+          </a:solidFill>
+          <a:ln w="25400">
+            <a:solidFill>
+              <a:srgbClr val="FFFEFA"/>
+            </a:solidFill>
+            <a:prstDash val="solid"/>
+          </a:ln>
+          <a:effectLst>
+            <a:outerShdw sx="100000" sy="100000" kx="0" ky="0" algn="bl" rotWithShape="0" blurRad="50800" dist="19050" dir="5400000">
+              <a:srgbClr val="3C3828">
+                <a:alpha val="25000"/>
+              </a:srgbClr>
+            </a:outerShdw>
+          </a:effectLst>
+        </p:spPr>
+      </p:sp>
+      <p:sp>
+        <p:nvSpPr>
+          <p:cNvPr id="11" name="Text 8"/>
+          <p:cNvSpPr/>
+          <p:nvPr/>
+        </p:nvSpPr>
+        <p:spPr>
+          <a:xfrm>
+            <a:off x="2595835" y="3714582"/>
+            <a:ext cx="457200" cy="457200"/>
+          </a:xfrm>
+          <a:prstGeom prst="rect">
+            <a:avLst/>
+          </a:prstGeom>
+          <a:noFill/>
+          <a:ln/>
+        </p:spPr>
+        <p:txBody>
+          <a:bodyPr wrap="square" lIns="0" tIns="0" rIns="0" bIns="0" rtlCol="0" anchor="ctr"/>
+          <a:lstStyle/>
+          <a:p>
+            <a:pPr algn="ctr" indent="0" marL="0">
+              <a:buNone/>
+            </a:pPr>
+            <a:r>
+              <a:rPr lang="en-US" sz="1800" b="1" dirty="0">
+                <a:solidFill>
+                  <a:srgbClr val="FFFEFA"/>
+                </a:solidFill>
+                <a:latin typeface="Georgia" pitchFamily="34" charset="0"/>
+                <a:ea typeface="Georgia" pitchFamily="34" charset="-122"/>
+                <a:cs typeface="Georgia" pitchFamily="34" charset="-120"/>
+              </a:rPr>
+              <a:t>3</a:t>
+            </a:r>
+            <a:endParaRPr lang="en-US" sz="1800" dirty="0"/>
+          </a:p>
+        </p:txBody>
+      </p:sp>
+      <p:sp>
+        <p:nvSpPr>
+          <p:cNvPr id="12" name="Shape 9"/>
+          <p:cNvSpPr/>
+          <p:nvPr/>
+        </p:nvSpPr>
+        <p:spPr>
+          <a:xfrm>
+            <a:off x="6997655" y="1747444"/>
+            <a:ext cx="457200" cy="457200"/>
+          </a:xfrm>
+          <a:prstGeom prst="ellipse">
+            <a:avLst/>
+          </a:prstGeom>
+          <a:solidFill>
+            <a:srgbClr val="FC4067"/>
+          </a:solidFill>
+          <a:ln w="25400">
+            <a:solidFill>
+              <a:srgbClr val="FFFEFA"/>
+            </a:solidFill>
+            <a:prstDash val="solid"/>
+          </a:ln>
+          <a:effectLst>
+            <a:outerShdw sx="100000" sy="100000" kx="0" ky="0" algn="bl" rotWithShape="0" blurRad="50800" dist="19050" dir="5400000">
+              <a:srgbClr val="3C3828">
+                <a:alpha val="25000"/>
+              </a:srgbClr>
+            </a:outerShdw>
+          </a:effectLst>
+        </p:spPr>
+      </p:sp>
+      <p:sp>
+        <p:nvSpPr>
+          <p:cNvPr id="13" name="Text 10"/>
+          <p:cNvSpPr/>
+          <p:nvPr/>
+        </p:nvSpPr>
+        <p:spPr>
+          <a:xfrm>
+            <a:off x="6997655" y="1747444"/>
+            <a:ext cx="457200" cy="457200"/>
+          </a:xfrm>
+          <a:prstGeom prst="rect">
+            <a:avLst/>
+          </a:prstGeom>
+          <a:noFill/>
+          <a:ln/>
+        </p:spPr>
+        <p:txBody>
+          <a:bodyPr wrap="square" lIns="0" tIns="0" rIns="0" bIns="0" rtlCol="0" anchor="ctr"/>
+          <a:lstStyle/>
+          <a:p>
+            <a:pPr algn="ctr" indent="0" marL="0">
+              <a:buNone/>
+            </a:pPr>
+            <a:r>
+              <a:rPr lang="en-US" sz="1800" b="1" dirty="0">
+                <a:solidFill>
+                  <a:srgbClr val="FFFEFA"/>
+                </a:solidFill>
+                <a:latin typeface="Georgia" pitchFamily="34" charset="0"/>
+                <a:ea typeface="Georgia" pitchFamily="34" charset="-122"/>
+                <a:cs typeface="Georgia" pitchFamily="34" charset="-120"/>
+              </a:rPr>
+              <a:t>4</a:t>
+            </a:r>
+            <a:endParaRPr lang="en-US" sz="1800" dirty="0"/>
+          </a:p>
+        </p:txBody>
+      </p:sp>
+      <p:sp>
+        <p:nvSpPr>
+          <p:cNvPr id="14" name="Shape 11"/>
+          <p:cNvSpPr/>
+          <p:nvPr/>
+        </p:nvSpPr>
+        <p:spPr>
+          <a:xfrm>
+            <a:off x="8579815" y="2329180"/>
+            <a:ext cx="457200" cy="457200"/>
+          </a:xfrm>
+          <a:prstGeom prst="ellipse">
+            <a:avLst/>
+          </a:prstGeom>
+          <a:solidFill>
+            <a:srgbClr val="FFB600"/>
+          </a:solidFill>
+          <a:ln w="25400">
+            <a:solidFill>
+              <a:srgbClr val="FFFEFA"/>
+            </a:solidFill>
+            <a:prstDash val="solid"/>
+          </a:ln>
+          <a:effectLst>
+            <a:outerShdw sx="100000" sy="100000" kx="0" ky="0" algn="bl" rotWithShape="0" blurRad="50800" dist="19050" dir="5400000">
+              <a:srgbClr val="3C3828">
+                <a:alpha val="25000"/>
+              </a:srgbClr>
+            </a:outerShdw>
+          </a:effectLst>
+        </p:spPr>
+      </p:sp>
+      <p:sp>
+        <p:nvSpPr>
+          <p:cNvPr id="15" name="Text 12"/>
+          <p:cNvSpPr/>
+          <p:nvPr/>
+        </p:nvSpPr>
+        <p:spPr>
+          <a:xfrm>
+            <a:off x="8579815" y="2329180"/>
+            <a:ext cx="457200" cy="457200"/>
+          </a:xfrm>
+          <a:prstGeom prst="rect">
+            <a:avLst/>
+          </a:prstGeom>
+          <a:noFill/>
+          <a:ln/>
+        </p:spPr>
+        <p:txBody>
+          <a:bodyPr wrap="square" lIns="0" tIns="0" rIns="0" bIns="0" rtlCol="0" anchor="ctr"/>
+          <a:lstStyle/>
+          <a:p>
+            <a:pPr algn="ctr" indent="0" marL="0">
+              <a:buNone/>
+            </a:pPr>
+            <a:r>
+              <a:rPr lang="en-US" sz="1800" b="1" dirty="0">
+                <a:solidFill>
+                  <a:srgbClr val="FFFEFA"/>
+                </a:solidFill>
+                <a:latin typeface="Georgia" pitchFamily="34" charset="0"/>
+                <a:ea typeface="Georgia" pitchFamily="34" charset="-122"/>
+                <a:cs typeface="Georgia" pitchFamily="34" charset="-120"/>
+              </a:rPr>
+              <a:t>1</a:t>
+            </a:r>
+            <a:endParaRPr lang="en-US" sz="1800" dirty="0"/>
+          </a:p>
+        </p:txBody>
+      </p:sp>
+      <p:sp>
+        <p:nvSpPr>
+          <p:cNvPr id="16" name="Text 13"/>
+          <p:cNvSpPr/>
+          <p:nvPr/>
+        </p:nvSpPr>
+        <p:spPr>
+          <a:xfrm>
+            <a:off x="9219895" y="1955800"/>
+            <a:ext cx="2286000" cy="1203960"/>
           </a:xfrm>
           <a:prstGeom prst="rect">
             <a:avLst/>
@@ -12043,14 +13527,14 @@
       </p:sp>
       <p:sp>
         <p:nvSpPr>
-          <p:cNvPr id="8" name="Shape 5"/>
-          <p:cNvSpPr/>
-          <p:nvPr/>
-        </p:nvSpPr>
-        <p:spPr>
-          <a:xfrm>
-            <a:off x="8183880" y="3419856"/>
-            <a:ext cx="292608" cy="292608"/>
+          <p:cNvPr id="17" name="Shape 14"/>
+          <p:cNvSpPr/>
+          <p:nvPr/>
+        </p:nvSpPr>
+        <p:spPr>
+          <a:xfrm>
+            <a:off x="8579815" y="3378200"/>
+            <a:ext cx="457200" cy="457200"/>
           </a:xfrm>
           <a:prstGeom prst="ellipse">
             <a:avLst/>
@@ -12058,24 +13542,70 @@
           <a:solidFill>
             <a:srgbClr val="FC4540"/>
           </a:solidFill>
-          <a:ln w="12700">
-            <a:solidFill>
-              <a:srgbClr val="FC4540"/>
-            </a:solidFill>
-            <a:prstDash val="solid"/>
-          </a:ln>
-        </p:spPr>
-      </p:sp>
-      <p:sp>
-        <p:nvSpPr>
-          <p:cNvPr id="9" name="Text 6"/>
-          <p:cNvSpPr/>
-          <p:nvPr/>
-        </p:nvSpPr>
-        <p:spPr>
-          <a:xfrm>
-            <a:off x="8659368" y="3108960"/>
-            <a:ext cx="2846527" cy="914400"/>
+          <a:ln w="25400">
+            <a:solidFill>
+              <a:srgbClr val="FFFEFA"/>
+            </a:solidFill>
+            <a:prstDash val="solid"/>
+          </a:ln>
+          <a:effectLst>
+            <a:outerShdw sx="100000" sy="100000" kx="0" ky="0" algn="bl" rotWithShape="0" blurRad="50800" dist="19050" dir="5400000">
+              <a:srgbClr val="3C3828">
+                <a:alpha val="25000"/>
+              </a:srgbClr>
+            </a:outerShdw>
+          </a:effectLst>
+        </p:spPr>
+      </p:sp>
+      <p:sp>
+        <p:nvSpPr>
+          <p:cNvPr id="18" name="Text 15"/>
+          <p:cNvSpPr/>
+          <p:nvPr/>
+        </p:nvSpPr>
+        <p:spPr>
+          <a:xfrm>
+            <a:off x="8579815" y="3378200"/>
+            <a:ext cx="457200" cy="457200"/>
+          </a:xfrm>
+          <a:prstGeom prst="rect">
+            <a:avLst/>
+          </a:prstGeom>
+          <a:noFill/>
+          <a:ln/>
+        </p:spPr>
+        <p:txBody>
+          <a:bodyPr wrap="square" lIns="0" tIns="0" rIns="0" bIns="0" rtlCol="0" anchor="ctr"/>
+          <a:lstStyle/>
+          <a:p>
+            <a:pPr algn="ctr" indent="0" marL="0">
+              <a:buNone/>
+            </a:pPr>
+            <a:r>
+              <a:rPr lang="en-US" sz="1800" b="1" dirty="0">
+                <a:solidFill>
+                  <a:srgbClr val="FFFEFA"/>
+                </a:solidFill>
+                <a:latin typeface="Georgia" pitchFamily="34" charset="0"/>
+                <a:ea typeface="Georgia" pitchFamily="34" charset="-122"/>
+                <a:cs typeface="Georgia" pitchFamily="34" charset="-120"/>
+              </a:rPr>
+              <a:t>2</a:t>
+            </a:r>
+            <a:endParaRPr lang="en-US" sz="1800" dirty="0"/>
+          </a:p>
+        </p:txBody>
+      </p:sp>
+      <p:sp>
+        <p:nvSpPr>
+          <p:cNvPr id="19" name="Text 16"/>
+          <p:cNvSpPr/>
+          <p:nvPr/>
+        </p:nvSpPr>
+        <p:spPr>
+          <a:xfrm>
+            <a:off x="9219895" y="3159760"/>
+            <a:ext cx="2286000" cy="894080"/>
           </a:xfrm>
           <a:prstGeom prst="rect">
             <a:avLst/>
@@ -12107,14 +13637,14 @@
       </p:sp>
       <p:sp>
         <p:nvSpPr>
-          <p:cNvPr id="10" name="Shape 7"/>
-          <p:cNvSpPr/>
-          <p:nvPr/>
-        </p:nvSpPr>
-        <p:spPr>
-          <a:xfrm>
-            <a:off x="8183880" y="4334256"/>
-            <a:ext cx="292608" cy="292608"/>
+          <p:cNvPr id="20" name="Shape 17"/>
+          <p:cNvSpPr/>
+          <p:nvPr/>
+        </p:nvSpPr>
+        <p:spPr>
+          <a:xfrm>
+            <a:off x="8579815" y="4272280"/>
+            <a:ext cx="457200" cy="457200"/>
           </a:xfrm>
           <a:prstGeom prst="ellipse">
             <a:avLst/>
@@ -12122,24 +13652,70 @@
           <a:solidFill>
             <a:srgbClr val="FF9755"/>
           </a:solidFill>
-          <a:ln w="12700">
-            <a:solidFill>
-              <a:srgbClr val="FF9755"/>
-            </a:solidFill>
-            <a:prstDash val="solid"/>
-          </a:ln>
-        </p:spPr>
-      </p:sp>
-      <p:sp>
-        <p:nvSpPr>
-          <p:cNvPr id="11" name="Text 8"/>
-          <p:cNvSpPr/>
-          <p:nvPr/>
-        </p:nvSpPr>
-        <p:spPr>
-          <a:xfrm>
-            <a:off x="8659368" y="4023360"/>
-            <a:ext cx="2846527" cy="914400"/>
+          <a:ln w="25400">
+            <a:solidFill>
+              <a:srgbClr val="FFFEFA"/>
+            </a:solidFill>
+            <a:prstDash val="solid"/>
+          </a:ln>
+          <a:effectLst>
+            <a:outerShdw sx="100000" sy="100000" kx="0" ky="0" algn="bl" rotWithShape="0" blurRad="50800" dist="19050" dir="5400000">
+              <a:srgbClr val="3C3828">
+                <a:alpha val="25000"/>
+              </a:srgbClr>
+            </a:outerShdw>
+          </a:effectLst>
+        </p:spPr>
+      </p:sp>
+      <p:sp>
+        <p:nvSpPr>
+          <p:cNvPr id="21" name="Text 18"/>
+          <p:cNvSpPr/>
+          <p:nvPr/>
+        </p:nvSpPr>
+        <p:spPr>
+          <a:xfrm>
+            <a:off x="8579815" y="4272280"/>
+            <a:ext cx="457200" cy="457200"/>
+          </a:xfrm>
+          <a:prstGeom prst="rect">
+            <a:avLst/>
+          </a:prstGeom>
+          <a:noFill/>
+          <a:ln/>
+        </p:spPr>
+        <p:txBody>
+          <a:bodyPr wrap="square" lIns="0" tIns="0" rIns="0" bIns="0" rtlCol="0" anchor="ctr"/>
+          <a:lstStyle/>
+          <a:p>
+            <a:pPr algn="ctr" indent="0" marL="0">
+              <a:buNone/>
+            </a:pPr>
+            <a:r>
+              <a:rPr lang="en-US" sz="1800" b="1" dirty="0">
+                <a:solidFill>
+                  <a:srgbClr val="FFFEFA"/>
+                </a:solidFill>
+                <a:latin typeface="Georgia" pitchFamily="34" charset="0"/>
+                <a:ea typeface="Georgia" pitchFamily="34" charset="-122"/>
+                <a:cs typeface="Georgia" pitchFamily="34" charset="-120"/>
+              </a:rPr>
+              <a:t>3</a:t>
+            </a:r>
+            <a:endParaRPr lang="en-US" sz="1800" dirty="0"/>
+          </a:p>
+        </p:txBody>
+      </p:sp>
+      <p:sp>
+        <p:nvSpPr>
+          <p:cNvPr id="22" name="Text 19"/>
+          <p:cNvSpPr/>
+          <p:nvPr/>
+        </p:nvSpPr>
+        <p:spPr>
+          <a:xfrm>
+            <a:off x="9219895" y="4053840"/>
+            <a:ext cx="2286000" cy="894080"/>
           </a:xfrm>
           <a:prstGeom prst="rect">
             <a:avLst/>
@@ -12171,14 +13747,14 @@
       </p:sp>
       <p:sp>
         <p:nvSpPr>
-          <p:cNvPr id="12" name="Shape 9"/>
-          <p:cNvSpPr/>
-          <p:nvPr/>
-        </p:nvSpPr>
-        <p:spPr>
-          <a:xfrm>
-            <a:off x="8183880" y="5248656"/>
-            <a:ext cx="292608" cy="292608"/>
+          <p:cNvPr id="23" name="Shape 20"/>
+          <p:cNvSpPr/>
+          <p:nvPr/>
+        </p:nvSpPr>
+        <p:spPr>
+          <a:xfrm>
+            <a:off x="8579815" y="5085080"/>
+            <a:ext cx="457200" cy="457200"/>
           </a:xfrm>
           <a:prstGeom prst="ellipse">
             <a:avLst/>
@@ -12186,24 +13762,70 @@
           <a:solidFill>
             <a:srgbClr val="FC4067"/>
           </a:solidFill>
-          <a:ln w="12700">
-            <a:solidFill>
-              <a:srgbClr val="FC4067"/>
-            </a:solidFill>
-            <a:prstDash val="solid"/>
-          </a:ln>
-        </p:spPr>
-      </p:sp>
-      <p:sp>
-        <p:nvSpPr>
-          <p:cNvPr id="13" name="Text 10"/>
-          <p:cNvSpPr/>
-          <p:nvPr/>
-        </p:nvSpPr>
-        <p:spPr>
-          <a:xfrm>
-            <a:off x="8659368" y="4937760"/>
-            <a:ext cx="2846527" cy="914400"/>
+          <a:ln w="25400">
+            <a:solidFill>
+              <a:srgbClr val="FFFEFA"/>
+            </a:solidFill>
+            <a:prstDash val="solid"/>
+          </a:ln>
+          <a:effectLst>
+            <a:outerShdw sx="100000" sy="100000" kx="0" ky="0" algn="bl" rotWithShape="0" blurRad="50800" dist="19050" dir="5400000">
+              <a:srgbClr val="3C3828">
+                <a:alpha val="25000"/>
+              </a:srgbClr>
+            </a:outerShdw>
+          </a:effectLst>
+        </p:spPr>
+      </p:sp>
+      <p:sp>
+        <p:nvSpPr>
+          <p:cNvPr id="24" name="Text 21"/>
+          <p:cNvSpPr/>
+          <p:nvPr/>
+        </p:nvSpPr>
+        <p:spPr>
+          <a:xfrm>
+            <a:off x="8579815" y="5085080"/>
+            <a:ext cx="457200" cy="457200"/>
+          </a:xfrm>
+          <a:prstGeom prst="rect">
+            <a:avLst/>
+          </a:prstGeom>
+          <a:noFill/>
+          <a:ln/>
+        </p:spPr>
+        <p:txBody>
+          <a:bodyPr wrap="square" lIns="0" tIns="0" rIns="0" bIns="0" rtlCol="0" anchor="ctr"/>
+          <a:lstStyle/>
+          <a:p>
+            <a:pPr algn="ctr" indent="0" marL="0">
+              <a:buNone/>
+            </a:pPr>
+            <a:r>
+              <a:rPr lang="en-US" sz="1800" b="1" dirty="0">
+                <a:solidFill>
+                  <a:srgbClr val="FFFEFA"/>
+                </a:solidFill>
+                <a:latin typeface="Georgia" pitchFamily="34" charset="0"/>
+                <a:ea typeface="Georgia" pitchFamily="34" charset="-122"/>
+                <a:cs typeface="Georgia" pitchFamily="34" charset="-120"/>
+              </a:rPr>
+              <a:t>4</a:t>
+            </a:r>
+            <a:endParaRPr lang="en-US" sz="1800" dirty="0"/>
+          </a:p>
+        </p:txBody>
+      </p:sp>
+      <p:sp>
+        <p:nvSpPr>
+          <p:cNvPr id="25" name="Text 22"/>
+          <p:cNvSpPr/>
+          <p:nvPr/>
+        </p:nvSpPr>
+        <p:spPr>
+          <a:xfrm>
+            <a:off x="9219895" y="4947920"/>
+            <a:ext cx="2286000" cy="731520"/>
           </a:xfrm>
           <a:prstGeom prst="rect">
             <a:avLst/>
@@ -12289,7 +13911,508 @@
             <a:pPr algn="r"/>
             <a:fld id="{F7021451-1387-4CA6-816F-3879F97B5CBC}" type="slidenum">
               <a:rPr b="0" lang="en-US"/>
-              <a:t>21</a:t>
+              <a:t>22</a:t>
+            </a:fld>
+            <a:endParaRPr lang="en-US"/>
+          </a:p>
+        </p:txBody>
+      </p:sp>
+    </p:spTree>
+  </p:cSld>
+  <p:clrMapOvr>
+    <a:masterClrMapping/>
+  </p:clrMapOvr>
+</p:sld>
+</file>
+
+<file path=ppt/slides/slide23.xml><?xml version="1.0" encoding="utf-8"?>
+<p:sld xmlns:a="http://schemas.openxmlformats.org/drawingml/2006/main" xmlns:r="http://schemas.openxmlformats.org/officeDocument/2006/relationships" xmlns:p="http://schemas.openxmlformats.org/presentationml/2006/main">
+  <p:cSld name="Slide 23">
+    <p:bg>
+      <p:bgPr>
+        <a:solidFill>
+          <a:srgbClr val="02BDC7"/>
+        </a:solidFill>
+      </p:bgPr>
+    </p:bg>
+    <p:spTree>
+      <p:nvGrpSpPr>
+        <p:cNvPr id="1" name=""/>
+        <p:cNvGrpSpPr/>
+        <p:nvPr/>
+      </p:nvGrpSpPr>
+      <p:grpSpPr>
+        <a:xfrm>
+          <a:off x="0" y="0"/>
+          <a:ext cx="0" cy="0"/>
+          <a:chOff x="0" y="0"/>
+          <a:chExt cx="0" cy="0"/>
+        </a:xfrm>
+      </p:grpSpPr>
+      <p:sp>
+        <p:nvSpPr>
+          <p:cNvPr id="2" name="Shape 0"/>
+          <p:cNvSpPr/>
+          <p:nvPr/>
+        </p:nvSpPr>
+        <p:spPr>
+          <a:xfrm>
+            <a:off x="4175608" y="1234440"/>
+            <a:ext cx="3840480" cy="3840480"/>
+          </a:xfrm>
+          <a:prstGeom prst="ellipse">
+            <a:avLst/>
+          </a:prstGeom>
+          <a:solidFill>
+            <a:srgbClr val="FFFEFA"/>
+          </a:solidFill>
+          <a:ln w="12700">
+            <a:solidFill>
+              <a:srgbClr val="FFFEFA"/>
+            </a:solidFill>
+            <a:prstDash val="solid"/>
+          </a:ln>
+          <a:effectLst>
+            <a:outerShdw sx="100000" sy="100000" kx="0" ky="0" algn="bl" rotWithShape="0" blurRad="177800" dist="50800" dir="5400000">
+              <a:srgbClr val="3C3828">
+                <a:alpha val="18000"/>
+              </a:srgbClr>
+            </a:outerShdw>
+          </a:effectLst>
+        </p:spPr>
+      </p:sp>
+      <p:sp>
+        <p:nvSpPr>
+          <p:cNvPr id="3" name="Text 1"/>
+          <p:cNvSpPr/>
+          <p:nvPr/>
+        </p:nvSpPr>
+        <p:spPr>
+          <a:xfrm>
+            <a:off x="4175608" y="2377440"/>
+            <a:ext cx="3840480" cy="1097280"/>
+          </a:xfrm>
+          <a:prstGeom prst="rect">
+            <a:avLst/>
+          </a:prstGeom>
+          <a:noFill/>
+          <a:ln/>
+        </p:spPr>
+        <p:txBody>
+          <a:bodyPr wrap="square" lIns="0" tIns="0" rIns="0" bIns="0" rtlCol="0" anchor="ctr"/>
+          <a:lstStyle/>
+          <a:p>
+            <a:pPr algn="ctr" indent="0" marL="0">
+              <a:buNone/>
+            </a:pPr>
+            <a:r>
+              <a:rPr lang="en-US" sz="7200" b="1" dirty="0">
+                <a:solidFill>
+                  <a:srgbClr val="3C3828"/>
+                </a:solidFill>
+                <a:latin typeface="Georgia" pitchFamily="34" charset="0"/>
+                <a:ea typeface="Georgia" pitchFamily="34" charset="-122"/>
+                <a:cs typeface="Georgia" pitchFamily="34" charset="-120"/>
+              </a:rPr>
+              <a:t>YAWP!</a:t>
+            </a:r>
+            <a:endParaRPr lang="en-US" sz="7200" dirty="0"/>
+          </a:p>
+        </p:txBody>
+      </p:sp>
+      <p:sp>
+        <p:nvSpPr>
+          <p:cNvPr id="4" name="Text 2"/>
+          <p:cNvSpPr/>
+          <p:nvPr/>
+        </p:nvSpPr>
+        <p:spPr>
+          <a:xfrm>
+            <a:off x="4175608" y="3520440"/>
+            <a:ext cx="3840480" cy="365760"/>
+          </a:xfrm>
+          <a:prstGeom prst="rect">
+            <a:avLst/>
+          </a:prstGeom>
+          <a:noFill/>
+          <a:ln/>
+        </p:spPr>
+        <p:txBody>
+          <a:bodyPr wrap="square" lIns="0" tIns="0" rIns="0" bIns="0" rtlCol="0" anchor="ctr"/>
+          <a:lstStyle/>
+          <a:p>
+            <a:pPr algn="ctr" indent="0" marL="0">
+              <a:buNone/>
+            </a:pPr>
+            <a:r>
+              <a:rPr lang="en-US" sz="1300" b="1" spc="300" kern="0" dirty="0">
+                <a:solidFill>
+                  <a:srgbClr val="D27151"/>
+                </a:solidFill>
+                <a:latin typeface="Consolas" pitchFamily="34" charset="0"/>
+                <a:ea typeface="Consolas" pitchFamily="34" charset="-122"/>
+                <a:cs typeface="Consolas" pitchFamily="34" charset="-120"/>
+              </a:rPr>
+              <a:t>WRITING PROGRAM</a:t>
+            </a:r>
+            <a:endParaRPr lang="en-US" sz="1300" dirty="0"/>
+          </a:p>
+        </p:txBody>
+      </p:sp>
+      <p:sp>
+        <p:nvSpPr>
+          <p:cNvPr id="5" name="Shape 3"/>
+          <p:cNvSpPr/>
+          <p:nvPr/>
+        </p:nvSpPr>
+        <p:spPr>
+          <a:xfrm>
+            <a:off x="6918808" y="777240"/>
+            <a:ext cx="1463040" cy="1463040"/>
+          </a:xfrm>
+          <a:prstGeom prst="ellipse">
+            <a:avLst/>
+          </a:prstGeom>
+          <a:solidFill>
+            <a:srgbClr val="FFB600"/>
+          </a:solidFill>
+          <a:ln w="12700">
+            <a:solidFill>
+              <a:srgbClr val="FFB600"/>
+            </a:solidFill>
+            <a:prstDash val="solid"/>
+          </a:ln>
+        </p:spPr>
+      </p:sp>
+      <p:pic>
+        <p:nvPicPr>
+          <p:cNvPr id="6" name="Image 0" descr="lightbulb icon">    </p:cNvPr>
+          <p:cNvPicPr>
+            <a:picLocks noChangeAspect="1"/>
+          </p:cNvPicPr>
+          <p:nvPr/>
+        </p:nvPicPr>
+        <p:blipFill>
+          <a:blip r:embed="rId1"/>
+          <a:stretch>
+            <a:fillRect/>
+          </a:stretch>
+        </p:blipFill>
+        <p:spPr>
+          <a:xfrm>
+            <a:off x="7211416" y="1069848"/>
+            <a:ext cx="877824" cy="877824"/>
+          </a:xfrm>
+          <a:prstGeom prst="rect">
+            <a:avLst/>
+          </a:prstGeom>
+        </p:spPr>
+      </p:pic>
+      <p:sp>
+        <p:nvSpPr>
+          <p:cNvPr id="7" name="Shape 4"/>
+          <p:cNvSpPr/>
+          <p:nvPr/>
+        </p:nvSpPr>
+        <p:spPr>
+          <a:xfrm>
+            <a:off x="3626968" y="1508760"/>
+            <a:ext cx="1005840" cy="1005840"/>
+          </a:xfrm>
+          <a:prstGeom prst="ellipse">
+            <a:avLst/>
+          </a:prstGeom>
+          <a:solidFill>
+            <a:srgbClr val="FF9755"/>
+          </a:solidFill>
+          <a:ln w="12700">
+            <a:solidFill>
+              <a:srgbClr val="FF9755"/>
+            </a:solidFill>
+            <a:prstDash val="solid"/>
+          </a:ln>
+        </p:spPr>
+      </p:sp>
+      <p:pic>
+        <p:nvPicPr>
+          <p:cNvPr id="8" name="Image 1" descr="puzzle icon">    </p:cNvPr>
+          <p:cNvPicPr>
+            <a:picLocks noChangeAspect="1"/>
+          </p:cNvPicPr>
+          <p:nvPr/>
+        </p:nvPicPr>
+        <p:blipFill>
+          <a:blip r:embed="rId2"/>
+          <a:stretch>
+            <a:fillRect/>
+          </a:stretch>
+        </p:blipFill>
+        <p:spPr>
+          <a:xfrm>
+            <a:off x="3828136" y="1709928"/>
+            <a:ext cx="603504" cy="603504"/>
+          </a:xfrm>
+          <a:prstGeom prst="rect">
+            <a:avLst/>
+          </a:prstGeom>
+        </p:spPr>
+      </p:pic>
+      <p:sp>
+        <p:nvSpPr>
+          <p:cNvPr id="9" name="Shape 5"/>
+          <p:cNvSpPr/>
+          <p:nvPr/>
+        </p:nvSpPr>
+        <p:spPr>
+          <a:xfrm>
+            <a:off x="4267048" y="4069080"/>
+            <a:ext cx="1188720" cy="1188720"/>
+          </a:xfrm>
+          <a:prstGeom prst="ellipse">
+            <a:avLst/>
+          </a:prstGeom>
+          <a:solidFill>
+            <a:srgbClr val="FC4540"/>
+          </a:solidFill>
+          <a:ln w="12700">
+            <a:solidFill>
+              <a:srgbClr val="FC4540"/>
+            </a:solidFill>
+            <a:prstDash val="solid"/>
+          </a:ln>
+        </p:spPr>
+      </p:sp>
+      <p:pic>
+        <p:nvPicPr>
+          <p:cNvPr id="10" name="Image 2" descr="thumbs icon">    </p:cNvPr>
+          <p:cNvPicPr>
+            <a:picLocks noChangeAspect="1"/>
+          </p:cNvPicPr>
+          <p:nvPr/>
+        </p:nvPicPr>
+        <p:blipFill>
+          <a:blip r:embed="rId3"/>
+          <a:stretch>
+            <a:fillRect/>
+          </a:stretch>
+        </p:blipFill>
+        <p:spPr>
+          <a:xfrm>
+            <a:off x="4504792" y="4306824"/>
+            <a:ext cx="713232" cy="713232"/>
+          </a:xfrm>
+          <a:prstGeom prst="rect">
+            <a:avLst/>
+          </a:prstGeom>
+        </p:spPr>
+      </p:pic>
+      <p:sp>
+        <p:nvSpPr>
+          <p:cNvPr id="11" name="Shape 6"/>
+          <p:cNvSpPr/>
+          <p:nvPr/>
+        </p:nvSpPr>
+        <p:spPr>
+          <a:xfrm>
+            <a:off x="3855568" y="2971800"/>
+            <a:ext cx="274320" cy="274320"/>
+          </a:xfrm>
+          <a:prstGeom prst="ellipse">
+            <a:avLst/>
+          </a:prstGeom>
+          <a:solidFill>
+            <a:srgbClr val="FFFEFA"/>
+          </a:solidFill>
+          <a:ln w="12700">
+            <a:solidFill>
+              <a:srgbClr val="FFFEFA"/>
+            </a:solidFill>
+            <a:prstDash val="solid"/>
+          </a:ln>
+        </p:spPr>
+      </p:sp>
+      <p:sp>
+        <p:nvSpPr>
+          <p:cNvPr id="12" name="Shape 7"/>
+          <p:cNvSpPr/>
+          <p:nvPr/>
+        </p:nvSpPr>
+        <p:spPr>
+          <a:xfrm>
+            <a:off x="8107528" y="2606040"/>
+            <a:ext cx="411480" cy="411480"/>
+          </a:xfrm>
+          <a:prstGeom prst="ellipse">
+            <a:avLst/>
+          </a:prstGeom>
+          <a:solidFill>
+            <a:srgbClr val="FC4067"/>
+          </a:solidFill>
+          <a:ln w="12700">
+            <a:solidFill>
+              <a:srgbClr val="FC4067"/>
+            </a:solidFill>
+            <a:prstDash val="solid"/>
+          </a:ln>
+        </p:spPr>
+      </p:sp>
+      <p:sp>
+        <p:nvSpPr>
+          <p:cNvPr id="13" name="Shape 8"/>
+          <p:cNvSpPr/>
+          <p:nvPr/>
+        </p:nvSpPr>
+        <p:spPr>
+          <a:xfrm>
+            <a:off x="7558888" y="5120640"/>
+            <a:ext cx="548640" cy="548640"/>
+          </a:xfrm>
+          <a:prstGeom prst="ellipse">
+            <a:avLst/>
+          </a:prstGeom>
+          <a:solidFill>
+            <a:srgbClr val="FF9755"/>
+          </a:solidFill>
+          <a:ln w="12700">
+            <a:solidFill>
+              <a:srgbClr val="FF9755"/>
+            </a:solidFill>
+            <a:prstDash val="solid"/>
+          </a:ln>
+        </p:spPr>
+      </p:sp>
+      <p:sp>
+        <p:nvSpPr>
+          <p:cNvPr id="14" name="Shape 9"/>
+          <p:cNvSpPr/>
+          <p:nvPr/>
+        </p:nvSpPr>
+        <p:spPr>
+          <a:xfrm>
+            <a:off x="6735928" y="5349240"/>
+            <a:ext cx="164592" cy="164592"/>
+          </a:xfrm>
+          <a:prstGeom prst="ellipse">
+            <a:avLst/>
+          </a:prstGeom>
+          <a:solidFill>
+            <a:srgbClr val="FFB600"/>
+          </a:solidFill>
+          <a:ln w="12700">
+            <a:solidFill>
+              <a:srgbClr val="FFB600"/>
+            </a:solidFill>
+            <a:prstDash val="solid"/>
+          </a:ln>
+        </p:spPr>
+      </p:sp>
+      <p:sp>
+        <p:nvSpPr>
+          <p:cNvPr id="15" name="Shape 10"/>
+          <p:cNvSpPr/>
+          <p:nvPr/>
+        </p:nvSpPr>
+        <p:spPr>
+          <a:xfrm>
+            <a:off x="5455768" y="5257800"/>
+            <a:ext cx="201168" cy="201168"/>
+          </a:xfrm>
+          <a:prstGeom prst="ellipse">
+            <a:avLst/>
+          </a:prstGeom>
+          <a:solidFill>
+            <a:srgbClr val="FFFEFA"/>
+          </a:solidFill>
+          <a:ln w="12700">
+            <a:solidFill>
+              <a:srgbClr val="FFFEFA"/>
+            </a:solidFill>
+            <a:prstDash val="solid"/>
+          </a:ln>
+        </p:spPr>
+      </p:sp>
+      <p:sp>
+        <p:nvSpPr>
+          <p:cNvPr id="16" name="Text 11"/>
+          <p:cNvSpPr/>
+          <p:nvPr/>
+        </p:nvSpPr>
+        <p:spPr>
+          <a:xfrm>
+            <a:off x="685800" y="5577840"/>
+            <a:ext cx="10820095" cy="548640"/>
+          </a:xfrm>
+          <a:prstGeom prst="rect">
+            <a:avLst/>
+          </a:prstGeom>
+          <a:noFill/>
+          <a:ln/>
+        </p:spPr>
+        <p:txBody>
+          <a:bodyPr wrap="square" lIns="0" tIns="0" rIns="0" bIns="0" rtlCol="0" anchor="ctr"/>
+          <a:lstStyle/>
+          <a:p>
+            <a:pPr algn="ctr" indent="0" marL="0">
+              <a:buNone/>
+            </a:pPr>
+            <a:r>
+              <a:rPr lang="en-US" sz="2200" dirty="0">
+                <a:solidFill>
+                  <a:srgbClr val="FFFEFA"/>
+                </a:solidFill>
+                <a:latin typeface="Calibri" pitchFamily="34" charset="0"/>
+                <a:ea typeface="Calibri" pitchFamily="34" charset="-122"/>
+                <a:cs typeface="Calibri" pitchFamily="34" charset="-120"/>
+              </a:rPr>
+              <a:t>You wrote a thesis-driven essay. Celebrate it!</a:t>
+            </a:r>
+            <a:endParaRPr lang="en-US" sz="2200" dirty="0"/>
+          </a:p>
+        </p:txBody>
+      </p:sp>
+      <p:sp>
+        <p:nvSpPr>
+          <p:cNvPr id="25" name="Slide Number Placeholder 0"/>
+          <p:cNvSpPr>
+            <a:spLocks noGrp="1"/>
+          </p:cNvSpPr>
+          <p:nvPr>
+            <p:ph type="sldNum" sz="quarter" idx="4294967295"/>
+          </p:nvPr>
+        </p:nvSpPr>
+        <p:spPr>
+          <a:xfrm>
+            <a:off x="10957255" y="6355080"/>
+            <a:ext cx="548640" cy="320040"/>
+          </a:xfrm>
+          <a:prstGeom prst="rect">
+            <a:avLst/>
+          </a:prstGeom>
+          <a:extLst>
+            <a:ext uri="{C572A759-6A51-4108-AA02-DFA0A04FC94B}">
+              <ma14:wrappingTextBoxFlag xmlns:ma14="http://schemas.microsoft.com/office/mac/drawingml/2011/main" val="0"/>
+            </a:ext>
+          </a:extLst>
+        </p:spPr>
+        <p:txBody>
+          <a:bodyPr/>
+          <a:lstStyle>
+            <a:lvl1pPr>
+              <a:defRPr sz="1000">
+                <a:solidFill>
+                  <a:srgbClr val="7E7C78"/>
+                </a:solidFill>
+                <a:latin typeface="Consolas"/>
+                <a:ea typeface="Consolas"/>
+                <a:cs typeface="Consolas"/>
+              </a:defRPr>
+            </a:lvl1pPr>
+          </a:lstStyle>
+          <a:p>
+            <a:pPr algn="r"/>
+            <a:fld id="{F7021451-1387-4CA6-816F-3879F97B5CBC}" type="slidenum">
+              <a:rPr b="0" lang="en-US"/>
+              <a:t>23</a:t>
             </a:fld>
             <a:endParaRPr lang="en-US"/>
           </a:p>
@@ -12392,7 +14515,7 @@
                 <a:ea typeface="Georgia" pitchFamily="34" charset="-122"/>
                 <a:cs typeface="Georgia" pitchFamily="34" charset="-120"/>
               </a:rPr>
-              <a:t>What’s the best way to write an essay?</a:t>
+              <a:t>What’s the best way to write an essay?</a:t>
             </a:r>
             <a:endParaRPr lang="en-US" sz="3000" dirty="0"/>
           </a:p>
@@ -13216,7 +15339,7 @@
                 <a:ea typeface="Georgia" pitchFamily="34" charset="-122"/>
                 <a:cs typeface="Georgia" pitchFamily="34" charset="-120"/>
               </a:rPr>
-              <a:t>What’s the best way to write an essay?</a:t>
+              <a:t>What’s the best way to write an essay?</a:t>
             </a:r>
             <a:endParaRPr lang="en-US" sz="3000" dirty="0"/>
           </a:p>
@@ -14043,7 +16166,7 @@
                 <a:ea typeface="Georgia" pitchFamily="34" charset="-122"/>
                 <a:cs typeface="Georgia" pitchFamily="34" charset="-120"/>
               </a:rPr>
-              <a:t>Critical thinking is best defined as:</a:t>
+              <a:t>Critical thinking is best defined as:</a:t>
             </a:r>
             <a:endParaRPr lang="en-US" sz="3000" dirty="0"/>
           </a:p>
@@ -14867,7 +16990,7 @@
                 <a:ea typeface="Georgia" pitchFamily="34" charset="-122"/>
                 <a:cs typeface="Georgia" pitchFamily="34" charset="-120"/>
               </a:rPr>
-              <a:t>Critical thinking is best defined as:</a:t>
+              <a:t>Critical thinking is best defined as:</a:t>
             </a:r>
             <a:endParaRPr lang="en-US" sz="3000" dirty="0"/>
           </a:p>
@@ -15694,7 +17817,7 @@
                 <a:ea typeface="Georgia" pitchFamily="34" charset="-122"/>
                 <a:cs typeface="Georgia" pitchFamily="34" charset="-120"/>
               </a:rPr>
-              <a:t>Which of the following is MOST TRUE about a good thesis statement?</a:t>
+              <a:t>Which of the following is MOST TRUE about a good thesis statement?</a:t>
             </a:r>
             <a:endParaRPr lang="en-US" sz="3000" dirty="0"/>
           </a:p>
@@ -16518,7 +18641,7 @@
                 <a:ea typeface="Georgia" pitchFamily="34" charset="-122"/>
                 <a:cs typeface="Georgia" pitchFamily="34" charset="-120"/>
               </a:rPr>
-              <a:t>Which of the following is MOST TRUE about a good thesis statement?</a:t>
+              <a:t>Which of the following is MOST TRUE about a good thesis statement?</a:t>
             </a:r>
             <a:endParaRPr lang="en-US" sz="3000" dirty="0"/>
           </a:p>
@@ -17345,7 +19468,7 @@
                 <a:ea typeface="Georgia" pitchFamily="34" charset="-122"/>
                 <a:cs typeface="Georgia" pitchFamily="34" charset="-120"/>
               </a:rPr>
-              <a:t>Your introduction paragraph’s MAIN function is to:</a:t>
+              <a:t>Your introduction paragraph’s MAIN function is to:</a:t>
             </a:r>
             <a:endParaRPr lang="en-US" sz="3000" dirty="0"/>
           </a:p>

--- a/services/web-app/resources/thesis-essay-decks/lesson-7-titles.pptx
+++ b/services/web-app/resources/thesis-essay-decks/lesson-7-titles.pptx
@@ -3426,7 +3426,7 @@
               <a:buNone/>
             </a:pPr>
             <a:r>
-              <a:rPr lang="en-US" sz="1300" b="1" spc="200" kern="0" dirty="0">
+              <a:rPr lang="en-US" sz="1300" b="1" dirty="0">
                 <a:solidFill>
                   <a:srgbClr val="02BDC7"/>
                 </a:solidFill>
@@ -3434,7 +3434,7 @@
                 <a:ea typeface="Consolas" pitchFamily="34" charset="-122"/>
                 <a:cs typeface="Consolas" pitchFamily="34" charset="-120"/>
               </a:rPr>
-              <a:t>THESIS-DRIVEN ESSAY · LESSON 7</a:t>
+              <a:t>Thesis-Driven Essay · Lesson 7</a:t>
             </a:r>
             <a:endParaRPr lang="en-US" sz="1300" dirty="0"/>
           </a:p>
@@ -3744,7 +3744,7 @@
               <a:buNone/>
             </a:pPr>
             <a:r>
-              <a:rPr lang="en-US" sz="1200" b="1" spc="200" kern="0" dirty="0">
+              <a:rPr lang="en-US" sz="1200" b="1" dirty="0">
                 <a:solidFill>
                   <a:srgbClr val="FC4067"/>
                 </a:solidFill>
@@ -3752,7 +3752,7 @@
                 <a:ea typeface="Consolas" pitchFamily="34" charset="-122"/>
                 <a:cs typeface="Consolas" pitchFamily="34" charset="-120"/>
               </a:rPr>
-              <a:t>REVIEW · 4 OF 6</a:t>
+              <a:t>Review · 4 of 6</a:t>
             </a:r>
             <a:endParaRPr lang="en-US" sz="1200" dirty="0"/>
           </a:p>
@@ -4571,7 +4571,7 @@
               <a:buNone/>
             </a:pPr>
             <a:r>
-              <a:rPr lang="en-US" sz="1200" b="1" spc="200" kern="0" dirty="0">
+              <a:rPr lang="en-US" sz="1200" b="1" dirty="0">
                 <a:solidFill>
                   <a:srgbClr val="02BDC7"/>
                 </a:solidFill>
@@ -4579,7 +4579,7 @@
                 <a:ea typeface="Consolas" pitchFamily="34" charset="-122"/>
                 <a:cs typeface="Consolas" pitchFamily="34" charset="-120"/>
               </a:rPr>
-              <a:t>REVIEW · 5 OF 6</a:t>
+              <a:t>Review · 5 of 6</a:t>
             </a:r>
             <a:endParaRPr lang="en-US" sz="1200" dirty="0"/>
           </a:p>
@@ -5292,7 +5292,7 @@
               <a:buNone/>
             </a:pPr>
             <a:r>
-              <a:rPr lang="en-US" sz="1200" b="1" spc="200" kern="0" dirty="0">
+              <a:rPr lang="en-US" sz="1200" b="1" dirty="0">
                 <a:solidFill>
                   <a:srgbClr val="FFB600"/>
                 </a:solidFill>
@@ -5300,7 +5300,7 @@
                 <a:ea typeface="Consolas" pitchFamily="34" charset="-122"/>
                 <a:cs typeface="Consolas" pitchFamily="34" charset="-120"/>
               </a:rPr>
-              <a:t>REVIEW · 5 OF 6</a:t>
+              <a:t>Review · 5 of 6</a:t>
             </a:r>
             <a:endParaRPr lang="en-US" sz="1200" dirty="0"/>
           </a:p>
@@ -6016,7 +6016,7 @@
               <a:buNone/>
             </a:pPr>
             <a:r>
-              <a:rPr lang="en-US" sz="1200" b="1" spc="200" kern="0" dirty="0">
+              <a:rPr lang="en-US" sz="1200" b="1" dirty="0">
                 <a:solidFill>
                   <a:srgbClr val="FC4540"/>
                 </a:solidFill>
@@ -6024,7 +6024,7 @@
                 <a:ea typeface="Consolas" pitchFamily="34" charset="-122"/>
                 <a:cs typeface="Consolas" pitchFamily="34" charset="-120"/>
               </a:rPr>
-              <a:t>REVIEW · 6 OF 6</a:t>
+              <a:t>Review · 6 of 6</a:t>
             </a:r>
             <a:endParaRPr lang="en-US" sz="1200" dirty="0"/>
           </a:p>
@@ -6531,7 +6531,7 @@
               <a:buNone/>
             </a:pPr>
             <a:r>
-              <a:rPr lang="en-US" sz="1200" b="1" spc="200" kern="0" dirty="0">
+              <a:rPr lang="en-US" sz="1200" b="1" dirty="0">
                 <a:solidFill>
                   <a:srgbClr val="FF9755"/>
                 </a:solidFill>
@@ -6539,7 +6539,7 @@
                 <a:ea typeface="Consolas" pitchFamily="34" charset="-122"/>
                 <a:cs typeface="Consolas" pitchFamily="34" charset="-120"/>
               </a:rPr>
-              <a:t>REVIEW · 6 OF 6</a:t>
+              <a:t>Review · 6 of 6</a:t>
             </a:r>
             <a:endParaRPr lang="en-US" sz="1200" dirty="0"/>
           </a:p>
@@ -7049,7 +7049,7 @@
               <a:buNone/>
             </a:pPr>
             <a:r>
-              <a:rPr lang="en-US" sz="1200" b="1" spc="200" kern="0" dirty="0">
+              <a:rPr lang="en-US" sz="1200" b="1" dirty="0">
                 <a:solidFill>
                   <a:srgbClr val="02BDC7"/>
                 </a:solidFill>
@@ -7057,7 +7057,7 @@
                 <a:ea typeface="Consolas" pitchFamily="34" charset="-122"/>
                 <a:cs typeface="Consolas" pitchFamily="34" charset="-120"/>
               </a:rPr>
-              <a:t>SUGGESTED CONCLUSION STRUCTURE</a:t>
+              <a:t>Suggested conclusion structure</a:t>
             </a:r>
             <a:endParaRPr lang="en-US" sz="1200" dirty="0"/>
           </a:p>
@@ -8563,7 +8563,7 @@
               <a:buNone/>
             </a:pPr>
             <a:r>
-              <a:rPr lang="en-US" sz="1200" b="1" spc="200" kern="0" dirty="0">
+              <a:rPr lang="en-US" sz="1200" b="1" dirty="0">
                 <a:solidFill>
                   <a:srgbClr val="FFB600"/>
                 </a:solidFill>
@@ -8571,7 +8571,7 @@
                 <a:ea typeface="Consolas" pitchFamily="34" charset="-122"/>
                 <a:cs typeface="Consolas" pitchFamily="34" charset="-120"/>
               </a:rPr>
-              <a:t>GIVE YOUR ESSAY A TITLE</a:t>
+              <a:t>Give your essay a title</a:t>
             </a:r>
             <a:endParaRPr lang="en-US" sz="1200" dirty="0"/>
           </a:p>
@@ -9363,7 +9363,7 @@
               <a:buNone/>
             </a:pPr>
             <a:r>
-              <a:rPr lang="en-US" sz="1200" b="1" spc="200" kern="0" dirty="0">
+              <a:rPr lang="en-US" sz="1200" b="1" dirty="0">
                 <a:solidFill>
                   <a:srgbClr val="FFB600"/>
                 </a:solidFill>
@@ -9371,7 +9371,7 @@
                 <a:ea typeface="Consolas" pitchFamily="34" charset="-122"/>
                 <a:cs typeface="Consolas" pitchFamily="34" charset="-120"/>
               </a:rPr>
-              <a:t>GIVE YOUR ESSAY A TITLE</a:t>
+              <a:t>Give your essay a title</a:t>
             </a:r>
             <a:endParaRPr lang="en-US" sz="1200" dirty="0"/>
           </a:p>
@@ -9904,7 +9904,7 @@
               <a:buNone/>
             </a:pPr>
             <a:r>
-              <a:rPr lang="en-US" sz="1200" b="1" spc="200" kern="0" dirty="0">
+              <a:rPr lang="en-US" sz="1200" b="1" dirty="0">
                 <a:solidFill>
                   <a:srgbClr val="FC4540"/>
                 </a:solidFill>
@@ -9912,7 +9912,7 @@
                 <a:ea typeface="Consolas" pitchFamily="34" charset="-122"/>
                 <a:cs typeface="Consolas" pitchFamily="34" charset="-120"/>
               </a:rPr>
-              <a:t>YOUR TURN</a:t>
+              <a:t>Your turn</a:t>
             </a:r>
             <a:endParaRPr lang="en-US" sz="1200" dirty="0"/>
           </a:p>
@@ -11988,7 +11988,7 @@
               <a:buNone/>
             </a:pPr>
             <a:r>
-              <a:rPr lang="en-US" sz="1200" b="1" spc="200" kern="0" dirty="0">
+              <a:rPr lang="en-US" sz="1200" b="1" dirty="0">
                 <a:solidFill>
                   <a:srgbClr val="02BDC7"/>
                 </a:solidFill>
@@ -11996,7 +11996,7 @@
                 <a:ea typeface="Consolas" pitchFamily="34" charset="-122"/>
                 <a:cs typeface="Consolas" pitchFamily="34" charset="-120"/>
               </a:rPr>
-              <a:t>FINISHING TOUCHES IN YAWP!</a:t>
+              <a:t>Finishing touches in YAWP!</a:t>
             </a:r>
             <a:endParaRPr lang="en-US" sz="1200" dirty="0"/>
           </a:p>
@@ -13006,7 +13006,7 @@
               <a:buNone/>
             </a:pPr>
             <a:r>
-              <a:rPr lang="en-US" sz="1200" b="1" spc="200" kern="0" dirty="0">
+              <a:rPr lang="en-US" sz="1200" b="1" dirty="0">
                 <a:solidFill>
                   <a:srgbClr val="FFB600"/>
                 </a:solidFill>
@@ -13014,7 +13014,7 @@
                 <a:ea typeface="Consolas" pitchFamily="34" charset="-122"/>
                 <a:cs typeface="Consolas" pitchFamily="34" charset="-120"/>
               </a:rPr>
-              <a:t>DONE</a:t>
+              <a:t>Done</a:t>
             </a:r>
             <a:endParaRPr lang="en-US" sz="1200" dirty="0"/>
           </a:p>
@@ -14468,7 +14468,7 @@
               <a:buNone/>
             </a:pPr>
             <a:r>
-              <a:rPr lang="en-US" sz="1200" b="1" spc="200" kern="0" dirty="0">
+              <a:rPr lang="en-US" sz="1200" b="1" dirty="0">
                 <a:solidFill>
                   <a:srgbClr val="FC4540"/>
                 </a:solidFill>
@@ -14476,7 +14476,7 @@
                 <a:ea typeface="Consolas" pitchFamily="34" charset="-122"/>
                 <a:cs typeface="Consolas" pitchFamily="34" charset="-120"/>
               </a:rPr>
-              <a:t>REVIEW · 1 OF 6</a:t>
+              <a:t>Review · 1 of 6</a:t>
             </a:r>
             <a:endParaRPr lang="en-US" sz="1200" dirty="0"/>
           </a:p>
@@ -15292,7 +15292,7 @@
               <a:buNone/>
             </a:pPr>
             <a:r>
-              <a:rPr lang="en-US" sz="1200" b="1" spc="200" kern="0" dirty="0">
+              <a:rPr lang="en-US" sz="1200" b="1" dirty="0">
                 <a:solidFill>
                   <a:srgbClr val="FF9755"/>
                 </a:solidFill>
@@ -15300,7 +15300,7 @@
                 <a:ea typeface="Consolas" pitchFamily="34" charset="-122"/>
                 <a:cs typeface="Consolas" pitchFamily="34" charset="-120"/>
               </a:rPr>
-              <a:t>REVIEW · 1 OF 6</a:t>
+              <a:t>Review · 1 of 6</a:t>
             </a:r>
             <a:endParaRPr lang="en-US" sz="1200" dirty="0"/>
           </a:p>
@@ -16119,7 +16119,7 @@
               <a:buNone/>
             </a:pPr>
             <a:r>
-              <a:rPr lang="en-US" sz="1200" b="1" spc="200" kern="0" dirty="0">
+              <a:rPr lang="en-US" sz="1200" b="1" dirty="0">
                 <a:solidFill>
                   <a:srgbClr val="FC4067"/>
                 </a:solidFill>
@@ -16127,7 +16127,7 @@
                 <a:ea typeface="Consolas" pitchFamily="34" charset="-122"/>
                 <a:cs typeface="Consolas" pitchFamily="34" charset="-120"/>
               </a:rPr>
-              <a:t>REVIEW · 2 OF 6</a:t>
+              <a:t>Review · 2 of 6</a:t>
             </a:r>
             <a:endParaRPr lang="en-US" sz="1200" dirty="0"/>
           </a:p>
@@ -16943,7 +16943,7 @@
               <a:buNone/>
             </a:pPr>
             <a:r>
-              <a:rPr lang="en-US" sz="1200" b="1" spc="200" kern="0" dirty="0">
+              <a:rPr lang="en-US" sz="1200" b="1" dirty="0">
                 <a:solidFill>
                   <a:srgbClr val="02BDC7"/>
                 </a:solidFill>
@@ -16951,7 +16951,7 @@
                 <a:ea typeface="Consolas" pitchFamily="34" charset="-122"/>
                 <a:cs typeface="Consolas" pitchFamily="34" charset="-120"/>
               </a:rPr>
-              <a:t>REVIEW · 2 OF 6</a:t>
+              <a:t>Review · 2 of 6</a:t>
             </a:r>
             <a:endParaRPr lang="en-US" sz="1200" dirty="0"/>
           </a:p>
@@ -17770,7 +17770,7 @@
               <a:buNone/>
             </a:pPr>
             <a:r>
-              <a:rPr lang="en-US" sz="1200" b="1" spc="200" kern="0" dirty="0">
+              <a:rPr lang="en-US" sz="1200" b="1" dirty="0">
                 <a:solidFill>
                   <a:srgbClr val="FFB600"/>
                 </a:solidFill>
@@ -17778,7 +17778,7 @@
                 <a:ea typeface="Consolas" pitchFamily="34" charset="-122"/>
                 <a:cs typeface="Consolas" pitchFamily="34" charset="-120"/>
               </a:rPr>
-              <a:t>REVIEW · 3 OF 6</a:t>
+              <a:t>Review · 3 of 6</a:t>
             </a:r>
             <a:endParaRPr lang="en-US" sz="1200" dirty="0"/>
           </a:p>
@@ -18594,7 +18594,7 @@
               <a:buNone/>
             </a:pPr>
             <a:r>
-              <a:rPr lang="en-US" sz="1200" b="1" spc="200" kern="0" dirty="0">
+              <a:rPr lang="en-US" sz="1200" b="1" dirty="0">
                 <a:solidFill>
                   <a:srgbClr val="FC4540"/>
                 </a:solidFill>
@@ -18602,7 +18602,7 @@
                 <a:ea typeface="Consolas" pitchFamily="34" charset="-122"/>
                 <a:cs typeface="Consolas" pitchFamily="34" charset="-120"/>
               </a:rPr>
-              <a:t>REVIEW · 3 OF 6</a:t>
+              <a:t>Review · 3 of 6</a:t>
             </a:r>
             <a:endParaRPr lang="en-US" sz="1200" dirty="0"/>
           </a:p>
@@ -19421,7 +19421,7 @@
               <a:buNone/>
             </a:pPr>
             <a:r>
-              <a:rPr lang="en-US" sz="1200" b="1" spc="200" kern="0" dirty="0">
+              <a:rPr lang="en-US" sz="1200" b="1" dirty="0">
                 <a:solidFill>
                   <a:srgbClr val="FF9755"/>
                 </a:solidFill>
@@ -19429,7 +19429,7 @@
                 <a:ea typeface="Consolas" pitchFamily="34" charset="-122"/>
                 <a:cs typeface="Consolas" pitchFamily="34" charset="-120"/>
               </a:rPr>
-              <a:t>REVIEW · 4 OF 6</a:t>
+              <a:t>Review · 4 of 6</a:t>
             </a:r>
             <a:endParaRPr lang="en-US" sz="1200" dirty="0"/>
           </a:p>
